--- a/psychologicalReview/figures/powerpointFig.pptx
+++ b/psychologicalReview/figures/powerpointFig.pptx
@@ -262,7 +262,7 @@
           <a:p>
             <a:fld id="{67C0AFF0-F3EA-4DCF-802E-2F5116650474}" type="datetimeFigureOut">
               <a:rPr lang="en-US" smtClean="0"/>
-              <a:t>3/23/2026</a:t>
+              <a:t>5/16/2026</a:t>
             </a:fld>
             <a:endParaRPr lang="en-US"/>
           </a:p>
@@ -460,7 +460,7 @@
           <a:p>
             <a:fld id="{67C0AFF0-F3EA-4DCF-802E-2F5116650474}" type="datetimeFigureOut">
               <a:rPr lang="en-US" smtClean="0"/>
-              <a:t>3/23/2026</a:t>
+              <a:t>5/16/2026</a:t>
             </a:fld>
             <a:endParaRPr lang="en-US"/>
           </a:p>
@@ -668,7 +668,7 @@
           <a:p>
             <a:fld id="{67C0AFF0-F3EA-4DCF-802E-2F5116650474}" type="datetimeFigureOut">
               <a:rPr lang="en-US" smtClean="0"/>
-              <a:t>3/23/2026</a:t>
+              <a:t>5/16/2026</a:t>
             </a:fld>
             <a:endParaRPr lang="en-US"/>
           </a:p>
@@ -866,7 +866,7 @@
           <a:p>
             <a:fld id="{67C0AFF0-F3EA-4DCF-802E-2F5116650474}" type="datetimeFigureOut">
               <a:rPr lang="en-US" smtClean="0"/>
-              <a:t>3/23/2026</a:t>
+              <a:t>5/16/2026</a:t>
             </a:fld>
             <a:endParaRPr lang="en-US"/>
           </a:p>
@@ -1141,7 +1141,7 @@
           <a:p>
             <a:fld id="{67C0AFF0-F3EA-4DCF-802E-2F5116650474}" type="datetimeFigureOut">
               <a:rPr lang="en-US" smtClean="0"/>
-              <a:t>3/23/2026</a:t>
+              <a:t>5/16/2026</a:t>
             </a:fld>
             <a:endParaRPr lang="en-US"/>
           </a:p>
@@ -1406,7 +1406,7 @@
           <a:p>
             <a:fld id="{67C0AFF0-F3EA-4DCF-802E-2F5116650474}" type="datetimeFigureOut">
               <a:rPr lang="en-US" smtClean="0"/>
-              <a:t>3/23/2026</a:t>
+              <a:t>5/16/2026</a:t>
             </a:fld>
             <a:endParaRPr lang="en-US"/>
           </a:p>
@@ -1818,7 +1818,7 @@
           <a:p>
             <a:fld id="{67C0AFF0-F3EA-4DCF-802E-2F5116650474}" type="datetimeFigureOut">
               <a:rPr lang="en-US" smtClean="0"/>
-              <a:t>3/23/2026</a:t>
+              <a:t>5/16/2026</a:t>
             </a:fld>
             <a:endParaRPr lang="en-US"/>
           </a:p>
@@ -1959,7 +1959,7 @@
           <a:p>
             <a:fld id="{67C0AFF0-F3EA-4DCF-802E-2F5116650474}" type="datetimeFigureOut">
               <a:rPr lang="en-US" smtClean="0"/>
-              <a:t>3/23/2026</a:t>
+              <a:t>5/16/2026</a:t>
             </a:fld>
             <a:endParaRPr lang="en-US"/>
           </a:p>
@@ -2072,7 +2072,7 @@
           <a:p>
             <a:fld id="{67C0AFF0-F3EA-4DCF-802E-2F5116650474}" type="datetimeFigureOut">
               <a:rPr lang="en-US" smtClean="0"/>
-              <a:t>3/23/2026</a:t>
+              <a:t>5/16/2026</a:t>
             </a:fld>
             <a:endParaRPr lang="en-US"/>
           </a:p>
@@ -2383,7 +2383,7 @@
           <a:p>
             <a:fld id="{67C0AFF0-F3EA-4DCF-802E-2F5116650474}" type="datetimeFigureOut">
               <a:rPr lang="en-US" smtClean="0"/>
-              <a:t>3/23/2026</a:t>
+              <a:t>5/16/2026</a:t>
             </a:fld>
             <a:endParaRPr lang="en-US"/>
           </a:p>
@@ -2671,7 +2671,7 @@
           <a:p>
             <a:fld id="{67C0AFF0-F3EA-4DCF-802E-2F5116650474}" type="datetimeFigureOut">
               <a:rPr lang="en-US" smtClean="0"/>
-              <a:t>3/23/2026</a:t>
+              <a:t>5/16/2026</a:t>
             </a:fld>
             <a:endParaRPr lang="en-US"/>
           </a:p>
@@ -2912,7 +2912,7 @@
           <a:p>
             <a:fld id="{67C0AFF0-F3EA-4DCF-802E-2F5116650474}" type="datetimeFigureOut">
               <a:rPr lang="en-US" smtClean="0"/>
-              <a:t>3/23/2026</a:t>
+              <a:t>5/16/2026</a:t>
             </a:fld>
             <a:endParaRPr lang="en-US"/>
           </a:p>
@@ -3802,6 +3802,36 @@
           <a:chExt cx="0" cy="0"/>
         </a:xfrm>
       </p:grpSpPr>
+      <p:pic>
+        <p:nvPicPr>
+          <p:cNvPr id="2" name="Picture 1">
+            <a:extLst>
+              <a:ext uri="{FF2B5EF4-FFF2-40B4-BE49-F238E27FC236}">
+                <a16:creationId xmlns:a16="http://schemas.microsoft.com/office/drawing/2014/main" id="{75E3AD5F-526E-8141-AC8A-8AF5B8D1F2EF}"/>
+              </a:ext>
+            </a:extLst>
+          </p:cNvPr>
+          <p:cNvPicPr>
+            <a:picLocks noChangeAspect="1"/>
+          </p:cNvPicPr>
+          <p:nvPr/>
+        </p:nvPicPr>
+        <p:blipFill>
+          <a:blip r:embed="rId2"/>
+          <a:stretch>
+            <a:fillRect/>
+          </a:stretch>
+        </p:blipFill>
+        <p:spPr>
+          <a:xfrm>
+            <a:off x="3664660" y="0"/>
+            <a:ext cx="8186919" cy="6297630"/>
+          </a:xfrm>
+          <a:prstGeom prst="rect">
+            <a:avLst/>
+          </a:prstGeom>
+        </p:spPr>
+      </p:pic>
       <p:sp>
         <p:nvSpPr>
           <p:cNvPr id="6" name="Rectangle 5">
@@ -3816,8 +3846,8 @@
         </p:nvSpPr>
         <p:spPr>
           <a:xfrm>
-            <a:off x="114300" y="1076325"/>
-            <a:ext cx="3548634" cy="4474083"/>
+            <a:off x="114300" y="1076326"/>
+            <a:ext cx="3548634" cy="3768566"/>
           </a:xfrm>
           <a:prstGeom prst="rect">
             <a:avLst/>
@@ -3853,36 +3883,6 @@
           </a:p>
         </p:txBody>
       </p:sp>
-      <p:pic>
-        <p:nvPicPr>
-          <p:cNvPr id="2" name="Picture 1">
-            <a:extLst>
-              <a:ext uri="{FF2B5EF4-FFF2-40B4-BE49-F238E27FC236}">
-                <a16:creationId xmlns:a16="http://schemas.microsoft.com/office/drawing/2014/main" id="{75E3AD5F-526E-8141-AC8A-8AF5B8D1F2EF}"/>
-              </a:ext>
-            </a:extLst>
-          </p:cNvPr>
-          <p:cNvPicPr>
-            <a:picLocks noChangeAspect="1"/>
-          </p:cNvPicPr>
-          <p:nvPr/>
-        </p:nvPicPr>
-        <p:blipFill>
-          <a:blip r:embed="rId2"/>
-          <a:stretch>
-            <a:fillRect/>
-          </a:stretch>
-        </p:blipFill>
-        <p:spPr>
-          <a:xfrm>
-            <a:off x="3664660" y="0"/>
-            <a:ext cx="8186919" cy="6297630"/>
-          </a:xfrm>
-          <a:prstGeom prst="rect">
-            <a:avLst/>
-          </a:prstGeom>
-        </p:spPr>
-      </p:pic>
       <p:sp>
         <p:nvSpPr>
           <p:cNvPr id="3" name="TextBox 2">
@@ -3940,7 +3940,7 @@
         <p:spPr>
           <a:xfrm>
             <a:off x="340421" y="1705570"/>
-            <a:ext cx="3322513" cy="3693319"/>
+            <a:ext cx="3322513" cy="3139321"/>
           </a:xfrm>
           <a:prstGeom prst="rect">
             <a:avLst/>
@@ -4016,18 +4016,6 @@
             <a:r>
               <a:rPr lang="en-US" dirty="0"/>
               <a:t>(11) Surface Property right</a:t>
-            </a:r>
-          </a:p>
-          <a:p>
-            <a:r>
-              <a:rPr lang="en-US" dirty="0"/>
-              <a:t>(12) Looking system</a:t>
-            </a:r>
-          </a:p>
-          <a:p>
-            <a:r>
-              <a:rPr lang="en-US" dirty="0"/>
-              <a:t>(13) Reaching system</a:t>
             </a:r>
           </a:p>
         </p:txBody>
@@ -4145,208 +4133,6 @@
                 </a:solidFill>
               </a:rPr>
               <a:t>Input layer</a:t>
-            </a:r>
-          </a:p>
-        </p:txBody>
-      </p:sp>
-      <p:pic>
-        <p:nvPicPr>
-          <p:cNvPr id="10" name="Picture 9">
-            <a:extLst>
-              <a:ext uri="{FF2B5EF4-FFF2-40B4-BE49-F238E27FC236}">
-                <a16:creationId xmlns:a16="http://schemas.microsoft.com/office/drawing/2014/main" id="{0BD54CD6-BDF2-3005-5942-7A1223EC5F78}"/>
-              </a:ext>
-            </a:extLst>
-          </p:cNvPr>
-          <p:cNvPicPr>
-            <a:picLocks noChangeAspect="1"/>
-          </p:cNvPicPr>
-          <p:nvPr/>
-        </p:nvPicPr>
-        <p:blipFill>
-          <a:blip r:embed="rId3"/>
-          <a:stretch>
-            <a:fillRect/>
-          </a:stretch>
-        </p:blipFill>
-        <p:spPr>
-          <a:xfrm>
-            <a:off x="6248007" y="976298"/>
-            <a:ext cx="171474" cy="200053"/>
-          </a:xfrm>
-          <a:prstGeom prst="rect">
-            <a:avLst/>
-          </a:prstGeom>
-        </p:spPr>
-      </p:pic>
-      <p:pic>
-        <p:nvPicPr>
-          <p:cNvPr id="12" name="Picture 11">
-            <a:extLst>
-              <a:ext uri="{FF2B5EF4-FFF2-40B4-BE49-F238E27FC236}">
-                <a16:creationId xmlns:a16="http://schemas.microsoft.com/office/drawing/2014/main" id="{DB57A1D8-3F76-447F-67ED-C57546339D32}"/>
-              </a:ext>
-            </a:extLst>
-          </p:cNvPr>
-          <p:cNvPicPr>
-            <a:picLocks noChangeAspect="1"/>
-          </p:cNvPicPr>
-          <p:nvPr/>
-        </p:nvPicPr>
-        <p:blipFill>
-          <a:blip r:embed="rId3"/>
-          <a:stretch>
-            <a:fillRect/>
-          </a:stretch>
-        </p:blipFill>
-        <p:spPr>
-          <a:xfrm>
-            <a:off x="8362938" y="976297"/>
-            <a:ext cx="171474" cy="200053"/>
-          </a:xfrm>
-          <a:prstGeom prst="rect">
-            <a:avLst/>
-          </a:prstGeom>
-        </p:spPr>
-      </p:pic>
-      <p:pic>
-        <p:nvPicPr>
-          <p:cNvPr id="14" name="Picture 13">
-            <a:extLst>
-              <a:ext uri="{FF2B5EF4-FFF2-40B4-BE49-F238E27FC236}">
-                <a16:creationId xmlns:a16="http://schemas.microsoft.com/office/drawing/2014/main" id="{6E3D91CE-AF3A-63DF-DB85-C3F92C662449}"/>
-              </a:ext>
-            </a:extLst>
-          </p:cNvPr>
-          <p:cNvPicPr>
-            <a:picLocks noChangeAspect="1"/>
-          </p:cNvPicPr>
-          <p:nvPr/>
-        </p:nvPicPr>
-        <p:blipFill>
-          <a:blip r:embed="rId3"/>
-          <a:stretch>
-            <a:fillRect/>
-          </a:stretch>
-        </p:blipFill>
-        <p:spPr>
-          <a:xfrm>
-            <a:off x="5924526" y="5450381"/>
-            <a:ext cx="171474" cy="200053"/>
-          </a:xfrm>
-          <a:prstGeom prst="rect">
-            <a:avLst/>
-          </a:prstGeom>
-        </p:spPr>
-      </p:pic>
-      <p:pic>
-        <p:nvPicPr>
-          <p:cNvPr id="16" name="Picture 15">
-            <a:extLst>
-              <a:ext uri="{FF2B5EF4-FFF2-40B4-BE49-F238E27FC236}">
-                <a16:creationId xmlns:a16="http://schemas.microsoft.com/office/drawing/2014/main" id="{9DAE8381-AAD8-970E-936B-31FAF3B98B6B}"/>
-              </a:ext>
-            </a:extLst>
-          </p:cNvPr>
-          <p:cNvPicPr>
-            <a:picLocks noChangeAspect="1"/>
-          </p:cNvPicPr>
-          <p:nvPr/>
-        </p:nvPicPr>
-        <p:blipFill>
-          <a:blip r:embed="rId3"/>
-          <a:stretch>
-            <a:fillRect/>
-          </a:stretch>
-        </p:blipFill>
-        <p:spPr>
-          <a:xfrm>
-            <a:off x="8634591" y="5450381"/>
-            <a:ext cx="171474" cy="200053"/>
-          </a:xfrm>
-          <a:prstGeom prst="rect">
-            <a:avLst/>
-          </a:prstGeom>
-        </p:spPr>
-      </p:pic>
-      <p:sp>
-        <p:nvSpPr>
-          <p:cNvPr id="17" name="TextBox 16">
-            <a:extLst>
-              <a:ext uri="{FF2B5EF4-FFF2-40B4-BE49-F238E27FC236}">
-                <a16:creationId xmlns:a16="http://schemas.microsoft.com/office/drawing/2014/main" id="{9974C4AC-6456-C208-00A2-9C018ABC2EEA}"/>
-              </a:ext>
-            </a:extLst>
-          </p:cNvPr>
-          <p:cNvSpPr txBox="1"/>
-          <p:nvPr/>
-        </p:nvSpPr>
-        <p:spPr>
-          <a:xfrm>
-            <a:off x="5816479" y="5697036"/>
-            <a:ext cx="431528" cy="369332"/>
-          </a:xfrm>
-          <a:prstGeom prst="rect">
-            <a:avLst/>
-          </a:prstGeom>
-          <a:solidFill>
-            <a:schemeClr val="tx1"/>
-          </a:solidFill>
-        </p:spPr>
-        <p:txBody>
-          <a:bodyPr wrap="none" rtlCol="0">
-            <a:spAutoFit/>
-          </a:bodyPr>
-          <a:lstStyle/>
-          <a:p>
-            <a:r>
-              <a:rPr lang="en-US" dirty="0">
-                <a:solidFill>
-                  <a:schemeClr val="bg1"/>
-                </a:solidFill>
-              </a:rPr>
-              <a:t>12</a:t>
-            </a:r>
-          </a:p>
-        </p:txBody>
-      </p:sp>
-      <p:sp>
-        <p:nvSpPr>
-          <p:cNvPr id="18" name="TextBox 17">
-            <a:extLst>
-              <a:ext uri="{FF2B5EF4-FFF2-40B4-BE49-F238E27FC236}">
-                <a16:creationId xmlns:a16="http://schemas.microsoft.com/office/drawing/2014/main" id="{7C4A175B-30B5-3123-8FB2-0923D7D7D26A}"/>
-              </a:ext>
-            </a:extLst>
-          </p:cNvPr>
-          <p:cNvSpPr txBox="1"/>
-          <p:nvPr/>
-        </p:nvSpPr>
-        <p:spPr>
-          <a:xfrm>
-            <a:off x="8534412" y="5697036"/>
-            <a:ext cx="431528" cy="369332"/>
-          </a:xfrm>
-          <a:prstGeom prst="rect">
-            <a:avLst/>
-          </a:prstGeom>
-          <a:solidFill>
-            <a:schemeClr val="tx1"/>
-          </a:solidFill>
-        </p:spPr>
-        <p:txBody>
-          <a:bodyPr wrap="none" rtlCol="0">
-            <a:spAutoFit/>
-          </a:bodyPr>
-          <a:lstStyle/>
-          <a:p>
-            <a:r>
-              <a:rPr lang="en-US" dirty="0">
-                <a:solidFill>
-                  <a:schemeClr val="bg1"/>
-                </a:solidFill>
-              </a:rPr>
-              <a:t>13</a:t>
             </a:r>
           </a:p>
         </p:txBody>

--- a/psychologicalReview/figures/powerpointFig.pptx
+++ b/psychologicalReview/figures/powerpointFig.pptx
@@ -2,21 +2,24 @@
 <file path=ppt/presentation.xml><?xml version="1.0" encoding="utf-8"?>
 <p:presentation xmlns:a="http://schemas.openxmlformats.org/drawingml/2006/main" xmlns:r="http://schemas.openxmlformats.org/officeDocument/2006/relationships" xmlns:p="http://schemas.openxmlformats.org/presentationml/2006/main" saveSubsetFonts="1">
   <p:sldMasterIdLst>
-    <p:sldMasterId id="2147483648" r:id="rId1"/>
+    <p:sldMasterId id="2147483660" r:id="rId1"/>
   </p:sldMasterIdLst>
+  <p:notesMasterIdLst>
+    <p:notesMasterId r:id="rId6"/>
+  </p:notesMasterIdLst>
   <p:sldIdLst>
     <p:sldId id="256" r:id="rId2"/>
     <p:sldId id="257" r:id="rId3"/>
     <p:sldId id="258" r:id="rId4"/>
     <p:sldId id="259" r:id="rId5"/>
   </p:sldIdLst>
-  <p:sldSz cx="12192000" cy="6858000"/>
+  <p:sldSz cx="16200438" cy="6858000"/>
   <p:notesSz cx="6858000" cy="9144000"/>
   <p:defaultTextStyle>
     <a:defPPr>
       <a:defRPr lang="en-US"/>
     </a:defPPr>
-    <a:lvl1pPr marL="0" algn="l" defTabSz="914400" rtl="0" eaLnBrk="1" latinLnBrk="0" hangingPunct="1">
+    <a:lvl1pPr marL="0" algn="l" defTabSz="457200" rtl="0" eaLnBrk="1" latinLnBrk="0" hangingPunct="1">
       <a:defRPr sz="1800" kern="1200">
         <a:solidFill>
           <a:schemeClr val="tx1"/>
@@ -26,7 +29,7 @@
         <a:cs typeface="+mn-cs"/>
       </a:defRPr>
     </a:lvl1pPr>
-    <a:lvl2pPr marL="457200" algn="l" defTabSz="914400" rtl="0" eaLnBrk="1" latinLnBrk="0" hangingPunct="1">
+    <a:lvl2pPr marL="457200" algn="l" defTabSz="457200" rtl="0" eaLnBrk="1" latinLnBrk="0" hangingPunct="1">
       <a:defRPr sz="1800" kern="1200">
         <a:solidFill>
           <a:schemeClr val="tx1"/>
@@ -36,7 +39,7 @@
         <a:cs typeface="+mn-cs"/>
       </a:defRPr>
     </a:lvl2pPr>
-    <a:lvl3pPr marL="914400" algn="l" defTabSz="914400" rtl="0" eaLnBrk="1" latinLnBrk="0" hangingPunct="1">
+    <a:lvl3pPr marL="914400" algn="l" defTabSz="457200" rtl="0" eaLnBrk="1" latinLnBrk="0" hangingPunct="1">
       <a:defRPr sz="1800" kern="1200">
         <a:solidFill>
           <a:schemeClr val="tx1"/>
@@ -46,7 +49,7 @@
         <a:cs typeface="+mn-cs"/>
       </a:defRPr>
     </a:lvl3pPr>
-    <a:lvl4pPr marL="1371600" algn="l" defTabSz="914400" rtl="0" eaLnBrk="1" latinLnBrk="0" hangingPunct="1">
+    <a:lvl4pPr marL="1371600" algn="l" defTabSz="457200" rtl="0" eaLnBrk="1" latinLnBrk="0" hangingPunct="1">
       <a:defRPr sz="1800" kern="1200">
         <a:solidFill>
           <a:schemeClr val="tx1"/>
@@ -56,7 +59,7 @@
         <a:cs typeface="+mn-cs"/>
       </a:defRPr>
     </a:lvl4pPr>
-    <a:lvl5pPr marL="1828800" algn="l" defTabSz="914400" rtl="0" eaLnBrk="1" latinLnBrk="0" hangingPunct="1">
+    <a:lvl5pPr marL="1828800" algn="l" defTabSz="457200" rtl="0" eaLnBrk="1" latinLnBrk="0" hangingPunct="1">
       <a:defRPr sz="1800" kern="1200">
         <a:solidFill>
           <a:schemeClr val="tx1"/>
@@ -66,7 +69,7 @@
         <a:cs typeface="+mn-cs"/>
       </a:defRPr>
     </a:lvl5pPr>
-    <a:lvl6pPr marL="2286000" algn="l" defTabSz="914400" rtl="0" eaLnBrk="1" latinLnBrk="0" hangingPunct="1">
+    <a:lvl6pPr marL="2286000" algn="l" defTabSz="457200" rtl="0" eaLnBrk="1" latinLnBrk="0" hangingPunct="1">
       <a:defRPr sz="1800" kern="1200">
         <a:solidFill>
           <a:schemeClr val="tx1"/>
@@ -76,7 +79,7 @@
         <a:cs typeface="+mn-cs"/>
       </a:defRPr>
     </a:lvl6pPr>
-    <a:lvl7pPr marL="2743200" algn="l" defTabSz="914400" rtl="0" eaLnBrk="1" latinLnBrk="0" hangingPunct="1">
+    <a:lvl7pPr marL="2743200" algn="l" defTabSz="457200" rtl="0" eaLnBrk="1" latinLnBrk="0" hangingPunct="1">
       <a:defRPr sz="1800" kern="1200">
         <a:solidFill>
           <a:schemeClr val="tx1"/>
@@ -86,7 +89,7 @@
         <a:cs typeface="+mn-cs"/>
       </a:defRPr>
     </a:lvl7pPr>
-    <a:lvl8pPr marL="3200400" algn="l" defTabSz="914400" rtl="0" eaLnBrk="1" latinLnBrk="0" hangingPunct="1">
+    <a:lvl8pPr marL="3200400" algn="l" defTabSz="457200" rtl="0" eaLnBrk="1" latinLnBrk="0" hangingPunct="1">
       <a:defRPr sz="1800" kern="1200">
         <a:solidFill>
           <a:schemeClr val="tx1"/>
@@ -96,7 +99,7 @@
         <a:cs typeface="+mn-cs"/>
       </a:defRPr>
     </a:lvl8pPr>
-    <a:lvl9pPr marL="3657600" algn="l" defTabSz="914400" rtl="0" eaLnBrk="1" latinLnBrk="0" hangingPunct="1">
+    <a:lvl9pPr marL="3657600" algn="l" defTabSz="457200" rtl="0" eaLnBrk="1" latinLnBrk="0" hangingPunct="1">
       <a:defRPr sz="1800" kern="1200">
         <a:solidFill>
           <a:schemeClr val="tx1"/>
@@ -113,6 +116,442 @@
     </p:ext>
   </p:extLst>
 </p:presentation>
+</file>
+
+<file path=ppt/notesMasters/notesMaster1.xml><?xml version="1.0" encoding="utf-8"?>
+<p:notesMaster xmlns:a="http://schemas.openxmlformats.org/drawingml/2006/main" xmlns:r="http://schemas.openxmlformats.org/officeDocument/2006/relationships" xmlns:p="http://schemas.openxmlformats.org/presentationml/2006/main">
+  <p:cSld>
+    <p:bg>
+      <p:bgRef idx="1001">
+        <a:schemeClr val="bg1"/>
+      </p:bgRef>
+    </p:bg>
+    <p:spTree>
+      <p:nvGrpSpPr>
+        <p:cNvPr id="1" name=""/>
+        <p:cNvGrpSpPr/>
+        <p:nvPr/>
+      </p:nvGrpSpPr>
+      <p:grpSpPr>
+        <a:xfrm>
+          <a:off x="0" y="0"/>
+          <a:ext cx="0" cy="0"/>
+          <a:chOff x="0" y="0"/>
+          <a:chExt cx="0" cy="0"/>
+        </a:xfrm>
+      </p:grpSpPr>
+      <p:sp>
+        <p:nvSpPr>
+          <p:cNvPr id="2" name="Header Placeholder 1"/>
+          <p:cNvSpPr>
+            <a:spLocks noGrp="1"/>
+          </p:cNvSpPr>
+          <p:nvPr>
+            <p:ph type="hdr" sz="quarter"/>
+          </p:nvPr>
+        </p:nvSpPr>
+        <p:spPr>
+          <a:xfrm>
+            <a:off x="0" y="0"/>
+            <a:ext cx="2971800" cy="458788"/>
+          </a:xfrm>
+          <a:prstGeom prst="rect">
+            <a:avLst/>
+          </a:prstGeom>
+        </p:spPr>
+        <p:txBody>
+          <a:bodyPr vert="horz" lIns="91440" tIns="45720" rIns="91440" bIns="45720" rtlCol="0"/>
+          <a:lstStyle>
+            <a:lvl1pPr algn="l">
+              <a:defRPr sz="1200"/>
+            </a:lvl1pPr>
+          </a:lstStyle>
+          <a:p>
+            <a:endParaRPr lang="en-US"/>
+          </a:p>
+        </p:txBody>
+      </p:sp>
+      <p:sp>
+        <p:nvSpPr>
+          <p:cNvPr id="3" name="Date Placeholder 2"/>
+          <p:cNvSpPr>
+            <a:spLocks noGrp="1"/>
+          </p:cNvSpPr>
+          <p:nvPr>
+            <p:ph type="dt" idx="1"/>
+          </p:nvPr>
+        </p:nvSpPr>
+        <p:spPr>
+          <a:xfrm>
+            <a:off x="3884613" y="0"/>
+            <a:ext cx="2971800" cy="458788"/>
+          </a:xfrm>
+          <a:prstGeom prst="rect">
+            <a:avLst/>
+          </a:prstGeom>
+        </p:spPr>
+        <p:txBody>
+          <a:bodyPr vert="horz" lIns="91440" tIns="45720" rIns="91440" bIns="45720" rtlCol="0"/>
+          <a:lstStyle>
+            <a:lvl1pPr algn="r">
+              <a:defRPr sz="1200"/>
+            </a:lvl1pPr>
+          </a:lstStyle>
+          <a:p>
+            <a:fld id="{7C17E0DF-306C-45FF-85CE-407F7FEE61F5}" type="datetimeFigureOut">
+              <a:rPr lang="en-US" smtClean="0"/>
+              <a:t>6/5/2026</a:t>
+            </a:fld>
+            <a:endParaRPr lang="en-US"/>
+          </a:p>
+        </p:txBody>
+      </p:sp>
+      <p:sp>
+        <p:nvSpPr>
+          <p:cNvPr id="4" name="Slide Image Placeholder 3"/>
+          <p:cNvSpPr>
+            <a:spLocks noGrp="1" noRot="1" noChangeAspect="1"/>
+          </p:cNvSpPr>
+          <p:nvPr>
+            <p:ph type="sldImg" idx="2"/>
+          </p:nvPr>
+        </p:nvSpPr>
+        <p:spPr>
+          <a:xfrm>
+            <a:off x="-215900" y="1143000"/>
+            <a:ext cx="7289800" cy="3086100"/>
+          </a:xfrm>
+          <a:prstGeom prst="rect">
+            <a:avLst/>
+          </a:prstGeom>
+          <a:noFill/>
+          <a:ln w="12700">
+            <a:solidFill>
+              <a:prstClr val="black"/>
+            </a:solidFill>
+          </a:ln>
+        </p:spPr>
+        <p:txBody>
+          <a:bodyPr vert="horz" lIns="91440" tIns="45720" rIns="91440" bIns="45720" rtlCol="0" anchor="ctr"/>
+          <a:lstStyle/>
+          <a:p>
+            <a:endParaRPr lang="en-US"/>
+          </a:p>
+        </p:txBody>
+      </p:sp>
+      <p:sp>
+        <p:nvSpPr>
+          <p:cNvPr id="5" name="Notes Placeholder 4"/>
+          <p:cNvSpPr>
+            <a:spLocks noGrp="1"/>
+          </p:cNvSpPr>
+          <p:nvPr>
+            <p:ph type="body" sz="quarter" idx="3"/>
+          </p:nvPr>
+        </p:nvSpPr>
+        <p:spPr>
+          <a:xfrm>
+            <a:off x="685800" y="4400550"/>
+            <a:ext cx="5486400" cy="3600450"/>
+          </a:xfrm>
+          <a:prstGeom prst="rect">
+            <a:avLst/>
+          </a:prstGeom>
+        </p:spPr>
+        <p:txBody>
+          <a:bodyPr vert="horz" lIns="91440" tIns="45720" rIns="91440" bIns="45720" rtlCol="0"/>
+          <a:lstStyle/>
+          <a:p>
+            <a:pPr lvl="0"/>
+            <a:r>
+              <a:rPr lang="en-US"/>
+              <a:t>Click to edit Master text styles</a:t>
+            </a:r>
+          </a:p>
+          <a:p>
+            <a:pPr lvl="1"/>
+            <a:r>
+              <a:rPr lang="en-US"/>
+              <a:t>Second level</a:t>
+            </a:r>
+          </a:p>
+          <a:p>
+            <a:pPr lvl="2"/>
+            <a:r>
+              <a:rPr lang="en-US"/>
+              <a:t>Third level</a:t>
+            </a:r>
+          </a:p>
+          <a:p>
+            <a:pPr lvl="3"/>
+            <a:r>
+              <a:rPr lang="en-US"/>
+              <a:t>Fourth level</a:t>
+            </a:r>
+          </a:p>
+          <a:p>
+            <a:pPr lvl="4"/>
+            <a:r>
+              <a:rPr lang="en-US"/>
+              <a:t>Fifth level</a:t>
+            </a:r>
+          </a:p>
+        </p:txBody>
+      </p:sp>
+      <p:sp>
+        <p:nvSpPr>
+          <p:cNvPr id="6" name="Footer Placeholder 5"/>
+          <p:cNvSpPr>
+            <a:spLocks noGrp="1"/>
+          </p:cNvSpPr>
+          <p:nvPr>
+            <p:ph type="ftr" sz="quarter" idx="4"/>
+          </p:nvPr>
+        </p:nvSpPr>
+        <p:spPr>
+          <a:xfrm>
+            <a:off x="0" y="8685213"/>
+            <a:ext cx="2971800" cy="458787"/>
+          </a:xfrm>
+          <a:prstGeom prst="rect">
+            <a:avLst/>
+          </a:prstGeom>
+        </p:spPr>
+        <p:txBody>
+          <a:bodyPr vert="horz" lIns="91440" tIns="45720" rIns="91440" bIns="45720" rtlCol="0" anchor="b"/>
+          <a:lstStyle>
+            <a:lvl1pPr algn="l">
+              <a:defRPr sz="1200"/>
+            </a:lvl1pPr>
+          </a:lstStyle>
+          <a:p>
+            <a:endParaRPr lang="en-US"/>
+          </a:p>
+        </p:txBody>
+      </p:sp>
+      <p:sp>
+        <p:nvSpPr>
+          <p:cNvPr id="7" name="Slide Number Placeholder 6"/>
+          <p:cNvSpPr>
+            <a:spLocks noGrp="1"/>
+          </p:cNvSpPr>
+          <p:nvPr>
+            <p:ph type="sldNum" sz="quarter" idx="5"/>
+          </p:nvPr>
+        </p:nvSpPr>
+        <p:spPr>
+          <a:xfrm>
+            <a:off x="3884613" y="8685213"/>
+            <a:ext cx="2971800" cy="458787"/>
+          </a:xfrm>
+          <a:prstGeom prst="rect">
+            <a:avLst/>
+          </a:prstGeom>
+        </p:spPr>
+        <p:txBody>
+          <a:bodyPr vert="horz" lIns="91440" tIns="45720" rIns="91440" bIns="45720" rtlCol="0" anchor="b"/>
+          <a:lstStyle>
+            <a:lvl1pPr algn="r">
+              <a:defRPr sz="1200"/>
+            </a:lvl1pPr>
+          </a:lstStyle>
+          <a:p>
+            <a:fld id="{D89B8AD9-109B-477E-9298-0804126A09D7}" type="slidenum">
+              <a:rPr lang="en-US" smtClean="0"/>
+              <a:t>‹#›</a:t>
+            </a:fld>
+            <a:endParaRPr lang="en-US"/>
+          </a:p>
+        </p:txBody>
+      </p:sp>
+    </p:spTree>
+    <p:extLst>
+      <p:ext uri="{BB962C8B-B14F-4D97-AF65-F5344CB8AC3E}">
+        <p14:creationId xmlns:p14="http://schemas.microsoft.com/office/powerpoint/2010/main" val="1461273172"/>
+      </p:ext>
+    </p:extLst>
+  </p:cSld>
+  <p:clrMap bg1="lt1" tx1="dk1" bg2="lt2" tx2="dk2" accent1="accent1" accent2="accent2" accent3="accent3" accent4="accent4" accent5="accent5" accent6="accent6" hlink="hlink" folHlink="folHlink"/>
+  <p:notesStyle>
+    <a:lvl1pPr marL="0" algn="l" defTabSz="914400" rtl="0" eaLnBrk="1" latinLnBrk="0" hangingPunct="1">
+      <a:defRPr sz="1200" kern="1200">
+        <a:solidFill>
+          <a:schemeClr val="tx1"/>
+        </a:solidFill>
+        <a:latin typeface="+mn-lt"/>
+        <a:ea typeface="+mn-ea"/>
+        <a:cs typeface="+mn-cs"/>
+      </a:defRPr>
+    </a:lvl1pPr>
+    <a:lvl2pPr marL="457200" algn="l" defTabSz="914400" rtl="0" eaLnBrk="1" latinLnBrk="0" hangingPunct="1">
+      <a:defRPr sz="1200" kern="1200">
+        <a:solidFill>
+          <a:schemeClr val="tx1"/>
+        </a:solidFill>
+        <a:latin typeface="+mn-lt"/>
+        <a:ea typeface="+mn-ea"/>
+        <a:cs typeface="+mn-cs"/>
+      </a:defRPr>
+    </a:lvl2pPr>
+    <a:lvl3pPr marL="914400" algn="l" defTabSz="914400" rtl="0" eaLnBrk="1" latinLnBrk="0" hangingPunct="1">
+      <a:defRPr sz="1200" kern="1200">
+        <a:solidFill>
+          <a:schemeClr val="tx1"/>
+        </a:solidFill>
+        <a:latin typeface="+mn-lt"/>
+        <a:ea typeface="+mn-ea"/>
+        <a:cs typeface="+mn-cs"/>
+      </a:defRPr>
+    </a:lvl3pPr>
+    <a:lvl4pPr marL="1371600" algn="l" defTabSz="914400" rtl="0" eaLnBrk="1" latinLnBrk="0" hangingPunct="1">
+      <a:defRPr sz="1200" kern="1200">
+        <a:solidFill>
+          <a:schemeClr val="tx1"/>
+        </a:solidFill>
+        <a:latin typeface="+mn-lt"/>
+        <a:ea typeface="+mn-ea"/>
+        <a:cs typeface="+mn-cs"/>
+      </a:defRPr>
+    </a:lvl4pPr>
+    <a:lvl5pPr marL="1828800" algn="l" defTabSz="914400" rtl="0" eaLnBrk="1" latinLnBrk="0" hangingPunct="1">
+      <a:defRPr sz="1200" kern="1200">
+        <a:solidFill>
+          <a:schemeClr val="tx1"/>
+        </a:solidFill>
+        <a:latin typeface="+mn-lt"/>
+        <a:ea typeface="+mn-ea"/>
+        <a:cs typeface="+mn-cs"/>
+      </a:defRPr>
+    </a:lvl5pPr>
+    <a:lvl6pPr marL="2286000" algn="l" defTabSz="914400" rtl="0" eaLnBrk="1" latinLnBrk="0" hangingPunct="1">
+      <a:defRPr sz="1200" kern="1200">
+        <a:solidFill>
+          <a:schemeClr val="tx1"/>
+        </a:solidFill>
+        <a:latin typeface="+mn-lt"/>
+        <a:ea typeface="+mn-ea"/>
+        <a:cs typeface="+mn-cs"/>
+      </a:defRPr>
+    </a:lvl6pPr>
+    <a:lvl7pPr marL="2743200" algn="l" defTabSz="914400" rtl="0" eaLnBrk="1" latinLnBrk="0" hangingPunct="1">
+      <a:defRPr sz="1200" kern="1200">
+        <a:solidFill>
+          <a:schemeClr val="tx1"/>
+        </a:solidFill>
+        <a:latin typeface="+mn-lt"/>
+        <a:ea typeface="+mn-ea"/>
+        <a:cs typeface="+mn-cs"/>
+      </a:defRPr>
+    </a:lvl7pPr>
+    <a:lvl8pPr marL="3200400" algn="l" defTabSz="914400" rtl="0" eaLnBrk="1" latinLnBrk="0" hangingPunct="1">
+      <a:defRPr sz="1200" kern="1200">
+        <a:solidFill>
+          <a:schemeClr val="tx1"/>
+        </a:solidFill>
+        <a:latin typeface="+mn-lt"/>
+        <a:ea typeface="+mn-ea"/>
+        <a:cs typeface="+mn-cs"/>
+      </a:defRPr>
+    </a:lvl8pPr>
+    <a:lvl9pPr marL="3657600" algn="l" defTabSz="914400" rtl="0" eaLnBrk="1" latinLnBrk="0" hangingPunct="1">
+      <a:defRPr sz="1200" kern="1200">
+        <a:solidFill>
+          <a:schemeClr val="tx1"/>
+        </a:solidFill>
+        <a:latin typeface="+mn-lt"/>
+        <a:ea typeface="+mn-ea"/>
+        <a:cs typeface="+mn-cs"/>
+      </a:defRPr>
+    </a:lvl9pPr>
+  </p:notesStyle>
+</p:notesMaster>
+</file>
+
+<file path=ppt/notesSlides/notesSlide1.xml><?xml version="1.0" encoding="utf-8"?>
+<p:notes xmlns:a="http://schemas.openxmlformats.org/drawingml/2006/main" xmlns:r="http://schemas.openxmlformats.org/officeDocument/2006/relationships" xmlns:p="http://schemas.openxmlformats.org/presentationml/2006/main">
+  <p:cSld>
+    <p:spTree>
+      <p:nvGrpSpPr>
+        <p:cNvPr id="1" name=""/>
+        <p:cNvGrpSpPr/>
+        <p:nvPr/>
+      </p:nvGrpSpPr>
+      <p:grpSpPr>
+        <a:xfrm>
+          <a:off x="0" y="0"/>
+          <a:ext cx="0" cy="0"/>
+          <a:chOff x="0" y="0"/>
+          <a:chExt cx="0" cy="0"/>
+        </a:xfrm>
+      </p:grpSpPr>
+      <p:sp>
+        <p:nvSpPr>
+          <p:cNvPr id="2" name="Slide Image Placeholder 1"/>
+          <p:cNvSpPr>
+            <a:spLocks noGrp="1" noRot="1" noChangeAspect="1"/>
+          </p:cNvSpPr>
+          <p:nvPr>
+            <p:ph type="sldImg"/>
+          </p:nvPr>
+        </p:nvSpPr>
+        <p:spPr/>
+      </p:sp>
+      <p:sp>
+        <p:nvSpPr>
+          <p:cNvPr id="3" name="Notes Placeholder 2"/>
+          <p:cNvSpPr>
+            <a:spLocks noGrp="1"/>
+          </p:cNvSpPr>
+          <p:nvPr>
+            <p:ph type="body" idx="1"/>
+          </p:nvPr>
+        </p:nvSpPr>
+        <p:spPr/>
+        <p:txBody>
+          <a:bodyPr/>
+          <a:lstStyle/>
+          <a:p>
+            <a:r>
+              <a:rPr lang="en-US" dirty="0"/>
+              <a:t>Table 1. Input and output groups in ALIAS and the semantic interpretation of their units.</a:t>
+            </a:r>
+          </a:p>
+        </p:txBody>
+      </p:sp>
+      <p:sp>
+        <p:nvSpPr>
+          <p:cNvPr id="4" name="Slide Number Placeholder 3"/>
+          <p:cNvSpPr>
+            <a:spLocks noGrp="1"/>
+          </p:cNvSpPr>
+          <p:nvPr>
+            <p:ph type="sldNum" sz="quarter" idx="5"/>
+          </p:nvPr>
+        </p:nvSpPr>
+        <p:spPr/>
+        <p:txBody>
+          <a:bodyPr/>
+          <a:lstStyle/>
+          <a:p>
+            <a:fld id="{D89B8AD9-109B-477E-9298-0804126A09D7}" type="slidenum">
+              <a:rPr lang="en-US" smtClean="0"/>
+              <a:t>3</a:t>
+            </a:fld>
+            <a:endParaRPr lang="en-US"/>
+          </a:p>
+        </p:txBody>
+      </p:sp>
+    </p:spTree>
+    <p:extLst>
+      <p:ext uri="{BB962C8B-B14F-4D97-AF65-F5344CB8AC3E}">
+        <p14:creationId xmlns:p14="http://schemas.microsoft.com/office/powerpoint/2010/main" val="863173509"/>
+      </p:ext>
+    </p:extLst>
+  </p:cSld>
+  <p:clrMapOvr>
+    <a:masterClrMapping/>
+  </p:clrMapOvr>
+</p:notes>
 </file>
 
 <file path=ppt/slideLayouts/slideLayout1.xml><?xml version="1.0" encoding="utf-8"?>
@@ -134,13 +573,7 @@
       </p:grpSpPr>
       <p:sp>
         <p:nvSpPr>
-          <p:cNvPr id="2" name="Title 1">
-            <a:extLst>
-              <a:ext uri="{FF2B5EF4-FFF2-40B4-BE49-F238E27FC236}">
-                <a16:creationId xmlns:a16="http://schemas.microsoft.com/office/drawing/2014/main" id="{96B5185E-D07D-C460-8955-7E6CBB1181AE}"/>
-              </a:ext>
-            </a:extLst>
-          </p:cNvPr>
+          <p:cNvPr id="2" name="Title 1"/>
           <p:cNvSpPr>
             <a:spLocks noGrp="1"/>
           </p:cNvSpPr>
@@ -150,8 +583,8 @@
         </p:nvSpPr>
         <p:spPr>
           <a:xfrm>
-            <a:off x="1524000" y="1122363"/>
-            <a:ext cx="9144000" cy="2387600"/>
+            <a:off x="2025055" y="1122363"/>
+            <a:ext cx="12150329" cy="2387600"/>
           </a:xfrm>
         </p:spPr>
         <p:txBody>
@@ -166,18 +599,13 @@
               <a:rPr lang="en-US"/>
               <a:t>Click to edit Master title style</a:t>
             </a:r>
+            <a:endParaRPr lang="en-US" dirty="0"/>
           </a:p>
         </p:txBody>
       </p:sp>
       <p:sp>
         <p:nvSpPr>
-          <p:cNvPr id="3" name="Subtitle 2">
-            <a:extLst>
-              <a:ext uri="{FF2B5EF4-FFF2-40B4-BE49-F238E27FC236}">
-                <a16:creationId xmlns:a16="http://schemas.microsoft.com/office/drawing/2014/main" id="{4E64F44A-079E-F6A8-6192-C8E6CB134309}"/>
-              </a:ext>
-            </a:extLst>
-          </p:cNvPr>
+          <p:cNvPr id="3" name="Subtitle 2"/>
           <p:cNvSpPr>
             <a:spLocks noGrp="1"/>
           </p:cNvSpPr>
@@ -187,8 +615,8 @@
         </p:nvSpPr>
         <p:spPr>
           <a:xfrm>
-            <a:off x="1524000" y="3602038"/>
-            <a:ext cx="9144000" cy="1655762"/>
+            <a:off x="2025055" y="3602038"/>
+            <a:ext cx="12150329" cy="1655762"/>
           </a:xfrm>
         </p:spPr>
         <p:txBody>
@@ -236,18 +664,13 @@
               <a:rPr lang="en-US"/>
               <a:t>Click to edit Master subtitle style</a:t>
             </a:r>
+            <a:endParaRPr lang="en-US" dirty="0"/>
           </a:p>
         </p:txBody>
       </p:sp>
       <p:sp>
         <p:nvSpPr>
-          <p:cNvPr id="4" name="Date Placeholder 3">
-            <a:extLst>
-              <a:ext uri="{FF2B5EF4-FFF2-40B4-BE49-F238E27FC236}">
-                <a16:creationId xmlns:a16="http://schemas.microsoft.com/office/drawing/2014/main" id="{CE82BA3E-A274-F096-E935-988D197EFAF9}"/>
-              </a:ext>
-            </a:extLst>
-          </p:cNvPr>
+          <p:cNvPr id="4" name="Date Placeholder 3"/>
           <p:cNvSpPr>
             <a:spLocks noGrp="1"/>
           </p:cNvSpPr>
@@ -262,7 +685,7 @@
           <a:p>
             <a:fld id="{67C0AFF0-F3EA-4DCF-802E-2F5116650474}" type="datetimeFigureOut">
               <a:rPr lang="en-US" smtClean="0"/>
-              <a:t>5/16/2026</a:t>
+              <a:t>6/5/2026</a:t>
             </a:fld>
             <a:endParaRPr lang="en-US"/>
           </a:p>
@@ -270,13 +693,7 @@
       </p:sp>
       <p:sp>
         <p:nvSpPr>
-          <p:cNvPr id="5" name="Footer Placeholder 4">
-            <a:extLst>
-              <a:ext uri="{FF2B5EF4-FFF2-40B4-BE49-F238E27FC236}">
-                <a16:creationId xmlns:a16="http://schemas.microsoft.com/office/drawing/2014/main" id="{1BB2D981-1671-63CE-6BD4-CA2DFABBAB85}"/>
-              </a:ext>
-            </a:extLst>
-          </p:cNvPr>
+          <p:cNvPr id="5" name="Footer Placeholder 4"/>
           <p:cNvSpPr>
             <a:spLocks noGrp="1"/>
           </p:cNvSpPr>
@@ -295,13 +712,7 @@
       </p:sp>
       <p:sp>
         <p:nvSpPr>
-          <p:cNvPr id="6" name="Slide Number Placeholder 5">
-            <a:extLst>
-              <a:ext uri="{FF2B5EF4-FFF2-40B4-BE49-F238E27FC236}">
-                <a16:creationId xmlns:a16="http://schemas.microsoft.com/office/drawing/2014/main" id="{848E9850-B3ED-8E83-2F83-4421A5F1AB91}"/>
-              </a:ext>
-            </a:extLst>
-          </p:cNvPr>
+          <p:cNvPr id="6" name="Slide Number Placeholder 5"/>
           <p:cNvSpPr>
             <a:spLocks noGrp="1"/>
           </p:cNvSpPr>
@@ -325,7 +736,7 @@
     </p:spTree>
     <p:extLst>
       <p:ext uri="{BB962C8B-B14F-4D97-AF65-F5344CB8AC3E}">
-        <p14:creationId xmlns:p14="http://schemas.microsoft.com/office/powerpoint/2010/main" val="591339201"/>
+        <p14:creationId xmlns:p14="http://schemas.microsoft.com/office/powerpoint/2010/main" val="3708547696"/>
       </p:ext>
     </p:extLst>
   </p:cSld>
@@ -354,13 +765,7 @@
       </p:grpSpPr>
       <p:sp>
         <p:nvSpPr>
-          <p:cNvPr id="2" name="Title 1">
-            <a:extLst>
-              <a:ext uri="{FF2B5EF4-FFF2-40B4-BE49-F238E27FC236}">
-                <a16:creationId xmlns:a16="http://schemas.microsoft.com/office/drawing/2014/main" id="{56DBD0E4-D645-8E66-54CE-8DE152C48B89}"/>
-              </a:ext>
-            </a:extLst>
-          </p:cNvPr>
+          <p:cNvPr id="2" name="Title 1"/>
           <p:cNvSpPr>
             <a:spLocks noGrp="1"/>
           </p:cNvSpPr>
@@ -377,18 +782,13 @@
               <a:rPr lang="en-US"/>
               <a:t>Click to edit Master title style</a:t>
             </a:r>
+            <a:endParaRPr lang="en-US" dirty="0"/>
           </a:p>
         </p:txBody>
       </p:sp>
       <p:sp>
         <p:nvSpPr>
-          <p:cNvPr id="3" name="Vertical Text Placeholder 2">
-            <a:extLst>
-              <a:ext uri="{FF2B5EF4-FFF2-40B4-BE49-F238E27FC236}">
-                <a16:creationId xmlns:a16="http://schemas.microsoft.com/office/drawing/2014/main" id="{2980CADF-4C63-7DB1-EA53-DF8461787DB0}"/>
-              </a:ext>
-            </a:extLst>
-          </p:cNvPr>
+          <p:cNvPr id="3" name="Vertical Text Placeholder 2"/>
           <p:cNvSpPr>
             <a:spLocks noGrp="1"/>
           </p:cNvSpPr>
@@ -434,18 +834,13 @@
               <a:rPr lang="en-US"/>
               <a:t>Fifth level</a:t>
             </a:r>
+            <a:endParaRPr lang="en-US" dirty="0"/>
           </a:p>
         </p:txBody>
       </p:sp>
       <p:sp>
         <p:nvSpPr>
-          <p:cNvPr id="4" name="Date Placeholder 3">
-            <a:extLst>
-              <a:ext uri="{FF2B5EF4-FFF2-40B4-BE49-F238E27FC236}">
-                <a16:creationId xmlns:a16="http://schemas.microsoft.com/office/drawing/2014/main" id="{FA05FA86-3627-9549-0DF8-94C73FCB1250}"/>
-              </a:ext>
-            </a:extLst>
-          </p:cNvPr>
+          <p:cNvPr id="4" name="Date Placeholder 3"/>
           <p:cNvSpPr>
             <a:spLocks noGrp="1"/>
           </p:cNvSpPr>
@@ -460,7 +855,7 @@
           <a:p>
             <a:fld id="{67C0AFF0-F3EA-4DCF-802E-2F5116650474}" type="datetimeFigureOut">
               <a:rPr lang="en-US" smtClean="0"/>
-              <a:t>5/16/2026</a:t>
+              <a:t>6/5/2026</a:t>
             </a:fld>
             <a:endParaRPr lang="en-US"/>
           </a:p>
@@ -468,13 +863,7 @@
       </p:sp>
       <p:sp>
         <p:nvSpPr>
-          <p:cNvPr id="5" name="Footer Placeholder 4">
-            <a:extLst>
-              <a:ext uri="{FF2B5EF4-FFF2-40B4-BE49-F238E27FC236}">
-                <a16:creationId xmlns:a16="http://schemas.microsoft.com/office/drawing/2014/main" id="{94BEE4F2-2969-863A-2357-A4C73FB169D6}"/>
-              </a:ext>
-            </a:extLst>
-          </p:cNvPr>
+          <p:cNvPr id="5" name="Footer Placeholder 4"/>
           <p:cNvSpPr>
             <a:spLocks noGrp="1"/>
           </p:cNvSpPr>
@@ -493,13 +882,7 @@
       </p:sp>
       <p:sp>
         <p:nvSpPr>
-          <p:cNvPr id="6" name="Slide Number Placeholder 5">
-            <a:extLst>
-              <a:ext uri="{FF2B5EF4-FFF2-40B4-BE49-F238E27FC236}">
-                <a16:creationId xmlns:a16="http://schemas.microsoft.com/office/drawing/2014/main" id="{71E4F8F1-659F-3012-2951-85F4DEC794F6}"/>
-              </a:ext>
-            </a:extLst>
-          </p:cNvPr>
+          <p:cNvPr id="6" name="Slide Number Placeholder 5"/>
           <p:cNvSpPr>
             <a:spLocks noGrp="1"/>
           </p:cNvSpPr>
@@ -523,7 +906,7 @@
     </p:spTree>
     <p:extLst>
       <p:ext uri="{BB962C8B-B14F-4D97-AF65-F5344CB8AC3E}">
-        <p14:creationId xmlns:p14="http://schemas.microsoft.com/office/powerpoint/2010/main" val="99913993"/>
+        <p14:creationId xmlns:p14="http://schemas.microsoft.com/office/powerpoint/2010/main" val="4039571471"/>
       </p:ext>
     </p:extLst>
   </p:cSld>
@@ -552,13 +935,7 @@
       </p:grpSpPr>
       <p:sp>
         <p:nvSpPr>
-          <p:cNvPr id="2" name="Vertical Title 1">
-            <a:extLst>
-              <a:ext uri="{FF2B5EF4-FFF2-40B4-BE49-F238E27FC236}">
-                <a16:creationId xmlns:a16="http://schemas.microsoft.com/office/drawing/2014/main" id="{37D6210E-DFA5-7F6D-A4E8-DFC11B598E24}"/>
-              </a:ext>
-            </a:extLst>
-          </p:cNvPr>
+          <p:cNvPr id="2" name="Vertical Title 1"/>
           <p:cNvSpPr>
             <a:spLocks noGrp="1"/>
           </p:cNvSpPr>
@@ -568,8 +945,8 @@
         </p:nvSpPr>
         <p:spPr>
           <a:xfrm>
-            <a:off x="8724900" y="365125"/>
-            <a:ext cx="2628900" cy="5811838"/>
+            <a:off x="11593439" y="365125"/>
+            <a:ext cx="3493219" cy="5811838"/>
           </a:xfrm>
         </p:spPr>
         <p:txBody>
@@ -580,18 +957,13 @@
               <a:rPr lang="en-US"/>
               <a:t>Click to edit Master title style</a:t>
             </a:r>
+            <a:endParaRPr lang="en-US" dirty="0"/>
           </a:p>
         </p:txBody>
       </p:sp>
       <p:sp>
         <p:nvSpPr>
-          <p:cNvPr id="3" name="Vertical Text Placeholder 2">
-            <a:extLst>
-              <a:ext uri="{FF2B5EF4-FFF2-40B4-BE49-F238E27FC236}">
-                <a16:creationId xmlns:a16="http://schemas.microsoft.com/office/drawing/2014/main" id="{903C3AF8-29DE-760E-F4E8-FFBA5CF50DC2}"/>
-              </a:ext>
-            </a:extLst>
-          </p:cNvPr>
+          <p:cNvPr id="3" name="Vertical Text Placeholder 2"/>
           <p:cNvSpPr>
             <a:spLocks noGrp="1"/>
           </p:cNvSpPr>
@@ -601,8 +973,8 @@
         </p:nvSpPr>
         <p:spPr>
           <a:xfrm>
-            <a:off x="838200" y="365125"/>
-            <a:ext cx="7734300" cy="5811838"/>
+            <a:off x="1113780" y="365125"/>
+            <a:ext cx="10277153" cy="5811838"/>
           </a:xfrm>
         </p:spPr>
         <p:txBody>
@@ -642,18 +1014,13 @@
               <a:rPr lang="en-US"/>
               <a:t>Fifth level</a:t>
             </a:r>
+            <a:endParaRPr lang="en-US" dirty="0"/>
           </a:p>
         </p:txBody>
       </p:sp>
       <p:sp>
         <p:nvSpPr>
-          <p:cNvPr id="4" name="Date Placeholder 3">
-            <a:extLst>
-              <a:ext uri="{FF2B5EF4-FFF2-40B4-BE49-F238E27FC236}">
-                <a16:creationId xmlns:a16="http://schemas.microsoft.com/office/drawing/2014/main" id="{C9A19AB5-84B6-EBB5-A5D9-A1A663DB79F5}"/>
-              </a:ext>
-            </a:extLst>
-          </p:cNvPr>
+          <p:cNvPr id="4" name="Date Placeholder 3"/>
           <p:cNvSpPr>
             <a:spLocks noGrp="1"/>
           </p:cNvSpPr>
@@ -668,7 +1035,7 @@
           <a:p>
             <a:fld id="{67C0AFF0-F3EA-4DCF-802E-2F5116650474}" type="datetimeFigureOut">
               <a:rPr lang="en-US" smtClean="0"/>
-              <a:t>5/16/2026</a:t>
+              <a:t>6/5/2026</a:t>
             </a:fld>
             <a:endParaRPr lang="en-US"/>
           </a:p>
@@ -676,13 +1043,7 @@
       </p:sp>
       <p:sp>
         <p:nvSpPr>
-          <p:cNvPr id="5" name="Footer Placeholder 4">
-            <a:extLst>
-              <a:ext uri="{FF2B5EF4-FFF2-40B4-BE49-F238E27FC236}">
-                <a16:creationId xmlns:a16="http://schemas.microsoft.com/office/drawing/2014/main" id="{F8C0A675-B940-229E-2BDA-6DB5B2BBDA66}"/>
-              </a:ext>
-            </a:extLst>
-          </p:cNvPr>
+          <p:cNvPr id="5" name="Footer Placeholder 4"/>
           <p:cNvSpPr>
             <a:spLocks noGrp="1"/>
           </p:cNvSpPr>
@@ -701,13 +1062,7 @@
       </p:sp>
       <p:sp>
         <p:nvSpPr>
-          <p:cNvPr id="6" name="Slide Number Placeholder 5">
-            <a:extLst>
-              <a:ext uri="{FF2B5EF4-FFF2-40B4-BE49-F238E27FC236}">
-                <a16:creationId xmlns:a16="http://schemas.microsoft.com/office/drawing/2014/main" id="{2C84A922-EFAA-9A28-6B07-EE0F11229118}"/>
-              </a:ext>
-            </a:extLst>
-          </p:cNvPr>
+          <p:cNvPr id="6" name="Slide Number Placeholder 5"/>
           <p:cNvSpPr>
             <a:spLocks noGrp="1"/>
           </p:cNvSpPr>
@@ -731,7 +1086,7 @@
     </p:spTree>
     <p:extLst>
       <p:ext uri="{BB962C8B-B14F-4D97-AF65-F5344CB8AC3E}">
-        <p14:creationId xmlns:p14="http://schemas.microsoft.com/office/powerpoint/2010/main" val="3883990262"/>
+        <p14:creationId xmlns:p14="http://schemas.microsoft.com/office/powerpoint/2010/main" val="2386392668"/>
       </p:ext>
     </p:extLst>
   </p:cSld>
@@ -760,13 +1115,7 @@
       </p:grpSpPr>
       <p:sp>
         <p:nvSpPr>
-          <p:cNvPr id="2" name="Title 1">
-            <a:extLst>
-              <a:ext uri="{FF2B5EF4-FFF2-40B4-BE49-F238E27FC236}">
-                <a16:creationId xmlns:a16="http://schemas.microsoft.com/office/drawing/2014/main" id="{A5CA51AE-623A-327D-2F34-653338AA2D2B}"/>
-              </a:ext>
-            </a:extLst>
-          </p:cNvPr>
+          <p:cNvPr id="2" name="Title 1"/>
           <p:cNvSpPr>
             <a:spLocks noGrp="1"/>
           </p:cNvSpPr>
@@ -783,18 +1132,13 @@
               <a:rPr lang="en-US"/>
               <a:t>Click to edit Master title style</a:t>
             </a:r>
+            <a:endParaRPr lang="en-US" dirty="0"/>
           </a:p>
         </p:txBody>
       </p:sp>
       <p:sp>
         <p:nvSpPr>
-          <p:cNvPr id="3" name="Content Placeholder 2">
-            <a:extLst>
-              <a:ext uri="{FF2B5EF4-FFF2-40B4-BE49-F238E27FC236}">
-                <a16:creationId xmlns:a16="http://schemas.microsoft.com/office/drawing/2014/main" id="{B3925BF5-3B5C-A83A-DE17-69298B53BDA8}"/>
-              </a:ext>
-            </a:extLst>
-          </p:cNvPr>
+          <p:cNvPr id="3" name="Content Placeholder 2"/>
           <p:cNvSpPr>
             <a:spLocks noGrp="1"/>
           </p:cNvSpPr>
@@ -840,18 +1184,13 @@
               <a:rPr lang="en-US"/>
               <a:t>Fifth level</a:t>
             </a:r>
+            <a:endParaRPr lang="en-US" dirty="0"/>
           </a:p>
         </p:txBody>
       </p:sp>
       <p:sp>
         <p:nvSpPr>
-          <p:cNvPr id="4" name="Date Placeholder 3">
-            <a:extLst>
-              <a:ext uri="{FF2B5EF4-FFF2-40B4-BE49-F238E27FC236}">
-                <a16:creationId xmlns:a16="http://schemas.microsoft.com/office/drawing/2014/main" id="{1987A019-5548-6910-69D4-AB04253A529D}"/>
-              </a:ext>
-            </a:extLst>
-          </p:cNvPr>
+          <p:cNvPr id="4" name="Date Placeholder 3"/>
           <p:cNvSpPr>
             <a:spLocks noGrp="1"/>
           </p:cNvSpPr>
@@ -866,7 +1205,7 @@
           <a:p>
             <a:fld id="{67C0AFF0-F3EA-4DCF-802E-2F5116650474}" type="datetimeFigureOut">
               <a:rPr lang="en-US" smtClean="0"/>
-              <a:t>5/16/2026</a:t>
+              <a:t>6/5/2026</a:t>
             </a:fld>
             <a:endParaRPr lang="en-US"/>
           </a:p>
@@ -874,13 +1213,7 @@
       </p:sp>
       <p:sp>
         <p:nvSpPr>
-          <p:cNvPr id="5" name="Footer Placeholder 4">
-            <a:extLst>
-              <a:ext uri="{FF2B5EF4-FFF2-40B4-BE49-F238E27FC236}">
-                <a16:creationId xmlns:a16="http://schemas.microsoft.com/office/drawing/2014/main" id="{C2D4ADE2-FDA7-4006-623D-13847092368E}"/>
-              </a:ext>
-            </a:extLst>
-          </p:cNvPr>
+          <p:cNvPr id="5" name="Footer Placeholder 4"/>
           <p:cNvSpPr>
             <a:spLocks noGrp="1"/>
           </p:cNvSpPr>
@@ -899,13 +1232,7 @@
       </p:sp>
       <p:sp>
         <p:nvSpPr>
-          <p:cNvPr id="6" name="Slide Number Placeholder 5">
-            <a:extLst>
-              <a:ext uri="{FF2B5EF4-FFF2-40B4-BE49-F238E27FC236}">
-                <a16:creationId xmlns:a16="http://schemas.microsoft.com/office/drawing/2014/main" id="{E59BB4D9-A8C6-F257-39FD-179A27B43FC7}"/>
-              </a:ext>
-            </a:extLst>
-          </p:cNvPr>
+          <p:cNvPr id="6" name="Slide Number Placeholder 5"/>
           <p:cNvSpPr>
             <a:spLocks noGrp="1"/>
           </p:cNvSpPr>
@@ -929,7 +1256,7 @@
     </p:spTree>
     <p:extLst>
       <p:ext uri="{BB962C8B-B14F-4D97-AF65-F5344CB8AC3E}">
-        <p14:creationId xmlns:p14="http://schemas.microsoft.com/office/powerpoint/2010/main" val="273351698"/>
+        <p14:creationId xmlns:p14="http://schemas.microsoft.com/office/powerpoint/2010/main" val="2985124404"/>
       </p:ext>
     </p:extLst>
   </p:cSld>
@@ -958,13 +1285,7 @@
       </p:grpSpPr>
       <p:sp>
         <p:nvSpPr>
-          <p:cNvPr id="2" name="Title 1">
-            <a:extLst>
-              <a:ext uri="{FF2B5EF4-FFF2-40B4-BE49-F238E27FC236}">
-                <a16:creationId xmlns:a16="http://schemas.microsoft.com/office/drawing/2014/main" id="{206DC61B-4C2E-D826-0A6D-BFFD4DB30C33}"/>
-              </a:ext>
-            </a:extLst>
-          </p:cNvPr>
+          <p:cNvPr id="2" name="Title 1"/>
           <p:cNvSpPr>
             <a:spLocks noGrp="1"/>
           </p:cNvSpPr>
@@ -974,8 +1295,8 @@
         </p:nvSpPr>
         <p:spPr>
           <a:xfrm>
-            <a:off x="831850" y="1709738"/>
-            <a:ext cx="10515600" cy="2852737"/>
+            <a:off x="1105342" y="1709739"/>
+            <a:ext cx="13972878" cy="2852737"/>
           </a:xfrm>
         </p:spPr>
         <p:txBody>
@@ -990,18 +1311,13 @@
               <a:rPr lang="en-US"/>
               <a:t>Click to edit Master title style</a:t>
             </a:r>
+            <a:endParaRPr lang="en-US" dirty="0"/>
           </a:p>
         </p:txBody>
       </p:sp>
       <p:sp>
         <p:nvSpPr>
-          <p:cNvPr id="3" name="Text Placeholder 2">
-            <a:extLst>
-              <a:ext uri="{FF2B5EF4-FFF2-40B4-BE49-F238E27FC236}">
-                <a16:creationId xmlns:a16="http://schemas.microsoft.com/office/drawing/2014/main" id="{453AEAE7-5221-155C-A699-E0E60CA90F39}"/>
-              </a:ext>
-            </a:extLst>
-          </p:cNvPr>
+          <p:cNvPr id="3" name="Text Placeholder 2"/>
           <p:cNvSpPr>
             <a:spLocks noGrp="1"/>
           </p:cNvSpPr>
@@ -1011,8 +1327,8 @@
         </p:nvSpPr>
         <p:spPr>
           <a:xfrm>
-            <a:off x="831850" y="4589463"/>
-            <a:ext cx="10515600" cy="1500187"/>
+            <a:off x="1105342" y="4589464"/>
+            <a:ext cx="13972878" cy="1500187"/>
           </a:xfrm>
         </p:spPr>
         <p:txBody>
@@ -1120,13 +1436,7 @@
       </p:sp>
       <p:sp>
         <p:nvSpPr>
-          <p:cNvPr id="4" name="Date Placeholder 3">
-            <a:extLst>
-              <a:ext uri="{FF2B5EF4-FFF2-40B4-BE49-F238E27FC236}">
-                <a16:creationId xmlns:a16="http://schemas.microsoft.com/office/drawing/2014/main" id="{5B92EB98-7991-B0CC-174F-AA80BCB2185E}"/>
-              </a:ext>
-            </a:extLst>
-          </p:cNvPr>
+          <p:cNvPr id="4" name="Date Placeholder 3"/>
           <p:cNvSpPr>
             <a:spLocks noGrp="1"/>
           </p:cNvSpPr>
@@ -1141,7 +1451,7 @@
           <a:p>
             <a:fld id="{67C0AFF0-F3EA-4DCF-802E-2F5116650474}" type="datetimeFigureOut">
               <a:rPr lang="en-US" smtClean="0"/>
-              <a:t>5/16/2026</a:t>
+              <a:t>6/5/2026</a:t>
             </a:fld>
             <a:endParaRPr lang="en-US"/>
           </a:p>
@@ -1149,13 +1459,7 @@
       </p:sp>
       <p:sp>
         <p:nvSpPr>
-          <p:cNvPr id="5" name="Footer Placeholder 4">
-            <a:extLst>
-              <a:ext uri="{FF2B5EF4-FFF2-40B4-BE49-F238E27FC236}">
-                <a16:creationId xmlns:a16="http://schemas.microsoft.com/office/drawing/2014/main" id="{374FE925-63E6-38DA-3628-C40B0A280814}"/>
-              </a:ext>
-            </a:extLst>
-          </p:cNvPr>
+          <p:cNvPr id="5" name="Footer Placeholder 4"/>
           <p:cNvSpPr>
             <a:spLocks noGrp="1"/>
           </p:cNvSpPr>
@@ -1174,13 +1478,7 @@
       </p:sp>
       <p:sp>
         <p:nvSpPr>
-          <p:cNvPr id="6" name="Slide Number Placeholder 5">
-            <a:extLst>
-              <a:ext uri="{FF2B5EF4-FFF2-40B4-BE49-F238E27FC236}">
-                <a16:creationId xmlns:a16="http://schemas.microsoft.com/office/drawing/2014/main" id="{704E9F4E-B2DC-3885-0222-7E65F55B0848}"/>
-              </a:ext>
-            </a:extLst>
-          </p:cNvPr>
+          <p:cNvPr id="6" name="Slide Number Placeholder 5"/>
           <p:cNvSpPr>
             <a:spLocks noGrp="1"/>
           </p:cNvSpPr>
@@ -1204,7 +1502,7 @@
     </p:spTree>
     <p:extLst>
       <p:ext uri="{BB962C8B-B14F-4D97-AF65-F5344CB8AC3E}">
-        <p14:creationId xmlns:p14="http://schemas.microsoft.com/office/powerpoint/2010/main" val="4251840628"/>
+        <p14:creationId xmlns:p14="http://schemas.microsoft.com/office/powerpoint/2010/main" val="2536652568"/>
       </p:ext>
     </p:extLst>
   </p:cSld>
@@ -1233,13 +1531,7 @@
       </p:grpSpPr>
       <p:sp>
         <p:nvSpPr>
-          <p:cNvPr id="2" name="Title 1">
-            <a:extLst>
-              <a:ext uri="{FF2B5EF4-FFF2-40B4-BE49-F238E27FC236}">
-                <a16:creationId xmlns:a16="http://schemas.microsoft.com/office/drawing/2014/main" id="{7047C9E6-096F-712F-3FEB-0718280DFDCE}"/>
-              </a:ext>
-            </a:extLst>
-          </p:cNvPr>
+          <p:cNvPr id="2" name="Title 1"/>
           <p:cNvSpPr>
             <a:spLocks noGrp="1"/>
           </p:cNvSpPr>
@@ -1256,18 +1548,13 @@
               <a:rPr lang="en-US"/>
               <a:t>Click to edit Master title style</a:t>
             </a:r>
+            <a:endParaRPr lang="en-US" dirty="0"/>
           </a:p>
         </p:txBody>
       </p:sp>
       <p:sp>
         <p:nvSpPr>
-          <p:cNvPr id="3" name="Content Placeholder 2">
-            <a:extLst>
-              <a:ext uri="{FF2B5EF4-FFF2-40B4-BE49-F238E27FC236}">
-                <a16:creationId xmlns:a16="http://schemas.microsoft.com/office/drawing/2014/main" id="{0CE969EC-14E1-0C9C-EB9F-A55A1C8C52C3}"/>
-              </a:ext>
-            </a:extLst>
-          </p:cNvPr>
+          <p:cNvPr id="3" name="Content Placeholder 2"/>
           <p:cNvSpPr>
             <a:spLocks noGrp="1"/>
           </p:cNvSpPr>
@@ -1277,8 +1564,8 @@
         </p:nvSpPr>
         <p:spPr>
           <a:xfrm>
-            <a:off x="838200" y="1825625"/>
-            <a:ext cx="5181600" cy="4351338"/>
+            <a:off x="1113780" y="1825625"/>
+            <a:ext cx="6885186" cy="4351338"/>
           </a:xfrm>
         </p:spPr>
         <p:txBody>
@@ -1318,18 +1605,13 @@
               <a:rPr lang="en-US"/>
               <a:t>Fifth level</a:t>
             </a:r>
+            <a:endParaRPr lang="en-US" dirty="0"/>
           </a:p>
         </p:txBody>
       </p:sp>
       <p:sp>
         <p:nvSpPr>
-          <p:cNvPr id="4" name="Content Placeholder 3">
-            <a:extLst>
-              <a:ext uri="{FF2B5EF4-FFF2-40B4-BE49-F238E27FC236}">
-                <a16:creationId xmlns:a16="http://schemas.microsoft.com/office/drawing/2014/main" id="{7D86312E-DCA7-1E35-ECA8-98A48BD1A09C}"/>
-              </a:ext>
-            </a:extLst>
-          </p:cNvPr>
+          <p:cNvPr id="4" name="Content Placeholder 3"/>
           <p:cNvSpPr>
             <a:spLocks noGrp="1"/>
           </p:cNvSpPr>
@@ -1339,8 +1621,8 @@
         </p:nvSpPr>
         <p:spPr>
           <a:xfrm>
-            <a:off x="6172200" y="1825625"/>
-            <a:ext cx="5181600" cy="4351338"/>
+            <a:off x="8201472" y="1825625"/>
+            <a:ext cx="6885186" cy="4351338"/>
           </a:xfrm>
         </p:spPr>
         <p:txBody>
@@ -1380,18 +1662,13 @@
               <a:rPr lang="en-US"/>
               <a:t>Fifth level</a:t>
             </a:r>
+            <a:endParaRPr lang="en-US" dirty="0"/>
           </a:p>
         </p:txBody>
       </p:sp>
       <p:sp>
         <p:nvSpPr>
-          <p:cNvPr id="5" name="Date Placeholder 4">
-            <a:extLst>
-              <a:ext uri="{FF2B5EF4-FFF2-40B4-BE49-F238E27FC236}">
-                <a16:creationId xmlns:a16="http://schemas.microsoft.com/office/drawing/2014/main" id="{96C988CE-F676-603E-41C2-D136DD7C5F83}"/>
-              </a:ext>
-            </a:extLst>
-          </p:cNvPr>
+          <p:cNvPr id="5" name="Date Placeholder 4"/>
           <p:cNvSpPr>
             <a:spLocks noGrp="1"/>
           </p:cNvSpPr>
@@ -1406,7 +1683,7 @@
           <a:p>
             <a:fld id="{67C0AFF0-F3EA-4DCF-802E-2F5116650474}" type="datetimeFigureOut">
               <a:rPr lang="en-US" smtClean="0"/>
-              <a:t>5/16/2026</a:t>
+              <a:t>6/5/2026</a:t>
             </a:fld>
             <a:endParaRPr lang="en-US"/>
           </a:p>
@@ -1414,13 +1691,7 @@
       </p:sp>
       <p:sp>
         <p:nvSpPr>
-          <p:cNvPr id="6" name="Footer Placeholder 5">
-            <a:extLst>
-              <a:ext uri="{FF2B5EF4-FFF2-40B4-BE49-F238E27FC236}">
-                <a16:creationId xmlns:a16="http://schemas.microsoft.com/office/drawing/2014/main" id="{77D51C3F-79CF-B007-5D18-963DF7F5D18B}"/>
-              </a:ext>
-            </a:extLst>
-          </p:cNvPr>
+          <p:cNvPr id="6" name="Footer Placeholder 5"/>
           <p:cNvSpPr>
             <a:spLocks noGrp="1"/>
           </p:cNvSpPr>
@@ -1439,13 +1710,7 @@
       </p:sp>
       <p:sp>
         <p:nvSpPr>
-          <p:cNvPr id="7" name="Slide Number Placeholder 6">
-            <a:extLst>
-              <a:ext uri="{FF2B5EF4-FFF2-40B4-BE49-F238E27FC236}">
-                <a16:creationId xmlns:a16="http://schemas.microsoft.com/office/drawing/2014/main" id="{1F7AE156-71CA-09C0-B68D-DD8FE9D099FE}"/>
-              </a:ext>
-            </a:extLst>
-          </p:cNvPr>
+          <p:cNvPr id="7" name="Slide Number Placeholder 6"/>
           <p:cNvSpPr>
             <a:spLocks noGrp="1"/>
           </p:cNvSpPr>
@@ -1469,7 +1734,7 @@
     </p:spTree>
     <p:extLst>
       <p:ext uri="{BB962C8B-B14F-4D97-AF65-F5344CB8AC3E}">
-        <p14:creationId xmlns:p14="http://schemas.microsoft.com/office/powerpoint/2010/main" val="1123578500"/>
+        <p14:creationId xmlns:p14="http://schemas.microsoft.com/office/powerpoint/2010/main" val="3438289648"/>
       </p:ext>
     </p:extLst>
   </p:cSld>
@@ -1498,13 +1763,7 @@
       </p:grpSpPr>
       <p:sp>
         <p:nvSpPr>
-          <p:cNvPr id="2" name="Title 1">
-            <a:extLst>
-              <a:ext uri="{FF2B5EF4-FFF2-40B4-BE49-F238E27FC236}">
-                <a16:creationId xmlns:a16="http://schemas.microsoft.com/office/drawing/2014/main" id="{0AE377AF-8C33-8953-3B5B-DD802774DC60}"/>
-              </a:ext>
-            </a:extLst>
-          </p:cNvPr>
+          <p:cNvPr id="2" name="Title 1"/>
           <p:cNvSpPr>
             <a:spLocks noGrp="1"/>
           </p:cNvSpPr>
@@ -1514,8 +1773,8 @@
         </p:nvSpPr>
         <p:spPr>
           <a:xfrm>
-            <a:off x="839788" y="365125"/>
-            <a:ext cx="10515600" cy="1325563"/>
+            <a:off x="1115890" y="365126"/>
+            <a:ext cx="13972878" cy="1325563"/>
           </a:xfrm>
         </p:spPr>
         <p:txBody>
@@ -1526,18 +1785,13 @@
               <a:rPr lang="en-US"/>
               <a:t>Click to edit Master title style</a:t>
             </a:r>
+            <a:endParaRPr lang="en-US" dirty="0"/>
           </a:p>
         </p:txBody>
       </p:sp>
       <p:sp>
         <p:nvSpPr>
-          <p:cNvPr id="3" name="Text Placeholder 2">
-            <a:extLst>
-              <a:ext uri="{FF2B5EF4-FFF2-40B4-BE49-F238E27FC236}">
-                <a16:creationId xmlns:a16="http://schemas.microsoft.com/office/drawing/2014/main" id="{A554C95D-B561-5D36-375F-0D4926CD7DF3}"/>
-              </a:ext>
-            </a:extLst>
-          </p:cNvPr>
+          <p:cNvPr id="3" name="Text Placeholder 2"/>
           <p:cNvSpPr>
             <a:spLocks noGrp="1"/>
           </p:cNvSpPr>
@@ -1547,8 +1801,8 @@
         </p:nvSpPr>
         <p:spPr>
           <a:xfrm>
-            <a:off x="839788" y="1681163"/>
-            <a:ext cx="5157787" cy="823912"/>
+            <a:off x="1115891" y="1681163"/>
+            <a:ext cx="6853544" cy="823912"/>
           </a:xfrm>
         </p:spPr>
         <p:txBody>
@@ -1602,13 +1856,7 @@
       </p:sp>
       <p:sp>
         <p:nvSpPr>
-          <p:cNvPr id="4" name="Content Placeholder 3">
-            <a:extLst>
-              <a:ext uri="{FF2B5EF4-FFF2-40B4-BE49-F238E27FC236}">
-                <a16:creationId xmlns:a16="http://schemas.microsoft.com/office/drawing/2014/main" id="{C181A760-EA43-E3A0-D21C-35E91DBC991E}"/>
-              </a:ext>
-            </a:extLst>
-          </p:cNvPr>
+          <p:cNvPr id="4" name="Content Placeholder 3"/>
           <p:cNvSpPr>
             <a:spLocks noGrp="1"/>
           </p:cNvSpPr>
@@ -1618,8 +1866,8 @@
         </p:nvSpPr>
         <p:spPr>
           <a:xfrm>
-            <a:off x="839788" y="2505075"/>
-            <a:ext cx="5157787" cy="3684588"/>
+            <a:off x="1115891" y="2505075"/>
+            <a:ext cx="6853544" cy="3684588"/>
           </a:xfrm>
         </p:spPr>
         <p:txBody>
@@ -1659,18 +1907,13 @@
               <a:rPr lang="en-US"/>
               <a:t>Fifth level</a:t>
             </a:r>
+            <a:endParaRPr lang="en-US" dirty="0"/>
           </a:p>
         </p:txBody>
       </p:sp>
       <p:sp>
         <p:nvSpPr>
-          <p:cNvPr id="5" name="Text Placeholder 4">
-            <a:extLst>
-              <a:ext uri="{FF2B5EF4-FFF2-40B4-BE49-F238E27FC236}">
-                <a16:creationId xmlns:a16="http://schemas.microsoft.com/office/drawing/2014/main" id="{8C3373C3-5392-F4FF-A4EB-7B19FB85B03C}"/>
-              </a:ext>
-            </a:extLst>
-          </p:cNvPr>
+          <p:cNvPr id="5" name="Text Placeholder 4"/>
           <p:cNvSpPr>
             <a:spLocks noGrp="1"/>
           </p:cNvSpPr>
@@ -1680,8 +1923,8 @@
         </p:nvSpPr>
         <p:spPr>
           <a:xfrm>
-            <a:off x="6172200" y="1681163"/>
-            <a:ext cx="5183188" cy="823912"/>
+            <a:off x="8201472" y="1681163"/>
+            <a:ext cx="6887296" cy="823912"/>
           </a:xfrm>
         </p:spPr>
         <p:txBody>
@@ -1735,13 +1978,7 @@
       </p:sp>
       <p:sp>
         <p:nvSpPr>
-          <p:cNvPr id="6" name="Content Placeholder 5">
-            <a:extLst>
-              <a:ext uri="{FF2B5EF4-FFF2-40B4-BE49-F238E27FC236}">
-                <a16:creationId xmlns:a16="http://schemas.microsoft.com/office/drawing/2014/main" id="{B76699D0-949B-8DD0-C5E0-75686F615999}"/>
-              </a:ext>
-            </a:extLst>
-          </p:cNvPr>
+          <p:cNvPr id="6" name="Content Placeholder 5"/>
           <p:cNvSpPr>
             <a:spLocks noGrp="1"/>
           </p:cNvSpPr>
@@ -1751,8 +1988,8 @@
         </p:nvSpPr>
         <p:spPr>
           <a:xfrm>
-            <a:off x="6172200" y="2505075"/>
-            <a:ext cx="5183188" cy="3684588"/>
+            <a:off x="8201472" y="2505075"/>
+            <a:ext cx="6887296" cy="3684588"/>
           </a:xfrm>
         </p:spPr>
         <p:txBody>
@@ -1792,18 +2029,13 @@
               <a:rPr lang="en-US"/>
               <a:t>Fifth level</a:t>
             </a:r>
+            <a:endParaRPr lang="en-US" dirty="0"/>
           </a:p>
         </p:txBody>
       </p:sp>
       <p:sp>
         <p:nvSpPr>
-          <p:cNvPr id="7" name="Date Placeholder 6">
-            <a:extLst>
-              <a:ext uri="{FF2B5EF4-FFF2-40B4-BE49-F238E27FC236}">
-                <a16:creationId xmlns:a16="http://schemas.microsoft.com/office/drawing/2014/main" id="{54DBB0DE-19FC-CEA6-13C3-AE80A92173EC}"/>
-              </a:ext>
-            </a:extLst>
-          </p:cNvPr>
+          <p:cNvPr id="7" name="Date Placeholder 6"/>
           <p:cNvSpPr>
             <a:spLocks noGrp="1"/>
           </p:cNvSpPr>
@@ -1818,7 +2050,7 @@
           <a:p>
             <a:fld id="{67C0AFF0-F3EA-4DCF-802E-2F5116650474}" type="datetimeFigureOut">
               <a:rPr lang="en-US" smtClean="0"/>
-              <a:t>5/16/2026</a:t>
+              <a:t>6/5/2026</a:t>
             </a:fld>
             <a:endParaRPr lang="en-US"/>
           </a:p>
@@ -1826,13 +2058,7 @@
       </p:sp>
       <p:sp>
         <p:nvSpPr>
-          <p:cNvPr id="8" name="Footer Placeholder 7">
-            <a:extLst>
-              <a:ext uri="{FF2B5EF4-FFF2-40B4-BE49-F238E27FC236}">
-                <a16:creationId xmlns:a16="http://schemas.microsoft.com/office/drawing/2014/main" id="{C3278941-B8D1-5635-4141-E1823BE29A90}"/>
-              </a:ext>
-            </a:extLst>
-          </p:cNvPr>
+          <p:cNvPr id="8" name="Footer Placeholder 7"/>
           <p:cNvSpPr>
             <a:spLocks noGrp="1"/>
           </p:cNvSpPr>
@@ -1851,13 +2077,7 @@
       </p:sp>
       <p:sp>
         <p:nvSpPr>
-          <p:cNvPr id="9" name="Slide Number Placeholder 8">
-            <a:extLst>
-              <a:ext uri="{FF2B5EF4-FFF2-40B4-BE49-F238E27FC236}">
-                <a16:creationId xmlns:a16="http://schemas.microsoft.com/office/drawing/2014/main" id="{68D06DCF-A239-2AA2-67DE-EF245D1CEBB0}"/>
-              </a:ext>
-            </a:extLst>
-          </p:cNvPr>
+          <p:cNvPr id="9" name="Slide Number Placeholder 8"/>
           <p:cNvSpPr>
             <a:spLocks noGrp="1"/>
           </p:cNvSpPr>
@@ -1881,7 +2101,7 @@
     </p:spTree>
     <p:extLst>
       <p:ext uri="{BB962C8B-B14F-4D97-AF65-F5344CB8AC3E}">
-        <p14:creationId xmlns:p14="http://schemas.microsoft.com/office/powerpoint/2010/main" val="2322721396"/>
+        <p14:creationId xmlns:p14="http://schemas.microsoft.com/office/powerpoint/2010/main" val="161504791"/>
       </p:ext>
     </p:extLst>
   </p:cSld>
@@ -1910,13 +2130,7 @@
       </p:grpSpPr>
       <p:sp>
         <p:nvSpPr>
-          <p:cNvPr id="2" name="Title 1">
-            <a:extLst>
-              <a:ext uri="{FF2B5EF4-FFF2-40B4-BE49-F238E27FC236}">
-                <a16:creationId xmlns:a16="http://schemas.microsoft.com/office/drawing/2014/main" id="{A999D013-2D87-2C5C-4275-1F6001460232}"/>
-              </a:ext>
-            </a:extLst>
-          </p:cNvPr>
+          <p:cNvPr id="2" name="Title 1"/>
           <p:cNvSpPr>
             <a:spLocks noGrp="1"/>
           </p:cNvSpPr>
@@ -1933,18 +2147,13 @@
               <a:rPr lang="en-US"/>
               <a:t>Click to edit Master title style</a:t>
             </a:r>
+            <a:endParaRPr lang="en-US" dirty="0"/>
           </a:p>
         </p:txBody>
       </p:sp>
       <p:sp>
         <p:nvSpPr>
-          <p:cNvPr id="3" name="Date Placeholder 2">
-            <a:extLst>
-              <a:ext uri="{FF2B5EF4-FFF2-40B4-BE49-F238E27FC236}">
-                <a16:creationId xmlns:a16="http://schemas.microsoft.com/office/drawing/2014/main" id="{C2C5F790-526C-0127-1621-DA46B371942C}"/>
-              </a:ext>
-            </a:extLst>
-          </p:cNvPr>
+          <p:cNvPr id="3" name="Date Placeholder 2"/>
           <p:cNvSpPr>
             <a:spLocks noGrp="1"/>
           </p:cNvSpPr>
@@ -1959,7 +2168,7 @@
           <a:p>
             <a:fld id="{67C0AFF0-F3EA-4DCF-802E-2F5116650474}" type="datetimeFigureOut">
               <a:rPr lang="en-US" smtClean="0"/>
-              <a:t>5/16/2026</a:t>
+              <a:t>6/5/2026</a:t>
             </a:fld>
             <a:endParaRPr lang="en-US"/>
           </a:p>
@@ -1967,13 +2176,7 @@
       </p:sp>
       <p:sp>
         <p:nvSpPr>
-          <p:cNvPr id="4" name="Footer Placeholder 3">
-            <a:extLst>
-              <a:ext uri="{FF2B5EF4-FFF2-40B4-BE49-F238E27FC236}">
-                <a16:creationId xmlns:a16="http://schemas.microsoft.com/office/drawing/2014/main" id="{2DD04DA5-0279-B2F2-7A54-26216579F6C2}"/>
-              </a:ext>
-            </a:extLst>
-          </p:cNvPr>
+          <p:cNvPr id="4" name="Footer Placeholder 3"/>
           <p:cNvSpPr>
             <a:spLocks noGrp="1"/>
           </p:cNvSpPr>
@@ -1992,13 +2195,7 @@
       </p:sp>
       <p:sp>
         <p:nvSpPr>
-          <p:cNvPr id="5" name="Slide Number Placeholder 4">
-            <a:extLst>
-              <a:ext uri="{FF2B5EF4-FFF2-40B4-BE49-F238E27FC236}">
-                <a16:creationId xmlns:a16="http://schemas.microsoft.com/office/drawing/2014/main" id="{49D1960D-04BA-055F-C3D7-E43A1B8A0DD8}"/>
-              </a:ext>
-            </a:extLst>
-          </p:cNvPr>
+          <p:cNvPr id="5" name="Slide Number Placeholder 4"/>
           <p:cNvSpPr>
             <a:spLocks noGrp="1"/>
           </p:cNvSpPr>
@@ -2022,7 +2219,7 @@
     </p:spTree>
     <p:extLst>
       <p:ext uri="{BB962C8B-B14F-4D97-AF65-F5344CB8AC3E}">
-        <p14:creationId xmlns:p14="http://schemas.microsoft.com/office/powerpoint/2010/main" val="567534011"/>
+        <p14:creationId xmlns:p14="http://schemas.microsoft.com/office/powerpoint/2010/main" val="4072961619"/>
       </p:ext>
     </p:extLst>
   </p:cSld>
@@ -2051,13 +2248,7 @@
       </p:grpSpPr>
       <p:sp>
         <p:nvSpPr>
-          <p:cNvPr id="2" name="Date Placeholder 1">
-            <a:extLst>
-              <a:ext uri="{FF2B5EF4-FFF2-40B4-BE49-F238E27FC236}">
-                <a16:creationId xmlns:a16="http://schemas.microsoft.com/office/drawing/2014/main" id="{14FDC142-A645-4170-FA32-FA30CFB8613A}"/>
-              </a:ext>
-            </a:extLst>
-          </p:cNvPr>
+          <p:cNvPr id="2" name="Date Placeholder 1"/>
           <p:cNvSpPr>
             <a:spLocks noGrp="1"/>
           </p:cNvSpPr>
@@ -2072,7 +2263,7 @@
           <a:p>
             <a:fld id="{67C0AFF0-F3EA-4DCF-802E-2F5116650474}" type="datetimeFigureOut">
               <a:rPr lang="en-US" smtClean="0"/>
-              <a:t>5/16/2026</a:t>
+              <a:t>6/5/2026</a:t>
             </a:fld>
             <a:endParaRPr lang="en-US"/>
           </a:p>
@@ -2080,13 +2271,7 @@
       </p:sp>
       <p:sp>
         <p:nvSpPr>
-          <p:cNvPr id="3" name="Footer Placeholder 2">
-            <a:extLst>
-              <a:ext uri="{FF2B5EF4-FFF2-40B4-BE49-F238E27FC236}">
-                <a16:creationId xmlns:a16="http://schemas.microsoft.com/office/drawing/2014/main" id="{5A7383CD-94F3-568E-D8F7-089E97F341C1}"/>
-              </a:ext>
-            </a:extLst>
-          </p:cNvPr>
+          <p:cNvPr id="3" name="Footer Placeholder 2"/>
           <p:cNvSpPr>
             <a:spLocks noGrp="1"/>
           </p:cNvSpPr>
@@ -2105,13 +2290,7 @@
       </p:sp>
       <p:sp>
         <p:nvSpPr>
-          <p:cNvPr id="4" name="Slide Number Placeholder 3">
-            <a:extLst>
-              <a:ext uri="{FF2B5EF4-FFF2-40B4-BE49-F238E27FC236}">
-                <a16:creationId xmlns:a16="http://schemas.microsoft.com/office/drawing/2014/main" id="{E75FA20B-96BF-E0AC-1511-7B46B6270F48}"/>
-              </a:ext>
-            </a:extLst>
-          </p:cNvPr>
+          <p:cNvPr id="4" name="Slide Number Placeholder 3"/>
           <p:cNvSpPr>
             <a:spLocks noGrp="1"/>
           </p:cNvSpPr>
@@ -2135,7 +2314,7 @@
     </p:spTree>
     <p:extLst>
       <p:ext uri="{BB962C8B-B14F-4D97-AF65-F5344CB8AC3E}">
-        <p14:creationId xmlns:p14="http://schemas.microsoft.com/office/powerpoint/2010/main" val="4171527827"/>
+        <p14:creationId xmlns:p14="http://schemas.microsoft.com/office/powerpoint/2010/main" val="2623200457"/>
       </p:ext>
     </p:extLst>
   </p:cSld>
@@ -2164,13 +2343,7 @@
       </p:grpSpPr>
       <p:sp>
         <p:nvSpPr>
-          <p:cNvPr id="2" name="Title 1">
-            <a:extLst>
-              <a:ext uri="{FF2B5EF4-FFF2-40B4-BE49-F238E27FC236}">
-                <a16:creationId xmlns:a16="http://schemas.microsoft.com/office/drawing/2014/main" id="{8836B954-39B3-3775-EC55-D7C6A726745C}"/>
-              </a:ext>
-            </a:extLst>
-          </p:cNvPr>
+          <p:cNvPr id="2" name="Title 1"/>
           <p:cNvSpPr>
             <a:spLocks noGrp="1"/>
           </p:cNvSpPr>
@@ -2180,8 +2353,8 @@
         </p:nvSpPr>
         <p:spPr>
           <a:xfrm>
-            <a:off x="839788" y="457200"/>
-            <a:ext cx="3932237" cy="1600200"/>
+            <a:off x="1115891" y="457200"/>
+            <a:ext cx="5225062" cy="1600200"/>
           </a:xfrm>
         </p:spPr>
         <p:txBody>
@@ -2196,18 +2369,13 @@
               <a:rPr lang="en-US"/>
               <a:t>Click to edit Master title style</a:t>
             </a:r>
+            <a:endParaRPr lang="en-US" dirty="0"/>
           </a:p>
         </p:txBody>
       </p:sp>
       <p:sp>
         <p:nvSpPr>
-          <p:cNvPr id="3" name="Content Placeholder 2">
-            <a:extLst>
-              <a:ext uri="{FF2B5EF4-FFF2-40B4-BE49-F238E27FC236}">
-                <a16:creationId xmlns:a16="http://schemas.microsoft.com/office/drawing/2014/main" id="{4C92361C-445B-6CD5-28BC-666E86547294}"/>
-              </a:ext>
-            </a:extLst>
-          </p:cNvPr>
+          <p:cNvPr id="3" name="Content Placeholder 2"/>
           <p:cNvSpPr>
             <a:spLocks noGrp="1"/>
           </p:cNvSpPr>
@@ -2217,8 +2385,8 @@
         </p:nvSpPr>
         <p:spPr>
           <a:xfrm>
-            <a:off x="5183188" y="987425"/>
-            <a:ext cx="6172200" cy="4873625"/>
+            <a:off x="6887296" y="987426"/>
+            <a:ext cx="8201472" cy="4873625"/>
           </a:xfrm>
         </p:spPr>
         <p:txBody>
@@ -2286,18 +2454,13 @@
               <a:rPr lang="en-US"/>
               <a:t>Fifth level</a:t>
             </a:r>
+            <a:endParaRPr lang="en-US" dirty="0"/>
           </a:p>
         </p:txBody>
       </p:sp>
       <p:sp>
         <p:nvSpPr>
-          <p:cNvPr id="4" name="Text Placeholder 3">
-            <a:extLst>
-              <a:ext uri="{FF2B5EF4-FFF2-40B4-BE49-F238E27FC236}">
-                <a16:creationId xmlns:a16="http://schemas.microsoft.com/office/drawing/2014/main" id="{9DD0C503-205C-B868-0656-B2BF29F4C7C4}"/>
-              </a:ext>
-            </a:extLst>
-          </p:cNvPr>
+          <p:cNvPr id="4" name="Text Placeholder 3"/>
           <p:cNvSpPr>
             <a:spLocks noGrp="1"/>
           </p:cNvSpPr>
@@ -2307,8 +2470,8 @@
         </p:nvSpPr>
         <p:spPr>
           <a:xfrm>
-            <a:off x="839788" y="2057400"/>
-            <a:ext cx="3932237" cy="3811588"/>
+            <a:off x="1115891" y="2057400"/>
+            <a:ext cx="5225062" cy="3811588"/>
           </a:xfrm>
         </p:spPr>
         <p:txBody>
@@ -2362,13 +2525,7 @@
       </p:sp>
       <p:sp>
         <p:nvSpPr>
-          <p:cNvPr id="5" name="Date Placeholder 4">
-            <a:extLst>
-              <a:ext uri="{FF2B5EF4-FFF2-40B4-BE49-F238E27FC236}">
-                <a16:creationId xmlns:a16="http://schemas.microsoft.com/office/drawing/2014/main" id="{939B923D-FC75-7B8A-6F15-2EFEACB3D352}"/>
-              </a:ext>
-            </a:extLst>
-          </p:cNvPr>
+          <p:cNvPr id="5" name="Date Placeholder 4"/>
           <p:cNvSpPr>
             <a:spLocks noGrp="1"/>
           </p:cNvSpPr>
@@ -2383,7 +2540,7 @@
           <a:p>
             <a:fld id="{67C0AFF0-F3EA-4DCF-802E-2F5116650474}" type="datetimeFigureOut">
               <a:rPr lang="en-US" smtClean="0"/>
-              <a:t>5/16/2026</a:t>
+              <a:t>6/5/2026</a:t>
             </a:fld>
             <a:endParaRPr lang="en-US"/>
           </a:p>
@@ -2391,13 +2548,7 @@
       </p:sp>
       <p:sp>
         <p:nvSpPr>
-          <p:cNvPr id="6" name="Footer Placeholder 5">
-            <a:extLst>
-              <a:ext uri="{FF2B5EF4-FFF2-40B4-BE49-F238E27FC236}">
-                <a16:creationId xmlns:a16="http://schemas.microsoft.com/office/drawing/2014/main" id="{FAFB9432-79E4-375A-B3EA-82FCADAA9C00}"/>
-              </a:ext>
-            </a:extLst>
-          </p:cNvPr>
+          <p:cNvPr id="6" name="Footer Placeholder 5"/>
           <p:cNvSpPr>
             <a:spLocks noGrp="1"/>
           </p:cNvSpPr>
@@ -2416,13 +2567,7 @@
       </p:sp>
       <p:sp>
         <p:nvSpPr>
-          <p:cNvPr id="7" name="Slide Number Placeholder 6">
-            <a:extLst>
-              <a:ext uri="{FF2B5EF4-FFF2-40B4-BE49-F238E27FC236}">
-                <a16:creationId xmlns:a16="http://schemas.microsoft.com/office/drawing/2014/main" id="{6C0CFBC0-239E-7458-725B-9A30E330A475}"/>
-              </a:ext>
-            </a:extLst>
-          </p:cNvPr>
+          <p:cNvPr id="7" name="Slide Number Placeholder 6"/>
           <p:cNvSpPr>
             <a:spLocks noGrp="1"/>
           </p:cNvSpPr>
@@ -2446,7 +2591,7 @@
     </p:spTree>
     <p:extLst>
       <p:ext uri="{BB962C8B-B14F-4D97-AF65-F5344CB8AC3E}">
-        <p14:creationId xmlns:p14="http://schemas.microsoft.com/office/powerpoint/2010/main" val="1373753656"/>
+        <p14:creationId xmlns:p14="http://schemas.microsoft.com/office/powerpoint/2010/main" val="959707157"/>
       </p:ext>
     </p:extLst>
   </p:cSld>
@@ -2475,13 +2620,7 @@
       </p:grpSpPr>
       <p:sp>
         <p:nvSpPr>
-          <p:cNvPr id="2" name="Title 1">
-            <a:extLst>
-              <a:ext uri="{FF2B5EF4-FFF2-40B4-BE49-F238E27FC236}">
-                <a16:creationId xmlns:a16="http://schemas.microsoft.com/office/drawing/2014/main" id="{148D312B-3EA4-63AC-1FDB-6D132A331C3B}"/>
-              </a:ext>
-            </a:extLst>
-          </p:cNvPr>
+          <p:cNvPr id="2" name="Title 1"/>
           <p:cNvSpPr>
             <a:spLocks noGrp="1"/>
           </p:cNvSpPr>
@@ -2491,8 +2630,8 @@
         </p:nvSpPr>
         <p:spPr>
           <a:xfrm>
-            <a:off x="839788" y="457200"/>
-            <a:ext cx="3932237" cy="1600200"/>
+            <a:off x="1115891" y="457200"/>
+            <a:ext cx="5225062" cy="1600200"/>
           </a:xfrm>
         </p:spPr>
         <p:txBody>
@@ -2507,20 +2646,15 @@
               <a:rPr lang="en-US"/>
               <a:t>Click to edit Master title style</a:t>
             </a:r>
+            <a:endParaRPr lang="en-US" dirty="0"/>
           </a:p>
         </p:txBody>
       </p:sp>
       <p:sp>
         <p:nvSpPr>
-          <p:cNvPr id="3" name="Picture Placeholder 2">
-            <a:extLst>
-              <a:ext uri="{FF2B5EF4-FFF2-40B4-BE49-F238E27FC236}">
-                <a16:creationId xmlns:a16="http://schemas.microsoft.com/office/drawing/2014/main" id="{05A376B5-0F6E-46D8-9742-65C3E8039738}"/>
-              </a:ext>
-            </a:extLst>
-          </p:cNvPr>
+          <p:cNvPr id="3" name="Picture Placeholder 2"/>
           <p:cNvSpPr>
-            <a:spLocks noGrp="1"/>
+            <a:spLocks noGrp="1" noChangeAspect="1"/>
           </p:cNvSpPr>
           <p:nvPr>
             <p:ph type="pic" idx="1"/>
@@ -2528,12 +2662,12 @@
         </p:nvSpPr>
         <p:spPr>
           <a:xfrm>
-            <a:off x="5183188" y="987425"/>
-            <a:ext cx="6172200" cy="4873625"/>
+            <a:off x="6887296" y="987426"/>
+            <a:ext cx="8201472" cy="4873625"/>
           </a:xfrm>
         </p:spPr>
         <p:txBody>
-          <a:bodyPr/>
+          <a:bodyPr anchor="t"/>
           <a:lstStyle>
             <a:lvl1pPr marL="0" indent="0">
               <a:buNone/>
@@ -2573,19 +2707,17 @@
             </a:lvl9pPr>
           </a:lstStyle>
           <a:p>
-            <a:endParaRPr lang="en-US"/>
+            <a:r>
+              <a:rPr lang="en-US"/>
+              <a:t>Click icon to add picture</a:t>
+            </a:r>
+            <a:endParaRPr lang="en-US" dirty="0"/>
           </a:p>
         </p:txBody>
       </p:sp>
       <p:sp>
         <p:nvSpPr>
-          <p:cNvPr id="4" name="Text Placeholder 3">
-            <a:extLst>
-              <a:ext uri="{FF2B5EF4-FFF2-40B4-BE49-F238E27FC236}">
-                <a16:creationId xmlns:a16="http://schemas.microsoft.com/office/drawing/2014/main" id="{AA6EDF87-16EB-AB0F-909D-F1EEB91EEB29}"/>
-              </a:ext>
-            </a:extLst>
-          </p:cNvPr>
+          <p:cNvPr id="4" name="Text Placeholder 3"/>
           <p:cNvSpPr>
             <a:spLocks noGrp="1"/>
           </p:cNvSpPr>
@@ -2595,8 +2727,8 @@
         </p:nvSpPr>
         <p:spPr>
           <a:xfrm>
-            <a:off x="839788" y="2057400"/>
-            <a:ext cx="3932237" cy="3811588"/>
+            <a:off x="1115891" y="2057400"/>
+            <a:ext cx="5225062" cy="3811588"/>
           </a:xfrm>
         </p:spPr>
         <p:txBody>
@@ -2650,13 +2782,7 @@
       </p:sp>
       <p:sp>
         <p:nvSpPr>
-          <p:cNvPr id="5" name="Date Placeholder 4">
-            <a:extLst>
-              <a:ext uri="{FF2B5EF4-FFF2-40B4-BE49-F238E27FC236}">
-                <a16:creationId xmlns:a16="http://schemas.microsoft.com/office/drawing/2014/main" id="{67B679E5-A2DF-E48A-1A38-1E1DF3179BA2}"/>
-              </a:ext>
-            </a:extLst>
-          </p:cNvPr>
+          <p:cNvPr id="5" name="Date Placeholder 4"/>
           <p:cNvSpPr>
             <a:spLocks noGrp="1"/>
           </p:cNvSpPr>
@@ -2671,7 +2797,7 @@
           <a:p>
             <a:fld id="{67C0AFF0-F3EA-4DCF-802E-2F5116650474}" type="datetimeFigureOut">
               <a:rPr lang="en-US" smtClean="0"/>
-              <a:t>5/16/2026</a:t>
+              <a:t>6/5/2026</a:t>
             </a:fld>
             <a:endParaRPr lang="en-US"/>
           </a:p>
@@ -2679,13 +2805,7 @@
       </p:sp>
       <p:sp>
         <p:nvSpPr>
-          <p:cNvPr id="6" name="Footer Placeholder 5">
-            <a:extLst>
-              <a:ext uri="{FF2B5EF4-FFF2-40B4-BE49-F238E27FC236}">
-                <a16:creationId xmlns:a16="http://schemas.microsoft.com/office/drawing/2014/main" id="{D4615FDD-F7D3-89F4-CFA1-CA6DE2966A00}"/>
-              </a:ext>
-            </a:extLst>
-          </p:cNvPr>
+          <p:cNvPr id="6" name="Footer Placeholder 5"/>
           <p:cNvSpPr>
             <a:spLocks noGrp="1"/>
           </p:cNvSpPr>
@@ -2704,13 +2824,7 @@
       </p:sp>
       <p:sp>
         <p:nvSpPr>
-          <p:cNvPr id="7" name="Slide Number Placeholder 6">
-            <a:extLst>
-              <a:ext uri="{FF2B5EF4-FFF2-40B4-BE49-F238E27FC236}">
-                <a16:creationId xmlns:a16="http://schemas.microsoft.com/office/drawing/2014/main" id="{6EB05E56-C70E-53BC-9061-BB1226DB7490}"/>
-              </a:ext>
-            </a:extLst>
-          </p:cNvPr>
+          <p:cNvPr id="7" name="Slide Number Placeholder 6"/>
           <p:cNvSpPr>
             <a:spLocks noGrp="1"/>
           </p:cNvSpPr>
@@ -2734,7 +2848,7 @@
     </p:spTree>
     <p:extLst>
       <p:ext uri="{BB962C8B-B14F-4D97-AF65-F5344CB8AC3E}">
-        <p14:creationId xmlns:p14="http://schemas.microsoft.com/office/powerpoint/2010/main" val="3929816695"/>
+        <p14:creationId xmlns:p14="http://schemas.microsoft.com/office/powerpoint/2010/main" val="1162268585"/>
       </p:ext>
     </p:extLst>
   </p:cSld>
@@ -2768,13 +2882,7 @@
       </p:grpSpPr>
       <p:sp>
         <p:nvSpPr>
-          <p:cNvPr id="2" name="Title Placeholder 1">
-            <a:extLst>
-              <a:ext uri="{FF2B5EF4-FFF2-40B4-BE49-F238E27FC236}">
-                <a16:creationId xmlns:a16="http://schemas.microsoft.com/office/drawing/2014/main" id="{AADBC786-4D63-67E3-AA1B-F19EF9AAB8C9}"/>
-              </a:ext>
-            </a:extLst>
-          </p:cNvPr>
+          <p:cNvPr id="2" name="Title Placeholder 1"/>
           <p:cNvSpPr>
             <a:spLocks noGrp="1"/>
           </p:cNvSpPr>
@@ -2784,8 +2892,8 @@
         </p:nvSpPr>
         <p:spPr>
           <a:xfrm>
-            <a:off x="838200" y="365125"/>
-            <a:ext cx="10515600" cy="1325563"/>
+            <a:off x="1113780" y="365126"/>
+            <a:ext cx="13972878" cy="1325563"/>
           </a:xfrm>
           <a:prstGeom prst="rect">
             <a:avLst/>
@@ -2801,18 +2909,13 @@
               <a:rPr lang="en-US"/>
               <a:t>Click to edit Master title style</a:t>
             </a:r>
+            <a:endParaRPr lang="en-US" dirty="0"/>
           </a:p>
         </p:txBody>
       </p:sp>
       <p:sp>
         <p:nvSpPr>
-          <p:cNvPr id="3" name="Text Placeholder 2">
-            <a:extLst>
-              <a:ext uri="{FF2B5EF4-FFF2-40B4-BE49-F238E27FC236}">
-                <a16:creationId xmlns:a16="http://schemas.microsoft.com/office/drawing/2014/main" id="{17C0B8D9-C0CA-1571-69AF-F3940B93A91F}"/>
-              </a:ext>
-            </a:extLst>
-          </p:cNvPr>
+          <p:cNvPr id="3" name="Text Placeholder 2"/>
           <p:cNvSpPr>
             <a:spLocks noGrp="1"/>
           </p:cNvSpPr>
@@ -2822,8 +2925,8 @@
         </p:nvSpPr>
         <p:spPr>
           <a:xfrm>
-            <a:off x="838200" y="1825625"/>
-            <a:ext cx="10515600" cy="4351338"/>
+            <a:off x="1113780" y="1825625"/>
+            <a:ext cx="13972878" cy="4351338"/>
           </a:xfrm>
           <a:prstGeom prst="rect">
             <a:avLst/>
@@ -2868,18 +2971,13 @@
               <a:rPr lang="en-US"/>
               <a:t>Fifth level</a:t>
             </a:r>
+            <a:endParaRPr lang="en-US" dirty="0"/>
           </a:p>
         </p:txBody>
       </p:sp>
       <p:sp>
         <p:nvSpPr>
-          <p:cNvPr id="4" name="Date Placeholder 3">
-            <a:extLst>
-              <a:ext uri="{FF2B5EF4-FFF2-40B4-BE49-F238E27FC236}">
-                <a16:creationId xmlns:a16="http://schemas.microsoft.com/office/drawing/2014/main" id="{18B9CE7C-702E-716C-3BD5-50F02C2FC28A}"/>
-              </a:ext>
-            </a:extLst>
-          </p:cNvPr>
+          <p:cNvPr id="4" name="Date Placeholder 3"/>
           <p:cNvSpPr>
             <a:spLocks noGrp="1"/>
           </p:cNvSpPr>
@@ -2889,8 +2987,8 @@
         </p:nvSpPr>
         <p:spPr>
           <a:xfrm>
-            <a:off x="838200" y="6356350"/>
-            <a:ext cx="2743200" cy="365125"/>
+            <a:off x="1113780" y="6356351"/>
+            <a:ext cx="3645099" cy="365125"/>
           </a:xfrm>
           <a:prstGeom prst="rect">
             <a:avLst/>
@@ -2912,7 +3010,7 @@
           <a:p>
             <a:fld id="{67C0AFF0-F3EA-4DCF-802E-2F5116650474}" type="datetimeFigureOut">
               <a:rPr lang="en-US" smtClean="0"/>
-              <a:t>5/16/2026</a:t>
+              <a:t>6/5/2026</a:t>
             </a:fld>
             <a:endParaRPr lang="en-US"/>
           </a:p>
@@ -2920,13 +3018,7 @@
       </p:sp>
       <p:sp>
         <p:nvSpPr>
-          <p:cNvPr id="5" name="Footer Placeholder 4">
-            <a:extLst>
-              <a:ext uri="{FF2B5EF4-FFF2-40B4-BE49-F238E27FC236}">
-                <a16:creationId xmlns:a16="http://schemas.microsoft.com/office/drawing/2014/main" id="{25BE099B-8D74-5428-4F34-B97A332C8746}"/>
-              </a:ext>
-            </a:extLst>
-          </p:cNvPr>
+          <p:cNvPr id="5" name="Footer Placeholder 4"/>
           <p:cNvSpPr>
             <a:spLocks noGrp="1"/>
           </p:cNvSpPr>
@@ -2936,8 +3028,8 @@
         </p:nvSpPr>
         <p:spPr>
           <a:xfrm>
-            <a:off x="4038600" y="6356350"/>
-            <a:ext cx="4114800" cy="365125"/>
+            <a:off x="5366395" y="6356351"/>
+            <a:ext cx="5467648" cy="365125"/>
           </a:xfrm>
           <a:prstGeom prst="rect">
             <a:avLst/>
@@ -2963,13 +3055,7 @@
       </p:sp>
       <p:sp>
         <p:nvSpPr>
-          <p:cNvPr id="6" name="Slide Number Placeholder 5">
-            <a:extLst>
-              <a:ext uri="{FF2B5EF4-FFF2-40B4-BE49-F238E27FC236}">
-                <a16:creationId xmlns:a16="http://schemas.microsoft.com/office/drawing/2014/main" id="{4785A739-FC95-32F2-560C-646A8C1FF687}"/>
-              </a:ext>
-            </a:extLst>
-          </p:cNvPr>
+          <p:cNvPr id="6" name="Slide Number Placeholder 5"/>
           <p:cNvSpPr>
             <a:spLocks noGrp="1"/>
           </p:cNvSpPr>
@@ -2979,8 +3065,8 @@
         </p:nvSpPr>
         <p:spPr>
           <a:xfrm>
-            <a:off x="8610600" y="6356350"/>
-            <a:ext cx="2743200" cy="365125"/>
+            <a:off x="11441559" y="6356351"/>
+            <a:ext cx="3645099" cy="365125"/>
           </a:xfrm>
           <a:prstGeom prst="rect">
             <a:avLst/>
@@ -3011,23 +3097,23 @@
     </p:spTree>
     <p:extLst>
       <p:ext uri="{BB962C8B-B14F-4D97-AF65-F5344CB8AC3E}">
-        <p14:creationId xmlns:p14="http://schemas.microsoft.com/office/powerpoint/2010/main" val="3380332674"/>
+        <p14:creationId xmlns:p14="http://schemas.microsoft.com/office/powerpoint/2010/main" val="2539971912"/>
       </p:ext>
     </p:extLst>
   </p:cSld>
   <p:clrMap bg1="lt1" tx1="dk1" bg2="lt2" tx2="dk2" accent1="accent1" accent2="accent2" accent3="accent3" accent4="accent4" accent5="accent5" accent6="accent6" hlink="hlink" folHlink="folHlink"/>
   <p:sldLayoutIdLst>
-    <p:sldLayoutId id="2147483649" r:id="rId1"/>
-    <p:sldLayoutId id="2147483650" r:id="rId2"/>
-    <p:sldLayoutId id="2147483651" r:id="rId3"/>
-    <p:sldLayoutId id="2147483652" r:id="rId4"/>
-    <p:sldLayoutId id="2147483653" r:id="rId5"/>
-    <p:sldLayoutId id="2147483654" r:id="rId6"/>
-    <p:sldLayoutId id="2147483655" r:id="rId7"/>
-    <p:sldLayoutId id="2147483656" r:id="rId8"/>
-    <p:sldLayoutId id="2147483657" r:id="rId9"/>
-    <p:sldLayoutId id="2147483658" r:id="rId10"/>
-    <p:sldLayoutId id="2147483659" r:id="rId11"/>
+    <p:sldLayoutId id="2147483661" r:id="rId1"/>
+    <p:sldLayoutId id="2147483662" r:id="rId2"/>
+    <p:sldLayoutId id="2147483663" r:id="rId3"/>
+    <p:sldLayoutId id="2147483664" r:id="rId4"/>
+    <p:sldLayoutId id="2147483665" r:id="rId5"/>
+    <p:sldLayoutId id="2147483666" r:id="rId6"/>
+    <p:sldLayoutId id="2147483667" r:id="rId7"/>
+    <p:sldLayoutId id="2147483668" r:id="rId8"/>
+    <p:sldLayoutId id="2147483669" r:id="rId9"/>
+    <p:sldLayoutId id="2147483670" r:id="rId10"/>
+    <p:sldLayoutId id="2147483671" r:id="rId11"/>
   </p:sldLayoutIdLst>
   <p:txStyles>
     <p:titleStyle>
@@ -3437,7 +3523,7 @@
         </p:blipFill>
         <p:spPr>
           <a:xfrm>
-            <a:off x="921926" y="-15747"/>
+            <a:off x="2926145" y="-15747"/>
             <a:ext cx="10348148" cy="6858000"/>
           </a:xfrm>
           <a:prstGeom prst="rect">
@@ -3459,7 +3545,7 @@
         </p:nvSpPr>
         <p:spPr>
           <a:xfrm>
-            <a:off x="921926" y="4619625"/>
+            <a:off x="2926145" y="4619626"/>
             <a:ext cx="10203274" cy="2162175"/>
           </a:xfrm>
           <a:prstGeom prst="rect">
@@ -3506,7 +3592,7 @@
         </p:nvSpPr>
         <p:spPr>
           <a:xfrm>
-            <a:off x="921926" y="76200"/>
+            <a:off x="2926145" y="76200"/>
             <a:ext cx="10203274" cy="1852188"/>
           </a:xfrm>
           <a:prstGeom prst="rect">
@@ -3556,7 +3642,7 @@
         </p:nvCxnSpPr>
         <p:spPr>
           <a:xfrm flipV="1">
-            <a:off x="4861709" y="3261609"/>
+            <a:off x="6865928" y="3261610"/>
             <a:ext cx="0" cy="1294645"/>
           </a:xfrm>
           <a:prstGeom prst="straightConnector1">
@@ -3600,7 +3686,7 @@
         </p:nvCxnSpPr>
         <p:spPr>
           <a:xfrm flipV="1">
-            <a:off x="5231390" y="1994123"/>
+            <a:off x="7235609" y="1994123"/>
             <a:ext cx="0" cy="468420"/>
           </a:xfrm>
           <a:prstGeom prst="straightConnector1">
@@ -3642,7 +3728,7 @@
         </p:nvSpPr>
         <p:spPr>
           <a:xfrm>
-            <a:off x="6581871" y="2797522"/>
+            <a:off x="8586090" y="2797522"/>
             <a:ext cx="740908" cy="400110"/>
           </a:xfrm>
           <a:prstGeom prst="rect">
@@ -3695,7 +3781,7 @@
         </p:nvCxnSpPr>
         <p:spPr>
           <a:xfrm>
-            <a:off x="5996404" y="2797522"/>
+            <a:off x="8000624" y="2797523"/>
             <a:ext cx="585467" cy="563973"/>
           </a:xfrm>
           <a:prstGeom prst="curvedConnector3">
@@ -3742,7 +3828,7 @@
         </p:nvCxnSpPr>
         <p:spPr>
           <a:xfrm rot="16200000" flipV="1">
-            <a:off x="5097183" y="3277326"/>
+            <a:off x="7101403" y="3277326"/>
             <a:ext cx="463055" cy="390812"/>
           </a:xfrm>
           <a:prstGeom prst="bentConnector3">
@@ -3817,14 +3903,14 @@
           <p:nvPr/>
         </p:nvPicPr>
         <p:blipFill>
-          <a:blip r:embed="rId2"/>
+          <a:blip r:embed="rId3"/>
           <a:stretch>
             <a:fillRect/>
           </a:stretch>
         </p:blipFill>
         <p:spPr>
           <a:xfrm>
-            <a:off x="3664660" y="0"/>
+            <a:off x="7941026" y="110837"/>
             <a:ext cx="8186919" cy="6297630"/>
           </a:xfrm>
           <a:prstGeom prst="rect">
@@ -3832,57 +3918,6 @@
           </a:prstGeom>
         </p:spPr>
       </p:pic>
-      <p:sp>
-        <p:nvSpPr>
-          <p:cNvPr id="6" name="Rectangle 5">
-            <a:extLst>
-              <a:ext uri="{FF2B5EF4-FFF2-40B4-BE49-F238E27FC236}">
-                <a16:creationId xmlns:a16="http://schemas.microsoft.com/office/drawing/2014/main" id="{9A4C7CB9-B9A4-20CD-D8FF-6671B98C0D1C}"/>
-              </a:ext>
-            </a:extLst>
-          </p:cNvPr>
-          <p:cNvSpPr/>
-          <p:nvPr/>
-        </p:nvSpPr>
-        <p:spPr>
-          <a:xfrm>
-            <a:off x="114300" y="1076326"/>
-            <a:ext cx="3548634" cy="3768566"/>
-          </a:xfrm>
-          <a:prstGeom prst="rect">
-            <a:avLst/>
-          </a:prstGeom>
-          <a:solidFill>
-            <a:schemeClr val="bg2">
-              <a:lumMod val="90000"/>
-            </a:schemeClr>
-          </a:solidFill>
-        </p:spPr>
-        <p:style>
-          <a:lnRef idx="2">
-            <a:schemeClr val="accent1">
-              <a:shade val="15000"/>
-            </a:schemeClr>
-          </a:lnRef>
-          <a:fillRef idx="1">
-            <a:schemeClr val="accent1"/>
-          </a:fillRef>
-          <a:effectRef idx="0">
-            <a:schemeClr val="accent1"/>
-          </a:effectRef>
-          <a:fontRef idx="minor">
-            <a:schemeClr val="lt1"/>
-          </a:fontRef>
-        </p:style>
-        <p:txBody>
-          <a:bodyPr rtlCol="0" anchor="ctr"/>
-          <a:lstStyle/>
-          <a:p>
-            <a:pPr algn="ctr"/>
-            <a:endParaRPr lang="en-US"/>
-          </a:p>
-        </p:txBody>
-      </p:sp>
       <p:sp>
         <p:nvSpPr>
           <p:cNvPr id="3" name="TextBox 2">
@@ -3897,7 +3932,7 @@
         </p:nvSpPr>
         <p:spPr>
           <a:xfrm>
-            <a:off x="8448675" y="2181225"/>
+            <a:off x="12752750" y="2298989"/>
             <a:ext cx="1044453" cy="553998"/>
           </a:xfrm>
           <a:prstGeom prst="rect">
@@ -3927,136 +3962,6 @@
       </p:sp>
       <p:sp>
         <p:nvSpPr>
-          <p:cNvPr id="4" name="TextBox 3">
-            <a:extLst>
-              <a:ext uri="{FF2B5EF4-FFF2-40B4-BE49-F238E27FC236}">
-                <a16:creationId xmlns:a16="http://schemas.microsoft.com/office/drawing/2014/main" id="{A830A1C8-BBA5-0F8A-CD16-37A7D129A462}"/>
-              </a:ext>
-            </a:extLst>
-          </p:cNvPr>
-          <p:cNvSpPr txBox="1"/>
-          <p:nvPr/>
-        </p:nvSpPr>
-        <p:spPr>
-          <a:xfrm>
-            <a:off x="340421" y="1705570"/>
-            <a:ext cx="3322513" cy="3139321"/>
-          </a:xfrm>
-          <a:prstGeom prst="rect">
-            <a:avLst/>
-          </a:prstGeom>
-          <a:noFill/>
-        </p:spPr>
-        <p:txBody>
-          <a:bodyPr wrap="none" rtlCol="0">
-            <a:spAutoFit/>
-          </a:bodyPr>
-          <a:lstStyle/>
-          <a:p>
-            <a:r>
-              <a:rPr lang="en-US" dirty="0"/>
-              <a:t>(1) Object Left</a:t>
-            </a:r>
-          </a:p>
-          <a:p>
-            <a:r>
-              <a:rPr lang="en-US" dirty="0"/>
-              <a:t>(2) Object Right</a:t>
-            </a:r>
-          </a:p>
-          <a:p>
-            <a:r>
-              <a:rPr lang="en-US" dirty="0"/>
-              <a:t>(3) Horizontal Position</a:t>
-            </a:r>
-          </a:p>
-          <a:p>
-            <a:r>
-              <a:rPr lang="en-US" dirty="0"/>
-              <a:t>(4) Obstacle Horizontal Position</a:t>
-            </a:r>
-          </a:p>
-          <a:p>
-            <a:r>
-              <a:rPr lang="en-US" dirty="0"/>
-              <a:t>(5) Obstacle Height</a:t>
-            </a:r>
-          </a:p>
-          <a:p>
-            <a:r>
-              <a:rPr lang="en-US" dirty="0"/>
-              <a:t>(6) Arc Apex-Obstacle Gap</a:t>
-            </a:r>
-          </a:p>
-          <a:p>
-            <a:r>
-              <a:rPr lang="en-US" dirty="0"/>
-              <a:t>(7) Spatial Adjacency</a:t>
-            </a:r>
-          </a:p>
-          <a:p>
-            <a:r>
-              <a:rPr lang="en-US" dirty="0"/>
-              <a:t>(8) Arc Peak Height</a:t>
-            </a:r>
-          </a:p>
-          <a:p>
-            <a:r>
-              <a:rPr lang="en-US" dirty="0"/>
-              <a:t>(9) Kinematic Motion Type</a:t>
-            </a:r>
-          </a:p>
-          <a:p>
-            <a:r>
-              <a:rPr lang="en-US" dirty="0"/>
-              <a:t>(10) Surface Property Left</a:t>
-            </a:r>
-          </a:p>
-          <a:p>
-            <a:r>
-              <a:rPr lang="en-US" dirty="0"/>
-              <a:t>(11) Surface Property right</a:t>
-            </a:r>
-          </a:p>
-        </p:txBody>
-      </p:sp>
-      <p:sp>
-        <p:nvSpPr>
-          <p:cNvPr id="5" name="TextBox 4">
-            <a:extLst>
-              <a:ext uri="{FF2B5EF4-FFF2-40B4-BE49-F238E27FC236}">
-                <a16:creationId xmlns:a16="http://schemas.microsoft.com/office/drawing/2014/main" id="{92EE4A59-4734-0DB8-0F25-FDD58050BF50}"/>
-              </a:ext>
-            </a:extLst>
-          </p:cNvPr>
-          <p:cNvSpPr txBox="1"/>
-          <p:nvPr/>
-        </p:nvSpPr>
-        <p:spPr>
-          <a:xfrm>
-            <a:off x="209550" y="1228725"/>
-            <a:ext cx="2729273" cy="369332"/>
-          </a:xfrm>
-          <a:prstGeom prst="rect">
-            <a:avLst/>
-          </a:prstGeom>
-          <a:noFill/>
-        </p:spPr>
-        <p:txBody>
-          <a:bodyPr wrap="none" rtlCol="0">
-            <a:spAutoFit/>
-          </a:bodyPr>
-          <a:lstStyle/>
-          <a:p>
-            <a:r>
-              <a:rPr lang="en-US" b="1" dirty="0"/>
-              <a:t>Input and Output groups</a:t>
-            </a:r>
-          </a:p>
-        </p:txBody>
-      </p:sp>
-      <p:sp>
-        <p:nvSpPr>
           <p:cNvPr id="7" name="TextBox 6">
             <a:extLst>
               <a:ext uri="{FF2B5EF4-FFF2-40B4-BE49-F238E27FC236}">
@@ -4069,7 +3974,7 @@
         </p:nvSpPr>
         <p:spPr>
           <a:xfrm>
-            <a:off x="6720840" y="276106"/>
+            <a:off x="10720114" y="386943"/>
             <a:ext cx="1371600" cy="338554"/>
           </a:xfrm>
           <a:prstGeom prst="rect">
@@ -4110,7 +4015,7 @@
         </p:nvSpPr>
         <p:spPr>
           <a:xfrm>
-            <a:off x="6720840" y="4052804"/>
+            <a:off x="10720114" y="4163641"/>
             <a:ext cx="1371600" cy="338554"/>
           </a:xfrm>
           <a:prstGeom prst="rect">
@@ -4137,6 +4042,2915 @@
           </a:p>
         </p:txBody>
       </p:sp>
+      <p:graphicFrame>
+        <p:nvGraphicFramePr>
+          <p:cNvPr id="14" name="Table 13">
+            <a:extLst>
+              <a:ext uri="{FF2B5EF4-FFF2-40B4-BE49-F238E27FC236}">
+                <a16:creationId xmlns:a16="http://schemas.microsoft.com/office/drawing/2014/main" id="{C03F0D3A-07AC-D84E-ECA2-FFAAE02EFEC9}"/>
+              </a:ext>
+            </a:extLst>
+          </p:cNvPr>
+          <p:cNvGraphicFramePr>
+            <a:graphicFrameLocks noGrp="1"/>
+          </p:cNvGraphicFramePr>
+          <p:nvPr>
+            <p:extLst>
+              <p:ext uri="{D42A27DB-BD31-4B8C-83A1-F6EECF244321}">
+                <p14:modId xmlns:p14="http://schemas.microsoft.com/office/powerpoint/2010/main" val="3557956918"/>
+              </p:ext>
+            </p:extLst>
+          </p:nvPr>
+        </p:nvGraphicFramePr>
+        <p:xfrm>
+          <a:off x="48489" y="843511"/>
+          <a:ext cx="7841675" cy="4709160"/>
+        </p:xfrm>
+        <a:graphic>
+          <a:graphicData uri="http://schemas.openxmlformats.org/drawingml/2006/table">
+            <a:tbl>
+              <a:tblPr firstRow="1" bandRow="1">
+                <a:tableStyleId>{5C22544A-7EE6-4342-B048-85BDC9FD1C3A}</a:tableStyleId>
+              </a:tblPr>
+              <a:tblGrid>
+                <a:gridCol w="2182093">
+                  <a:extLst>
+                    <a:ext uri="{9D8B030D-6E8A-4147-A177-3AD203B41FA5}">
+                      <a16:colId xmlns:a16="http://schemas.microsoft.com/office/drawing/2014/main" val="1351611643"/>
+                    </a:ext>
+                  </a:extLst>
+                </a:gridCol>
+                <a:gridCol w="886691">
+                  <a:extLst>
+                    <a:ext uri="{9D8B030D-6E8A-4147-A177-3AD203B41FA5}">
+                      <a16:colId xmlns:a16="http://schemas.microsoft.com/office/drawing/2014/main" val="1737548729"/>
+                    </a:ext>
+                  </a:extLst>
+                </a:gridCol>
+                <a:gridCol w="4772891">
+                  <a:extLst>
+                    <a:ext uri="{9D8B030D-6E8A-4147-A177-3AD203B41FA5}">
+                      <a16:colId xmlns:a16="http://schemas.microsoft.com/office/drawing/2014/main" val="2288633621"/>
+                    </a:ext>
+                  </a:extLst>
+                </a:gridCol>
+              </a:tblGrid>
+              <a:tr h="370840">
+                <a:tc>
+                  <a:txBody>
+                    <a:bodyPr/>
+                    <a:lstStyle/>
+                    <a:p>
+                      <a:r>
+                        <a:rPr lang="en-US" sz="1200" b="1" dirty="0">
+                          <a:solidFill>
+                            <a:schemeClr val="tx1"/>
+                          </a:solidFill>
+                          <a:latin typeface="Times New Roman" panose="02020603050405020304" pitchFamily="18" charset="0"/>
+                          <a:cs typeface="Times New Roman" panose="02020603050405020304" pitchFamily="18" charset="0"/>
+                        </a:rPr>
+                        <a:t>Groups</a:t>
+                      </a:r>
+                    </a:p>
+                  </a:txBody>
+                  <a:tcPr>
+                    <a:lnL w="12700" cap="flat" cmpd="sng" algn="ctr">
+                      <a:solidFill>
+                        <a:schemeClr val="tx1"/>
+                      </a:solidFill>
+                      <a:prstDash val="solid"/>
+                      <a:round/>
+                      <a:headEnd type="none" w="med" len="med"/>
+                      <a:tailEnd type="none" w="med" len="med"/>
+                    </a:lnL>
+                    <a:lnR w="12700" cap="flat" cmpd="sng" algn="ctr">
+                      <a:solidFill>
+                        <a:schemeClr val="tx1"/>
+                      </a:solidFill>
+                      <a:prstDash val="solid"/>
+                      <a:round/>
+                      <a:headEnd type="none" w="med" len="med"/>
+                      <a:tailEnd type="none" w="med" len="med"/>
+                    </a:lnR>
+                    <a:lnT w="12700" cap="flat" cmpd="sng" algn="ctr">
+                      <a:solidFill>
+                        <a:schemeClr val="tx1"/>
+                      </a:solidFill>
+                      <a:prstDash val="solid"/>
+                      <a:round/>
+                      <a:headEnd type="none" w="med" len="med"/>
+                      <a:tailEnd type="none" w="med" len="med"/>
+                    </a:lnT>
+                    <a:lnB w="12700" cap="flat" cmpd="sng" algn="ctr">
+                      <a:solidFill>
+                        <a:schemeClr val="tx1"/>
+                      </a:solidFill>
+                      <a:prstDash val="solid"/>
+                      <a:round/>
+                      <a:headEnd type="none" w="med" len="med"/>
+                      <a:tailEnd type="none" w="med" len="med"/>
+                    </a:lnB>
+                    <a:noFill/>
+                  </a:tcPr>
+                </a:tc>
+                <a:tc>
+                  <a:txBody>
+                    <a:bodyPr/>
+                    <a:lstStyle/>
+                    <a:p>
+                      <a:r>
+                        <a:rPr lang="en-US" sz="1200" b="1" dirty="0">
+                          <a:solidFill>
+                            <a:schemeClr val="tx1"/>
+                          </a:solidFill>
+                          <a:latin typeface="Times New Roman" panose="02020603050405020304" pitchFamily="18" charset="0"/>
+                          <a:cs typeface="Times New Roman" panose="02020603050405020304" pitchFamily="18" charset="0"/>
+                        </a:rPr>
+                        <a:t># of Units</a:t>
+                      </a:r>
+                    </a:p>
+                  </a:txBody>
+                  <a:tcPr>
+                    <a:lnL w="12700" cap="flat" cmpd="sng" algn="ctr">
+                      <a:solidFill>
+                        <a:schemeClr val="tx1"/>
+                      </a:solidFill>
+                      <a:prstDash val="solid"/>
+                      <a:round/>
+                      <a:headEnd type="none" w="med" len="med"/>
+                      <a:tailEnd type="none" w="med" len="med"/>
+                    </a:lnL>
+                    <a:lnR w="12700" cap="flat" cmpd="sng" algn="ctr">
+                      <a:solidFill>
+                        <a:schemeClr val="tx1"/>
+                      </a:solidFill>
+                      <a:prstDash val="solid"/>
+                      <a:round/>
+                      <a:headEnd type="none" w="med" len="med"/>
+                      <a:tailEnd type="none" w="med" len="med"/>
+                    </a:lnR>
+                    <a:lnT w="12700" cap="flat" cmpd="sng" algn="ctr">
+                      <a:solidFill>
+                        <a:schemeClr val="tx1"/>
+                      </a:solidFill>
+                      <a:prstDash val="solid"/>
+                      <a:round/>
+                      <a:headEnd type="none" w="med" len="med"/>
+                      <a:tailEnd type="none" w="med" len="med"/>
+                    </a:lnT>
+                    <a:lnB w="12700" cap="flat" cmpd="sng" algn="ctr">
+                      <a:solidFill>
+                        <a:schemeClr val="tx1"/>
+                      </a:solidFill>
+                      <a:prstDash val="solid"/>
+                      <a:round/>
+                      <a:headEnd type="none" w="med" len="med"/>
+                      <a:tailEnd type="none" w="med" len="med"/>
+                    </a:lnB>
+                    <a:noFill/>
+                  </a:tcPr>
+                </a:tc>
+                <a:tc>
+                  <a:txBody>
+                    <a:bodyPr/>
+                    <a:lstStyle/>
+                    <a:p>
+                      <a:r>
+                        <a:rPr lang="en-US" sz="1200" b="1" dirty="0">
+                          <a:solidFill>
+                            <a:schemeClr val="tx1"/>
+                          </a:solidFill>
+                          <a:latin typeface="Times New Roman" panose="02020603050405020304" pitchFamily="18" charset="0"/>
+                          <a:cs typeface="Times New Roman" panose="02020603050405020304" pitchFamily="18" charset="0"/>
+                        </a:rPr>
+                        <a:t>Semantic Features of Each Unit</a:t>
+                      </a:r>
+                    </a:p>
+                  </a:txBody>
+                  <a:tcPr>
+                    <a:lnL w="12700" cap="flat" cmpd="sng" algn="ctr">
+                      <a:solidFill>
+                        <a:schemeClr val="tx1"/>
+                      </a:solidFill>
+                      <a:prstDash val="solid"/>
+                      <a:round/>
+                      <a:headEnd type="none" w="med" len="med"/>
+                      <a:tailEnd type="none" w="med" len="med"/>
+                    </a:lnL>
+                    <a:lnR w="12700" cap="flat" cmpd="sng" algn="ctr">
+                      <a:solidFill>
+                        <a:schemeClr val="tx1"/>
+                      </a:solidFill>
+                      <a:prstDash val="solid"/>
+                      <a:round/>
+                      <a:headEnd type="none" w="med" len="med"/>
+                      <a:tailEnd type="none" w="med" len="med"/>
+                    </a:lnR>
+                    <a:lnT w="12700" cap="flat" cmpd="sng" algn="ctr">
+                      <a:solidFill>
+                        <a:schemeClr val="tx1"/>
+                      </a:solidFill>
+                      <a:prstDash val="solid"/>
+                      <a:round/>
+                      <a:headEnd type="none" w="med" len="med"/>
+                      <a:tailEnd type="none" w="med" len="med"/>
+                    </a:lnT>
+                    <a:lnB w="12700" cap="flat" cmpd="sng" algn="ctr">
+                      <a:solidFill>
+                        <a:schemeClr val="tx1"/>
+                      </a:solidFill>
+                      <a:prstDash val="solid"/>
+                      <a:round/>
+                      <a:headEnd type="none" w="med" len="med"/>
+                      <a:tailEnd type="none" w="med" len="med"/>
+                    </a:lnB>
+                    <a:noFill/>
+                  </a:tcPr>
+                </a:tc>
+                <a:extLst>
+                  <a:ext uri="{0D108BD9-81ED-4DB2-BD59-A6C34878D82A}">
+                    <a16:rowId xmlns:a16="http://schemas.microsoft.com/office/drawing/2014/main" val="1661885248"/>
+                  </a:ext>
+                </a:extLst>
+              </a:tr>
+              <a:tr h="370840">
+                <a:tc>
+                  <a:txBody>
+                    <a:bodyPr/>
+                    <a:lstStyle/>
+                    <a:p>
+                      <a:r>
+                        <a:rPr lang="en-US" sz="1200" dirty="0">
+                          <a:solidFill>
+                            <a:schemeClr val="tx1"/>
+                          </a:solidFill>
+                          <a:latin typeface="Times New Roman" panose="02020603050405020304" pitchFamily="18" charset="0"/>
+                          <a:cs typeface="Times New Roman" panose="02020603050405020304" pitchFamily="18" charset="0"/>
+                        </a:rPr>
+                        <a:t>1.</a:t>
+                      </a:r>
+                      <a:r>
+                        <a:rPr lang="en-US" sz="1200" dirty="0">
+                          <a:solidFill>
+                            <a:schemeClr val="bg1"/>
+                          </a:solidFill>
+                          <a:latin typeface="Times New Roman" panose="02020603050405020304" pitchFamily="18" charset="0"/>
+                          <a:cs typeface="Times New Roman" panose="02020603050405020304" pitchFamily="18" charset="0"/>
+                        </a:rPr>
+                        <a:t> </a:t>
+                      </a:r>
+                      <a:r>
+                        <a:rPr lang="en-US" sz="1200" dirty="0">
+                          <a:solidFill>
+                            <a:schemeClr val="tx1"/>
+                          </a:solidFill>
+                          <a:latin typeface="Times New Roman" panose="02020603050405020304" pitchFamily="18" charset="0"/>
+                          <a:cs typeface="Times New Roman" panose="02020603050405020304" pitchFamily="18" charset="0"/>
+                        </a:rPr>
+                        <a:t>Object Left</a:t>
+                      </a:r>
+                    </a:p>
+                  </a:txBody>
+                  <a:tcPr>
+                    <a:lnL w="12700" cap="flat" cmpd="sng" algn="ctr">
+                      <a:solidFill>
+                        <a:schemeClr val="tx1"/>
+                      </a:solidFill>
+                      <a:prstDash val="solid"/>
+                      <a:round/>
+                      <a:headEnd type="none" w="med" len="med"/>
+                      <a:tailEnd type="none" w="med" len="med"/>
+                    </a:lnL>
+                    <a:lnR w="12700" cap="flat" cmpd="sng" algn="ctr">
+                      <a:solidFill>
+                        <a:schemeClr val="tx1"/>
+                      </a:solidFill>
+                      <a:prstDash val="solid"/>
+                      <a:round/>
+                      <a:headEnd type="none" w="med" len="med"/>
+                      <a:tailEnd type="none" w="med" len="med"/>
+                    </a:lnR>
+                    <a:lnT w="12700" cap="flat" cmpd="sng" algn="ctr">
+                      <a:solidFill>
+                        <a:schemeClr val="tx1"/>
+                      </a:solidFill>
+                      <a:prstDash val="solid"/>
+                      <a:round/>
+                      <a:headEnd type="none" w="med" len="med"/>
+                      <a:tailEnd type="none" w="med" len="med"/>
+                    </a:lnT>
+                    <a:lnB w="12700" cap="flat" cmpd="sng" algn="ctr">
+                      <a:solidFill>
+                        <a:schemeClr val="tx1"/>
+                      </a:solidFill>
+                      <a:prstDash val="solid"/>
+                      <a:round/>
+                      <a:headEnd type="none" w="med" len="med"/>
+                      <a:tailEnd type="none" w="med" len="med"/>
+                    </a:lnB>
+                    <a:noFill/>
+                  </a:tcPr>
+                </a:tc>
+                <a:tc>
+                  <a:txBody>
+                    <a:bodyPr/>
+                    <a:lstStyle/>
+                    <a:p>
+                      <a:r>
+                        <a:rPr lang="en-US" sz="1200" dirty="0">
+                          <a:solidFill>
+                            <a:schemeClr val="tx1"/>
+                          </a:solidFill>
+                          <a:latin typeface="Times New Roman" panose="02020603050405020304" pitchFamily="18" charset="0"/>
+                          <a:cs typeface="Times New Roman" panose="02020603050405020304" pitchFamily="18" charset="0"/>
+                        </a:rPr>
+                        <a:t>80</a:t>
+                      </a:r>
+                    </a:p>
+                  </a:txBody>
+                  <a:tcPr>
+                    <a:lnL w="12700" cap="flat" cmpd="sng" algn="ctr">
+                      <a:solidFill>
+                        <a:schemeClr val="tx1"/>
+                      </a:solidFill>
+                      <a:prstDash val="solid"/>
+                      <a:round/>
+                      <a:headEnd type="none" w="med" len="med"/>
+                      <a:tailEnd type="none" w="med" len="med"/>
+                    </a:lnL>
+                    <a:lnR w="12700" cap="flat" cmpd="sng" algn="ctr">
+                      <a:solidFill>
+                        <a:schemeClr val="tx1"/>
+                      </a:solidFill>
+                      <a:prstDash val="solid"/>
+                      <a:round/>
+                      <a:headEnd type="none" w="med" len="med"/>
+                      <a:tailEnd type="none" w="med" len="med"/>
+                    </a:lnR>
+                    <a:lnT w="12700" cap="flat" cmpd="sng" algn="ctr">
+                      <a:solidFill>
+                        <a:schemeClr val="tx1"/>
+                      </a:solidFill>
+                      <a:prstDash val="solid"/>
+                      <a:round/>
+                      <a:headEnd type="none" w="med" len="med"/>
+                      <a:tailEnd type="none" w="med" len="med"/>
+                    </a:lnT>
+                    <a:lnB w="12700" cap="flat" cmpd="sng" algn="ctr">
+                      <a:solidFill>
+                        <a:schemeClr val="tx1"/>
+                      </a:solidFill>
+                      <a:prstDash val="solid"/>
+                      <a:round/>
+                      <a:headEnd type="none" w="med" len="med"/>
+                      <a:tailEnd type="none" w="med" len="med"/>
+                    </a:lnB>
+                    <a:noFill/>
+                  </a:tcPr>
+                </a:tc>
+                <a:tc>
+                  <a:txBody>
+                    <a:bodyPr/>
+                    <a:lstStyle/>
+                    <a:p>
+                      <a:r>
+                        <a:rPr lang="en-US" sz="1200" b="1" dirty="0">
+                          <a:solidFill>
+                            <a:schemeClr val="tx1"/>
+                          </a:solidFill>
+                          <a:latin typeface="Times New Roman" panose="02020603050405020304" pitchFamily="18" charset="0"/>
+                          <a:cs typeface="Times New Roman" panose="02020603050405020304" pitchFamily="18" charset="0"/>
+                        </a:rPr>
+                        <a:t>Units 1-80: </a:t>
+                      </a:r>
+                      <a:r>
+                        <a:rPr lang="en-US" sz="1200" dirty="0">
+                          <a:solidFill>
+                            <a:schemeClr val="tx1"/>
+                          </a:solidFill>
+                          <a:latin typeface="Times New Roman" panose="02020603050405020304" pitchFamily="18" charset="0"/>
+                          <a:cs typeface="Times New Roman" panose="02020603050405020304" pitchFamily="18" charset="0"/>
+                        </a:rPr>
+                        <a:t>1-80 individuals</a:t>
+                      </a:r>
+                    </a:p>
+                  </a:txBody>
+                  <a:tcPr>
+                    <a:lnL w="12700" cap="flat" cmpd="sng" algn="ctr">
+                      <a:solidFill>
+                        <a:schemeClr val="tx1"/>
+                      </a:solidFill>
+                      <a:prstDash val="solid"/>
+                      <a:round/>
+                      <a:headEnd type="none" w="med" len="med"/>
+                      <a:tailEnd type="none" w="med" len="med"/>
+                    </a:lnL>
+                    <a:lnR w="12700" cap="flat" cmpd="sng" algn="ctr">
+                      <a:solidFill>
+                        <a:schemeClr val="tx1"/>
+                      </a:solidFill>
+                      <a:prstDash val="solid"/>
+                      <a:round/>
+                      <a:headEnd type="none" w="med" len="med"/>
+                      <a:tailEnd type="none" w="med" len="med"/>
+                    </a:lnR>
+                    <a:lnT w="12700" cap="flat" cmpd="sng" algn="ctr">
+                      <a:solidFill>
+                        <a:schemeClr val="tx1"/>
+                      </a:solidFill>
+                      <a:prstDash val="solid"/>
+                      <a:round/>
+                      <a:headEnd type="none" w="med" len="med"/>
+                      <a:tailEnd type="none" w="med" len="med"/>
+                    </a:lnT>
+                    <a:lnB w="12700" cap="flat" cmpd="sng" algn="ctr">
+                      <a:solidFill>
+                        <a:schemeClr val="tx1"/>
+                      </a:solidFill>
+                      <a:prstDash val="solid"/>
+                      <a:round/>
+                      <a:headEnd type="none" w="med" len="med"/>
+                      <a:tailEnd type="none" w="med" len="med"/>
+                    </a:lnB>
+                    <a:noFill/>
+                  </a:tcPr>
+                </a:tc>
+                <a:extLst>
+                  <a:ext uri="{0D108BD9-81ED-4DB2-BD59-A6C34878D82A}">
+                    <a16:rowId xmlns:a16="http://schemas.microsoft.com/office/drawing/2014/main" val="2682608641"/>
+                  </a:ext>
+                </a:extLst>
+              </a:tr>
+              <a:tr h="370840">
+                <a:tc>
+                  <a:txBody>
+                    <a:bodyPr/>
+                    <a:lstStyle/>
+                    <a:p>
+                      <a:r>
+                        <a:rPr lang="en-US" sz="1200" dirty="0">
+                          <a:solidFill>
+                            <a:schemeClr val="tx1"/>
+                          </a:solidFill>
+                          <a:latin typeface="Times New Roman" panose="02020603050405020304" pitchFamily="18" charset="0"/>
+                          <a:cs typeface="Times New Roman" panose="02020603050405020304" pitchFamily="18" charset="0"/>
+                        </a:rPr>
+                        <a:t>2. Object Right</a:t>
+                      </a:r>
+                    </a:p>
+                  </a:txBody>
+                  <a:tcPr>
+                    <a:lnL w="12700" cap="flat" cmpd="sng" algn="ctr">
+                      <a:solidFill>
+                        <a:schemeClr val="tx1"/>
+                      </a:solidFill>
+                      <a:prstDash val="solid"/>
+                      <a:round/>
+                      <a:headEnd type="none" w="med" len="med"/>
+                      <a:tailEnd type="none" w="med" len="med"/>
+                    </a:lnL>
+                    <a:lnR w="12700" cap="flat" cmpd="sng" algn="ctr">
+                      <a:solidFill>
+                        <a:schemeClr val="tx1"/>
+                      </a:solidFill>
+                      <a:prstDash val="solid"/>
+                      <a:round/>
+                      <a:headEnd type="none" w="med" len="med"/>
+                      <a:tailEnd type="none" w="med" len="med"/>
+                    </a:lnR>
+                    <a:lnT w="12700" cap="flat" cmpd="sng" algn="ctr">
+                      <a:solidFill>
+                        <a:schemeClr val="tx1"/>
+                      </a:solidFill>
+                      <a:prstDash val="solid"/>
+                      <a:round/>
+                      <a:headEnd type="none" w="med" len="med"/>
+                      <a:tailEnd type="none" w="med" len="med"/>
+                    </a:lnT>
+                    <a:lnB w="12700" cap="flat" cmpd="sng" algn="ctr">
+                      <a:solidFill>
+                        <a:schemeClr val="tx1"/>
+                      </a:solidFill>
+                      <a:prstDash val="solid"/>
+                      <a:round/>
+                      <a:headEnd type="none" w="med" len="med"/>
+                      <a:tailEnd type="none" w="med" len="med"/>
+                    </a:lnB>
+                    <a:noFill/>
+                  </a:tcPr>
+                </a:tc>
+                <a:tc>
+                  <a:txBody>
+                    <a:bodyPr/>
+                    <a:lstStyle/>
+                    <a:p>
+                      <a:r>
+                        <a:rPr lang="en-US" sz="1200" dirty="0">
+                          <a:solidFill>
+                            <a:schemeClr val="tx1"/>
+                          </a:solidFill>
+                          <a:latin typeface="Times New Roman" panose="02020603050405020304" pitchFamily="18" charset="0"/>
+                          <a:cs typeface="Times New Roman" panose="02020603050405020304" pitchFamily="18" charset="0"/>
+                        </a:rPr>
+                        <a:t>80</a:t>
+                      </a:r>
+                    </a:p>
+                  </a:txBody>
+                  <a:tcPr>
+                    <a:lnL w="12700" cap="flat" cmpd="sng" algn="ctr">
+                      <a:solidFill>
+                        <a:schemeClr val="tx1"/>
+                      </a:solidFill>
+                      <a:prstDash val="solid"/>
+                      <a:round/>
+                      <a:headEnd type="none" w="med" len="med"/>
+                      <a:tailEnd type="none" w="med" len="med"/>
+                    </a:lnL>
+                    <a:lnR w="12700" cap="flat" cmpd="sng" algn="ctr">
+                      <a:solidFill>
+                        <a:schemeClr val="tx1"/>
+                      </a:solidFill>
+                      <a:prstDash val="solid"/>
+                      <a:round/>
+                      <a:headEnd type="none" w="med" len="med"/>
+                      <a:tailEnd type="none" w="med" len="med"/>
+                    </a:lnR>
+                    <a:lnT w="12700" cap="flat" cmpd="sng" algn="ctr">
+                      <a:solidFill>
+                        <a:schemeClr val="tx1"/>
+                      </a:solidFill>
+                      <a:prstDash val="solid"/>
+                      <a:round/>
+                      <a:headEnd type="none" w="med" len="med"/>
+                      <a:tailEnd type="none" w="med" len="med"/>
+                    </a:lnT>
+                    <a:lnB w="12700" cap="flat" cmpd="sng" algn="ctr">
+                      <a:solidFill>
+                        <a:schemeClr val="tx1"/>
+                      </a:solidFill>
+                      <a:prstDash val="solid"/>
+                      <a:round/>
+                      <a:headEnd type="none" w="med" len="med"/>
+                      <a:tailEnd type="none" w="med" len="med"/>
+                    </a:lnB>
+                    <a:noFill/>
+                  </a:tcPr>
+                </a:tc>
+                <a:tc>
+                  <a:txBody>
+                    <a:bodyPr/>
+                    <a:lstStyle/>
+                    <a:p>
+                      <a:r>
+                        <a:rPr lang="en-US" sz="1200" b="1" dirty="0">
+                          <a:solidFill>
+                            <a:schemeClr val="tx1"/>
+                          </a:solidFill>
+                          <a:latin typeface="Times New Roman" panose="02020603050405020304" pitchFamily="18" charset="0"/>
+                          <a:cs typeface="Times New Roman" panose="02020603050405020304" pitchFamily="18" charset="0"/>
+                        </a:rPr>
+                        <a:t>Units 1-80: </a:t>
+                      </a:r>
+                      <a:r>
+                        <a:rPr lang="en-US" sz="1200" dirty="0">
+                          <a:solidFill>
+                            <a:schemeClr val="tx1"/>
+                          </a:solidFill>
+                          <a:latin typeface="Times New Roman" panose="02020603050405020304" pitchFamily="18" charset="0"/>
+                          <a:cs typeface="Times New Roman" panose="02020603050405020304" pitchFamily="18" charset="0"/>
+                        </a:rPr>
+                        <a:t>1-80 individuals</a:t>
+                      </a:r>
+                    </a:p>
+                  </a:txBody>
+                  <a:tcPr>
+                    <a:lnL w="12700" cap="flat" cmpd="sng" algn="ctr">
+                      <a:solidFill>
+                        <a:schemeClr val="tx1"/>
+                      </a:solidFill>
+                      <a:prstDash val="solid"/>
+                      <a:round/>
+                      <a:headEnd type="none" w="med" len="med"/>
+                      <a:tailEnd type="none" w="med" len="med"/>
+                    </a:lnL>
+                    <a:lnR w="12700" cap="flat" cmpd="sng" algn="ctr">
+                      <a:solidFill>
+                        <a:schemeClr val="tx1"/>
+                      </a:solidFill>
+                      <a:prstDash val="solid"/>
+                      <a:round/>
+                      <a:headEnd type="none" w="med" len="med"/>
+                      <a:tailEnd type="none" w="med" len="med"/>
+                    </a:lnR>
+                    <a:lnT w="12700" cap="flat" cmpd="sng" algn="ctr">
+                      <a:solidFill>
+                        <a:schemeClr val="tx1"/>
+                      </a:solidFill>
+                      <a:prstDash val="solid"/>
+                      <a:round/>
+                      <a:headEnd type="none" w="med" len="med"/>
+                      <a:tailEnd type="none" w="med" len="med"/>
+                    </a:lnT>
+                    <a:lnB w="12700" cap="flat" cmpd="sng" algn="ctr">
+                      <a:solidFill>
+                        <a:schemeClr val="tx1"/>
+                      </a:solidFill>
+                      <a:prstDash val="solid"/>
+                      <a:round/>
+                      <a:headEnd type="none" w="med" len="med"/>
+                      <a:tailEnd type="none" w="med" len="med"/>
+                    </a:lnB>
+                    <a:noFill/>
+                  </a:tcPr>
+                </a:tc>
+                <a:extLst>
+                  <a:ext uri="{0D108BD9-81ED-4DB2-BD59-A6C34878D82A}">
+                    <a16:rowId xmlns:a16="http://schemas.microsoft.com/office/drawing/2014/main" val="1280101544"/>
+                  </a:ext>
+                </a:extLst>
+              </a:tr>
+              <a:tr h="370840">
+                <a:tc>
+                  <a:txBody>
+                    <a:bodyPr/>
+                    <a:lstStyle/>
+                    <a:p>
+                      <a:r>
+                        <a:rPr lang="en-US" sz="1200" dirty="0">
+                          <a:solidFill>
+                            <a:schemeClr val="tx1"/>
+                          </a:solidFill>
+                          <a:latin typeface="Times New Roman" panose="02020603050405020304" pitchFamily="18" charset="0"/>
+                          <a:cs typeface="Times New Roman" panose="02020603050405020304" pitchFamily="18" charset="0"/>
+                        </a:rPr>
+                        <a:t>3. Horizontal Position</a:t>
+                      </a:r>
+                    </a:p>
+                  </a:txBody>
+                  <a:tcPr>
+                    <a:lnL w="12700" cap="flat" cmpd="sng" algn="ctr">
+                      <a:solidFill>
+                        <a:schemeClr val="tx1"/>
+                      </a:solidFill>
+                      <a:prstDash val="solid"/>
+                      <a:round/>
+                      <a:headEnd type="none" w="med" len="med"/>
+                      <a:tailEnd type="none" w="med" len="med"/>
+                    </a:lnL>
+                    <a:lnR w="12700" cap="flat" cmpd="sng" algn="ctr">
+                      <a:solidFill>
+                        <a:schemeClr val="tx1"/>
+                      </a:solidFill>
+                      <a:prstDash val="solid"/>
+                      <a:round/>
+                      <a:headEnd type="none" w="med" len="med"/>
+                      <a:tailEnd type="none" w="med" len="med"/>
+                    </a:lnR>
+                    <a:lnT w="12700" cap="flat" cmpd="sng" algn="ctr">
+                      <a:solidFill>
+                        <a:schemeClr val="tx1"/>
+                      </a:solidFill>
+                      <a:prstDash val="solid"/>
+                      <a:round/>
+                      <a:headEnd type="none" w="med" len="med"/>
+                      <a:tailEnd type="none" w="med" len="med"/>
+                    </a:lnT>
+                    <a:lnB w="12700" cap="flat" cmpd="sng" algn="ctr">
+                      <a:solidFill>
+                        <a:schemeClr val="tx1"/>
+                      </a:solidFill>
+                      <a:prstDash val="solid"/>
+                      <a:round/>
+                      <a:headEnd type="none" w="med" len="med"/>
+                      <a:tailEnd type="none" w="med" len="med"/>
+                    </a:lnB>
+                    <a:noFill/>
+                  </a:tcPr>
+                </a:tc>
+                <a:tc>
+                  <a:txBody>
+                    <a:bodyPr/>
+                    <a:lstStyle/>
+                    <a:p>
+                      <a:r>
+                        <a:rPr lang="en-US" sz="1200" dirty="0">
+                          <a:solidFill>
+                            <a:schemeClr val="tx1"/>
+                          </a:solidFill>
+                          <a:latin typeface="Times New Roman" panose="02020603050405020304" pitchFamily="18" charset="0"/>
+                          <a:cs typeface="Times New Roman" panose="02020603050405020304" pitchFamily="18" charset="0"/>
+                        </a:rPr>
+                        <a:t>6</a:t>
+                      </a:r>
+                    </a:p>
+                  </a:txBody>
+                  <a:tcPr>
+                    <a:lnL w="12700" cap="flat" cmpd="sng" algn="ctr">
+                      <a:solidFill>
+                        <a:schemeClr val="tx1"/>
+                      </a:solidFill>
+                      <a:prstDash val="solid"/>
+                      <a:round/>
+                      <a:headEnd type="none" w="med" len="med"/>
+                      <a:tailEnd type="none" w="med" len="med"/>
+                    </a:lnL>
+                    <a:lnR w="12700" cap="flat" cmpd="sng" algn="ctr">
+                      <a:solidFill>
+                        <a:schemeClr val="tx1"/>
+                      </a:solidFill>
+                      <a:prstDash val="solid"/>
+                      <a:round/>
+                      <a:headEnd type="none" w="med" len="med"/>
+                      <a:tailEnd type="none" w="med" len="med"/>
+                    </a:lnR>
+                    <a:lnT w="12700" cap="flat" cmpd="sng" algn="ctr">
+                      <a:solidFill>
+                        <a:schemeClr val="tx1"/>
+                      </a:solidFill>
+                      <a:prstDash val="solid"/>
+                      <a:round/>
+                      <a:headEnd type="none" w="med" len="med"/>
+                      <a:tailEnd type="none" w="med" len="med"/>
+                    </a:lnT>
+                    <a:lnB w="12700" cap="flat" cmpd="sng" algn="ctr">
+                      <a:solidFill>
+                        <a:schemeClr val="tx1"/>
+                      </a:solidFill>
+                      <a:prstDash val="solid"/>
+                      <a:round/>
+                      <a:headEnd type="none" w="med" len="med"/>
+                      <a:tailEnd type="none" w="med" len="med"/>
+                    </a:lnB>
+                    <a:noFill/>
+                  </a:tcPr>
+                </a:tc>
+                <a:tc>
+                  <a:txBody>
+                    <a:bodyPr/>
+                    <a:lstStyle/>
+                    <a:p>
+                      <a:pPr marL="0" marR="0" lvl="0" indent="0" algn="l" defTabSz="914400" rtl="0" eaLnBrk="1" fontAlgn="auto" latinLnBrk="0" hangingPunct="1">
+                        <a:lnSpc>
+                          <a:spcPct val="100000"/>
+                        </a:lnSpc>
+                        <a:spcBef>
+                          <a:spcPts val="0"/>
+                        </a:spcBef>
+                        <a:spcAft>
+                          <a:spcPts val="0"/>
+                        </a:spcAft>
+                        <a:buClrTx/>
+                        <a:buSzTx/>
+                        <a:buFontTx/>
+                        <a:buNone/>
+                        <a:tabLst/>
+                        <a:defRPr/>
+                      </a:pPr>
+                      <a:r>
+                        <a:rPr lang="en-US" sz="1200" b="1" dirty="0">
+                          <a:solidFill>
+                            <a:schemeClr val="tx1"/>
+                          </a:solidFill>
+                          <a:latin typeface="Times New Roman" panose="02020603050405020304" pitchFamily="18" charset="0"/>
+                          <a:cs typeface="Times New Roman" panose="02020603050405020304" pitchFamily="18" charset="0"/>
+                        </a:rPr>
+                        <a:t>Unit 1: </a:t>
+                      </a:r>
+                      <a:r>
+                        <a:rPr lang="en-US" sz="1200" b="0" dirty="0">
+                          <a:solidFill>
+                            <a:schemeClr val="tx1"/>
+                          </a:solidFill>
+                          <a:latin typeface="Times New Roman" panose="02020603050405020304" pitchFamily="18" charset="0"/>
+                          <a:cs typeface="Times New Roman" panose="02020603050405020304" pitchFamily="18" charset="0"/>
+                        </a:rPr>
+                        <a:t>Far Left</a:t>
+                      </a:r>
+                      <a:r>
+                        <a:rPr lang="en-US" sz="1200" dirty="0">
+                          <a:solidFill>
+                            <a:schemeClr val="tx1"/>
+                          </a:solidFill>
+                          <a:latin typeface="Times New Roman" panose="02020603050405020304" pitchFamily="18" charset="0"/>
+                          <a:cs typeface="Times New Roman" panose="02020603050405020304" pitchFamily="18" charset="0"/>
+                        </a:rPr>
+                        <a:t>; </a:t>
+                      </a:r>
+                      <a:r>
+                        <a:rPr lang="en-US" sz="1200" b="1" dirty="0">
+                          <a:solidFill>
+                            <a:schemeClr val="tx1"/>
+                          </a:solidFill>
+                          <a:latin typeface="Times New Roman" panose="02020603050405020304" pitchFamily="18" charset="0"/>
+                          <a:cs typeface="Times New Roman" panose="02020603050405020304" pitchFamily="18" charset="0"/>
+                        </a:rPr>
+                        <a:t>Unit 2: </a:t>
+                      </a:r>
+                      <a:r>
+                        <a:rPr lang="en-US" sz="1200" dirty="0">
+                          <a:solidFill>
+                            <a:schemeClr val="tx1"/>
+                          </a:solidFill>
+                          <a:latin typeface="Times New Roman" panose="02020603050405020304" pitchFamily="18" charset="0"/>
+                          <a:cs typeface="Times New Roman" panose="02020603050405020304" pitchFamily="18" charset="0"/>
+                        </a:rPr>
+                        <a:t>Left; </a:t>
+                      </a:r>
+                      <a:r>
+                        <a:rPr lang="en-US" sz="1200" b="1" dirty="0">
+                          <a:solidFill>
+                            <a:schemeClr val="tx1"/>
+                          </a:solidFill>
+                          <a:latin typeface="Times New Roman" panose="02020603050405020304" pitchFamily="18" charset="0"/>
+                          <a:cs typeface="Times New Roman" panose="02020603050405020304" pitchFamily="18" charset="0"/>
+                        </a:rPr>
+                        <a:t>Unit 3: </a:t>
+                      </a:r>
+                      <a:r>
+                        <a:rPr lang="en-US" sz="1200" dirty="0">
+                          <a:solidFill>
+                            <a:schemeClr val="tx1"/>
+                          </a:solidFill>
+                          <a:latin typeface="Times New Roman" panose="02020603050405020304" pitchFamily="18" charset="0"/>
+                          <a:cs typeface="Times New Roman" panose="02020603050405020304" pitchFamily="18" charset="0"/>
+                        </a:rPr>
+                        <a:t>Center-Left; </a:t>
+                      </a:r>
+                      <a:r>
+                        <a:rPr lang="en-US" sz="1200" b="1" dirty="0">
+                          <a:solidFill>
+                            <a:schemeClr val="tx1"/>
+                          </a:solidFill>
+                          <a:latin typeface="Times New Roman" panose="02020603050405020304" pitchFamily="18" charset="0"/>
+                          <a:cs typeface="Times New Roman" panose="02020603050405020304" pitchFamily="18" charset="0"/>
+                        </a:rPr>
+                        <a:t>Unit 4:</a:t>
+                      </a:r>
+                      <a:r>
+                        <a:rPr lang="en-US" sz="1200" dirty="0">
+                          <a:solidFill>
+                            <a:schemeClr val="tx1"/>
+                          </a:solidFill>
+                          <a:latin typeface="Times New Roman" panose="02020603050405020304" pitchFamily="18" charset="0"/>
+                          <a:cs typeface="Times New Roman" panose="02020603050405020304" pitchFamily="18" charset="0"/>
+                        </a:rPr>
+                        <a:t> Center-Right; </a:t>
+                      </a:r>
+                      <a:r>
+                        <a:rPr lang="en-US" sz="1200" b="1" dirty="0">
+                          <a:solidFill>
+                            <a:schemeClr val="tx1"/>
+                          </a:solidFill>
+                          <a:latin typeface="Times New Roman" panose="02020603050405020304" pitchFamily="18" charset="0"/>
+                          <a:cs typeface="Times New Roman" panose="02020603050405020304" pitchFamily="18" charset="0"/>
+                        </a:rPr>
+                        <a:t>Unit 5:</a:t>
+                      </a:r>
+                      <a:r>
+                        <a:rPr lang="en-US" sz="1200" dirty="0">
+                          <a:solidFill>
+                            <a:schemeClr val="tx1"/>
+                          </a:solidFill>
+                          <a:latin typeface="Times New Roman" panose="02020603050405020304" pitchFamily="18" charset="0"/>
+                          <a:cs typeface="Times New Roman" panose="02020603050405020304" pitchFamily="18" charset="0"/>
+                        </a:rPr>
+                        <a:t> Right; </a:t>
+                      </a:r>
+                      <a:r>
+                        <a:rPr lang="en-US" sz="1200" b="1" dirty="0">
+                          <a:solidFill>
+                            <a:schemeClr val="tx1"/>
+                          </a:solidFill>
+                          <a:latin typeface="Times New Roman" panose="02020603050405020304" pitchFamily="18" charset="0"/>
+                          <a:cs typeface="Times New Roman" panose="02020603050405020304" pitchFamily="18" charset="0"/>
+                        </a:rPr>
+                        <a:t>Unit 6: </a:t>
+                      </a:r>
+                      <a:r>
+                        <a:rPr lang="en-US" sz="1200" b="0" dirty="0">
+                          <a:solidFill>
+                            <a:schemeClr val="tx1"/>
+                          </a:solidFill>
+                          <a:latin typeface="Times New Roman" panose="02020603050405020304" pitchFamily="18" charset="0"/>
+                          <a:cs typeface="Times New Roman" panose="02020603050405020304" pitchFamily="18" charset="0"/>
+                        </a:rPr>
+                        <a:t>Far Right</a:t>
+                      </a:r>
+                      <a:endParaRPr lang="en-US" sz="1200" dirty="0">
+                        <a:solidFill>
+                          <a:schemeClr val="tx1"/>
+                        </a:solidFill>
+                        <a:latin typeface="Times New Roman" panose="02020603050405020304" pitchFamily="18" charset="0"/>
+                        <a:cs typeface="Times New Roman" panose="02020603050405020304" pitchFamily="18" charset="0"/>
+                      </a:endParaRPr>
+                    </a:p>
+                  </a:txBody>
+                  <a:tcPr>
+                    <a:lnL w="12700" cap="flat" cmpd="sng" algn="ctr">
+                      <a:solidFill>
+                        <a:schemeClr val="tx1"/>
+                      </a:solidFill>
+                      <a:prstDash val="solid"/>
+                      <a:round/>
+                      <a:headEnd type="none" w="med" len="med"/>
+                      <a:tailEnd type="none" w="med" len="med"/>
+                    </a:lnL>
+                    <a:lnR w="12700" cap="flat" cmpd="sng" algn="ctr">
+                      <a:solidFill>
+                        <a:schemeClr val="tx1"/>
+                      </a:solidFill>
+                      <a:prstDash val="solid"/>
+                      <a:round/>
+                      <a:headEnd type="none" w="med" len="med"/>
+                      <a:tailEnd type="none" w="med" len="med"/>
+                    </a:lnR>
+                    <a:lnT w="12700" cap="flat" cmpd="sng" algn="ctr">
+                      <a:solidFill>
+                        <a:schemeClr val="tx1"/>
+                      </a:solidFill>
+                      <a:prstDash val="solid"/>
+                      <a:round/>
+                      <a:headEnd type="none" w="med" len="med"/>
+                      <a:tailEnd type="none" w="med" len="med"/>
+                    </a:lnT>
+                    <a:lnB w="12700" cap="flat" cmpd="sng" algn="ctr">
+                      <a:solidFill>
+                        <a:schemeClr val="tx1"/>
+                      </a:solidFill>
+                      <a:prstDash val="solid"/>
+                      <a:round/>
+                      <a:headEnd type="none" w="med" len="med"/>
+                      <a:tailEnd type="none" w="med" len="med"/>
+                    </a:lnB>
+                    <a:noFill/>
+                  </a:tcPr>
+                </a:tc>
+                <a:extLst>
+                  <a:ext uri="{0D108BD9-81ED-4DB2-BD59-A6C34878D82A}">
+                    <a16:rowId xmlns:a16="http://schemas.microsoft.com/office/drawing/2014/main" val="293791516"/>
+                  </a:ext>
+                </a:extLst>
+              </a:tr>
+              <a:tr h="370840">
+                <a:tc>
+                  <a:txBody>
+                    <a:bodyPr/>
+                    <a:lstStyle/>
+                    <a:p>
+                      <a:r>
+                        <a:rPr lang="en-US" sz="1200" dirty="0">
+                          <a:solidFill>
+                            <a:schemeClr val="tx1"/>
+                          </a:solidFill>
+                          <a:latin typeface="Times New Roman" panose="02020603050405020304" pitchFamily="18" charset="0"/>
+                          <a:cs typeface="Times New Roman" panose="02020603050405020304" pitchFamily="18" charset="0"/>
+                        </a:rPr>
+                        <a:t>4. Obstacle Horizontal Position</a:t>
+                      </a:r>
+                    </a:p>
+                  </a:txBody>
+                  <a:tcPr>
+                    <a:lnL w="12700" cap="flat" cmpd="sng" algn="ctr">
+                      <a:solidFill>
+                        <a:schemeClr val="tx1"/>
+                      </a:solidFill>
+                      <a:prstDash val="solid"/>
+                      <a:round/>
+                      <a:headEnd type="none" w="med" len="med"/>
+                      <a:tailEnd type="none" w="med" len="med"/>
+                    </a:lnL>
+                    <a:lnR w="12700" cap="flat" cmpd="sng" algn="ctr">
+                      <a:solidFill>
+                        <a:schemeClr val="tx1"/>
+                      </a:solidFill>
+                      <a:prstDash val="solid"/>
+                      <a:round/>
+                      <a:headEnd type="none" w="med" len="med"/>
+                      <a:tailEnd type="none" w="med" len="med"/>
+                    </a:lnR>
+                    <a:lnT w="12700" cap="flat" cmpd="sng" algn="ctr">
+                      <a:solidFill>
+                        <a:schemeClr val="tx1"/>
+                      </a:solidFill>
+                      <a:prstDash val="solid"/>
+                      <a:round/>
+                      <a:headEnd type="none" w="med" len="med"/>
+                      <a:tailEnd type="none" w="med" len="med"/>
+                    </a:lnT>
+                    <a:lnB w="12700" cap="flat" cmpd="sng" algn="ctr">
+                      <a:solidFill>
+                        <a:schemeClr val="tx1"/>
+                      </a:solidFill>
+                      <a:prstDash val="solid"/>
+                      <a:round/>
+                      <a:headEnd type="none" w="med" len="med"/>
+                      <a:tailEnd type="none" w="med" len="med"/>
+                    </a:lnB>
+                    <a:noFill/>
+                  </a:tcPr>
+                </a:tc>
+                <a:tc>
+                  <a:txBody>
+                    <a:bodyPr/>
+                    <a:lstStyle/>
+                    <a:p>
+                      <a:r>
+                        <a:rPr lang="en-US" sz="1200" dirty="0">
+                          <a:solidFill>
+                            <a:schemeClr val="tx1"/>
+                          </a:solidFill>
+                          <a:latin typeface="Times New Roman" panose="02020603050405020304" pitchFamily="18" charset="0"/>
+                          <a:cs typeface="Times New Roman" panose="02020603050405020304" pitchFamily="18" charset="0"/>
+                        </a:rPr>
+                        <a:t>3</a:t>
+                      </a:r>
+                    </a:p>
+                  </a:txBody>
+                  <a:tcPr>
+                    <a:lnL w="12700" cap="flat" cmpd="sng" algn="ctr">
+                      <a:solidFill>
+                        <a:schemeClr val="tx1"/>
+                      </a:solidFill>
+                      <a:prstDash val="solid"/>
+                      <a:round/>
+                      <a:headEnd type="none" w="med" len="med"/>
+                      <a:tailEnd type="none" w="med" len="med"/>
+                    </a:lnL>
+                    <a:lnR w="12700" cap="flat" cmpd="sng" algn="ctr">
+                      <a:solidFill>
+                        <a:schemeClr val="tx1"/>
+                      </a:solidFill>
+                      <a:prstDash val="solid"/>
+                      <a:round/>
+                      <a:headEnd type="none" w="med" len="med"/>
+                      <a:tailEnd type="none" w="med" len="med"/>
+                    </a:lnR>
+                    <a:lnT w="12700" cap="flat" cmpd="sng" algn="ctr">
+                      <a:solidFill>
+                        <a:schemeClr val="tx1"/>
+                      </a:solidFill>
+                      <a:prstDash val="solid"/>
+                      <a:round/>
+                      <a:headEnd type="none" w="med" len="med"/>
+                      <a:tailEnd type="none" w="med" len="med"/>
+                    </a:lnT>
+                    <a:lnB w="12700" cap="flat" cmpd="sng" algn="ctr">
+                      <a:solidFill>
+                        <a:schemeClr val="tx1"/>
+                      </a:solidFill>
+                      <a:prstDash val="solid"/>
+                      <a:round/>
+                      <a:headEnd type="none" w="med" len="med"/>
+                      <a:tailEnd type="none" w="med" len="med"/>
+                    </a:lnB>
+                    <a:noFill/>
+                  </a:tcPr>
+                </a:tc>
+                <a:tc>
+                  <a:txBody>
+                    <a:bodyPr/>
+                    <a:lstStyle/>
+                    <a:p>
+                      <a:pPr marL="0" marR="0" lvl="0" indent="0" algn="l" defTabSz="914400" rtl="0" eaLnBrk="1" fontAlgn="auto" latinLnBrk="0" hangingPunct="1">
+                        <a:lnSpc>
+                          <a:spcPct val="100000"/>
+                        </a:lnSpc>
+                        <a:spcBef>
+                          <a:spcPts val="0"/>
+                        </a:spcBef>
+                        <a:spcAft>
+                          <a:spcPts val="0"/>
+                        </a:spcAft>
+                        <a:buClrTx/>
+                        <a:buSzTx/>
+                        <a:buFontTx/>
+                        <a:buNone/>
+                        <a:tabLst/>
+                        <a:defRPr/>
+                      </a:pPr>
+                      <a:r>
+                        <a:rPr lang="en-US" sz="1200" b="1" dirty="0">
+                          <a:solidFill>
+                            <a:schemeClr val="tx1"/>
+                          </a:solidFill>
+                          <a:latin typeface="Times New Roman" panose="02020603050405020304" pitchFamily="18" charset="0"/>
+                          <a:cs typeface="Times New Roman" panose="02020603050405020304" pitchFamily="18" charset="0"/>
+                        </a:rPr>
+                        <a:t>Unit 1: </a:t>
+                      </a:r>
+                      <a:r>
+                        <a:rPr lang="en-US" sz="1200" dirty="0">
+                          <a:solidFill>
+                            <a:schemeClr val="tx1"/>
+                          </a:solidFill>
+                          <a:latin typeface="Times New Roman" panose="02020603050405020304" pitchFamily="18" charset="0"/>
+                          <a:cs typeface="Times New Roman" panose="02020603050405020304" pitchFamily="18" charset="0"/>
+                        </a:rPr>
+                        <a:t>Absent; </a:t>
+                      </a:r>
+                      <a:r>
+                        <a:rPr lang="en-US" sz="1200" b="1" dirty="0">
+                          <a:solidFill>
+                            <a:schemeClr val="tx1"/>
+                          </a:solidFill>
+                          <a:latin typeface="Times New Roman" panose="02020603050405020304" pitchFamily="18" charset="0"/>
+                          <a:cs typeface="Times New Roman" panose="02020603050405020304" pitchFamily="18" charset="0"/>
+                        </a:rPr>
+                        <a:t>Unit 2: </a:t>
+                      </a:r>
+                      <a:r>
+                        <a:rPr lang="en-US" sz="1200" b="0" dirty="0">
+                          <a:solidFill>
+                            <a:schemeClr val="tx1"/>
+                          </a:solidFill>
+                          <a:latin typeface="Times New Roman" panose="02020603050405020304" pitchFamily="18" charset="0"/>
+                          <a:cs typeface="Times New Roman" panose="02020603050405020304" pitchFamily="18" charset="0"/>
+                        </a:rPr>
+                        <a:t>Middle</a:t>
+                      </a:r>
+                      <a:r>
+                        <a:rPr lang="en-US" sz="1200" dirty="0">
+                          <a:solidFill>
+                            <a:schemeClr val="tx1"/>
+                          </a:solidFill>
+                          <a:latin typeface="Times New Roman" panose="02020603050405020304" pitchFamily="18" charset="0"/>
+                          <a:cs typeface="Times New Roman" panose="02020603050405020304" pitchFamily="18" charset="0"/>
+                        </a:rPr>
+                        <a:t>; </a:t>
+                      </a:r>
+                      <a:r>
+                        <a:rPr lang="en-US" sz="1200" b="1" dirty="0">
+                          <a:solidFill>
+                            <a:schemeClr val="tx1"/>
+                          </a:solidFill>
+                          <a:latin typeface="Times New Roman" panose="02020603050405020304" pitchFamily="18" charset="0"/>
+                          <a:cs typeface="Times New Roman" panose="02020603050405020304" pitchFamily="18" charset="0"/>
+                        </a:rPr>
+                        <a:t>Unit 3: </a:t>
+                      </a:r>
+                      <a:r>
+                        <a:rPr lang="en-US" sz="1200" dirty="0">
+                          <a:solidFill>
+                            <a:schemeClr val="tx1"/>
+                          </a:solidFill>
+                          <a:latin typeface="Times New Roman" panose="02020603050405020304" pitchFamily="18" charset="0"/>
+                          <a:cs typeface="Times New Roman" panose="02020603050405020304" pitchFamily="18" charset="0"/>
+                        </a:rPr>
+                        <a:t>Periphery</a:t>
+                      </a:r>
+                    </a:p>
+                  </a:txBody>
+                  <a:tcPr>
+                    <a:lnL w="12700" cap="flat" cmpd="sng" algn="ctr">
+                      <a:solidFill>
+                        <a:schemeClr val="tx1"/>
+                      </a:solidFill>
+                      <a:prstDash val="solid"/>
+                      <a:round/>
+                      <a:headEnd type="none" w="med" len="med"/>
+                      <a:tailEnd type="none" w="med" len="med"/>
+                    </a:lnL>
+                    <a:lnR w="12700" cap="flat" cmpd="sng" algn="ctr">
+                      <a:solidFill>
+                        <a:schemeClr val="tx1"/>
+                      </a:solidFill>
+                      <a:prstDash val="solid"/>
+                      <a:round/>
+                      <a:headEnd type="none" w="med" len="med"/>
+                      <a:tailEnd type="none" w="med" len="med"/>
+                    </a:lnR>
+                    <a:lnT w="12700" cap="flat" cmpd="sng" algn="ctr">
+                      <a:solidFill>
+                        <a:schemeClr val="tx1"/>
+                      </a:solidFill>
+                      <a:prstDash val="solid"/>
+                      <a:round/>
+                      <a:headEnd type="none" w="med" len="med"/>
+                      <a:tailEnd type="none" w="med" len="med"/>
+                    </a:lnT>
+                    <a:lnB w="12700" cap="flat" cmpd="sng" algn="ctr">
+                      <a:solidFill>
+                        <a:schemeClr val="tx1"/>
+                      </a:solidFill>
+                      <a:prstDash val="solid"/>
+                      <a:round/>
+                      <a:headEnd type="none" w="med" len="med"/>
+                      <a:tailEnd type="none" w="med" len="med"/>
+                    </a:lnB>
+                    <a:noFill/>
+                  </a:tcPr>
+                </a:tc>
+                <a:extLst>
+                  <a:ext uri="{0D108BD9-81ED-4DB2-BD59-A6C34878D82A}">
+                    <a16:rowId xmlns:a16="http://schemas.microsoft.com/office/drawing/2014/main" val="1444462915"/>
+                  </a:ext>
+                </a:extLst>
+              </a:tr>
+              <a:tr h="370840">
+                <a:tc>
+                  <a:txBody>
+                    <a:bodyPr/>
+                    <a:lstStyle/>
+                    <a:p>
+                      <a:r>
+                        <a:rPr lang="en-US" sz="1200" dirty="0">
+                          <a:solidFill>
+                            <a:schemeClr val="tx1"/>
+                          </a:solidFill>
+                          <a:latin typeface="Times New Roman" panose="02020603050405020304" pitchFamily="18" charset="0"/>
+                          <a:cs typeface="Times New Roman" panose="02020603050405020304" pitchFamily="18" charset="0"/>
+                        </a:rPr>
+                        <a:t>5. Obstacle Height</a:t>
+                      </a:r>
+                    </a:p>
+                  </a:txBody>
+                  <a:tcPr>
+                    <a:lnL w="12700" cap="flat" cmpd="sng" algn="ctr">
+                      <a:solidFill>
+                        <a:schemeClr val="tx1"/>
+                      </a:solidFill>
+                      <a:prstDash val="solid"/>
+                      <a:round/>
+                      <a:headEnd type="none" w="med" len="med"/>
+                      <a:tailEnd type="none" w="med" len="med"/>
+                    </a:lnL>
+                    <a:lnR w="12700" cap="flat" cmpd="sng" algn="ctr">
+                      <a:solidFill>
+                        <a:schemeClr val="tx1"/>
+                      </a:solidFill>
+                      <a:prstDash val="solid"/>
+                      <a:round/>
+                      <a:headEnd type="none" w="med" len="med"/>
+                      <a:tailEnd type="none" w="med" len="med"/>
+                    </a:lnR>
+                    <a:lnT w="12700" cap="flat" cmpd="sng" algn="ctr">
+                      <a:solidFill>
+                        <a:schemeClr val="tx1"/>
+                      </a:solidFill>
+                      <a:prstDash val="solid"/>
+                      <a:round/>
+                      <a:headEnd type="none" w="med" len="med"/>
+                      <a:tailEnd type="none" w="med" len="med"/>
+                    </a:lnT>
+                    <a:lnB w="12700" cap="flat" cmpd="sng" algn="ctr">
+                      <a:solidFill>
+                        <a:schemeClr val="tx1"/>
+                      </a:solidFill>
+                      <a:prstDash val="solid"/>
+                      <a:round/>
+                      <a:headEnd type="none" w="med" len="med"/>
+                      <a:tailEnd type="none" w="med" len="med"/>
+                    </a:lnB>
+                    <a:noFill/>
+                  </a:tcPr>
+                </a:tc>
+                <a:tc>
+                  <a:txBody>
+                    <a:bodyPr/>
+                    <a:lstStyle/>
+                    <a:p>
+                      <a:r>
+                        <a:rPr lang="en-US" sz="1200" dirty="0">
+                          <a:solidFill>
+                            <a:schemeClr val="tx1"/>
+                          </a:solidFill>
+                          <a:latin typeface="Times New Roman" panose="02020603050405020304" pitchFamily="18" charset="0"/>
+                          <a:cs typeface="Times New Roman" panose="02020603050405020304" pitchFamily="18" charset="0"/>
+                        </a:rPr>
+                        <a:t>5</a:t>
+                      </a:r>
+                    </a:p>
+                  </a:txBody>
+                  <a:tcPr>
+                    <a:lnL w="12700" cap="flat" cmpd="sng" algn="ctr">
+                      <a:solidFill>
+                        <a:schemeClr val="tx1"/>
+                      </a:solidFill>
+                      <a:prstDash val="solid"/>
+                      <a:round/>
+                      <a:headEnd type="none" w="med" len="med"/>
+                      <a:tailEnd type="none" w="med" len="med"/>
+                    </a:lnL>
+                    <a:lnR w="12700" cap="flat" cmpd="sng" algn="ctr">
+                      <a:solidFill>
+                        <a:schemeClr val="tx1"/>
+                      </a:solidFill>
+                      <a:prstDash val="solid"/>
+                      <a:round/>
+                      <a:headEnd type="none" w="med" len="med"/>
+                      <a:tailEnd type="none" w="med" len="med"/>
+                    </a:lnR>
+                    <a:lnT w="12700" cap="flat" cmpd="sng" algn="ctr">
+                      <a:solidFill>
+                        <a:schemeClr val="tx1"/>
+                      </a:solidFill>
+                      <a:prstDash val="solid"/>
+                      <a:round/>
+                      <a:headEnd type="none" w="med" len="med"/>
+                      <a:tailEnd type="none" w="med" len="med"/>
+                    </a:lnT>
+                    <a:lnB w="12700" cap="flat" cmpd="sng" algn="ctr">
+                      <a:solidFill>
+                        <a:schemeClr val="tx1"/>
+                      </a:solidFill>
+                      <a:prstDash val="solid"/>
+                      <a:round/>
+                      <a:headEnd type="none" w="med" len="med"/>
+                      <a:tailEnd type="none" w="med" len="med"/>
+                    </a:lnB>
+                    <a:noFill/>
+                  </a:tcPr>
+                </a:tc>
+                <a:tc>
+                  <a:txBody>
+                    <a:bodyPr/>
+                    <a:lstStyle/>
+                    <a:p>
+                      <a:r>
+                        <a:rPr lang="en-US" sz="1200" b="1" dirty="0">
+                          <a:solidFill>
+                            <a:schemeClr val="tx1"/>
+                          </a:solidFill>
+                          <a:latin typeface="Times New Roman" panose="02020603050405020304" pitchFamily="18" charset="0"/>
+                          <a:cs typeface="Times New Roman" panose="02020603050405020304" pitchFamily="18" charset="0"/>
+                        </a:rPr>
+                        <a:t>Unit 1: </a:t>
+                      </a:r>
+                      <a:r>
+                        <a:rPr lang="en-US" sz="1200" dirty="0">
+                          <a:solidFill>
+                            <a:schemeClr val="tx1"/>
+                          </a:solidFill>
+                          <a:latin typeface="Times New Roman" panose="02020603050405020304" pitchFamily="18" charset="0"/>
+                          <a:cs typeface="Times New Roman" panose="02020603050405020304" pitchFamily="18" charset="0"/>
+                        </a:rPr>
+                        <a:t>Absent; </a:t>
+                      </a:r>
+                      <a:r>
+                        <a:rPr lang="en-US" sz="1200" b="1" dirty="0">
+                          <a:solidFill>
+                            <a:schemeClr val="tx1"/>
+                          </a:solidFill>
+                          <a:latin typeface="Times New Roman" panose="02020603050405020304" pitchFamily="18" charset="0"/>
+                          <a:cs typeface="Times New Roman" panose="02020603050405020304" pitchFamily="18" charset="0"/>
+                        </a:rPr>
+                        <a:t>Unit 2: </a:t>
+                      </a:r>
+                      <a:r>
+                        <a:rPr lang="en-US" sz="1200" dirty="0">
+                          <a:solidFill>
+                            <a:schemeClr val="tx1"/>
+                          </a:solidFill>
+                          <a:latin typeface="Times New Roman" panose="02020603050405020304" pitchFamily="18" charset="0"/>
+                          <a:cs typeface="Times New Roman" panose="02020603050405020304" pitchFamily="18" charset="0"/>
+                        </a:rPr>
+                        <a:t>Smallest; </a:t>
+                      </a:r>
+                      <a:r>
+                        <a:rPr lang="en-US" sz="1200" b="1" dirty="0">
+                          <a:solidFill>
+                            <a:schemeClr val="tx1"/>
+                          </a:solidFill>
+                          <a:latin typeface="Times New Roman" panose="02020603050405020304" pitchFamily="18" charset="0"/>
+                          <a:cs typeface="Times New Roman" panose="02020603050405020304" pitchFamily="18" charset="0"/>
+                        </a:rPr>
+                        <a:t>Unit 3: </a:t>
+                      </a:r>
+                      <a:r>
+                        <a:rPr lang="en-US" sz="1200" dirty="0">
+                          <a:solidFill>
+                            <a:schemeClr val="tx1"/>
+                          </a:solidFill>
+                          <a:latin typeface="Times New Roman" panose="02020603050405020304" pitchFamily="18" charset="0"/>
+                          <a:cs typeface="Times New Roman" panose="02020603050405020304" pitchFamily="18" charset="0"/>
+                        </a:rPr>
+                        <a:t>Small; </a:t>
+                      </a:r>
+                      <a:r>
+                        <a:rPr lang="en-US" sz="1200" b="1" dirty="0">
+                          <a:solidFill>
+                            <a:schemeClr val="tx1"/>
+                          </a:solidFill>
+                          <a:latin typeface="Times New Roman" panose="02020603050405020304" pitchFamily="18" charset="0"/>
+                          <a:cs typeface="Times New Roman" panose="02020603050405020304" pitchFamily="18" charset="0"/>
+                        </a:rPr>
+                        <a:t>Unit 4:</a:t>
+                      </a:r>
+                      <a:r>
+                        <a:rPr lang="en-US" sz="1200" dirty="0">
+                          <a:solidFill>
+                            <a:schemeClr val="tx1"/>
+                          </a:solidFill>
+                          <a:latin typeface="Times New Roman" panose="02020603050405020304" pitchFamily="18" charset="0"/>
+                          <a:cs typeface="Times New Roman" panose="02020603050405020304" pitchFamily="18" charset="0"/>
+                        </a:rPr>
+                        <a:t> Large; </a:t>
+                      </a:r>
+                      <a:r>
+                        <a:rPr lang="en-US" sz="1200" b="1" dirty="0">
+                          <a:solidFill>
+                            <a:schemeClr val="tx1"/>
+                          </a:solidFill>
+                          <a:latin typeface="Times New Roman" panose="02020603050405020304" pitchFamily="18" charset="0"/>
+                          <a:cs typeface="Times New Roman" panose="02020603050405020304" pitchFamily="18" charset="0"/>
+                        </a:rPr>
+                        <a:t>Unit 5:</a:t>
+                      </a:r>
+                      <a:r>
+                        <a:rPr lang="en-US" sz="1200" dirty="0">
+                          <a:solidFill>
+                            <a:schemeClr val="tx1"/>
+                          </a:solidFill>
+                          <a:latin typeface="Times New Roman" panose="02020603050405020304" pitchFamily="18" charset="0"/>
+                          <a:cs typeface="Times New Roman" panose="02020603050405020304" pitchFamily="18" charset="0"/>
+                        </a:rPr>
+                        <a:t> Largest</a:t>
+                      </a:r>
+                    </a:p>
+                  </a:txBody>
+                  <a:tcPr>
+                    <a:lnL w="12700" cap="flat" cmpd="sng" algn="ctr">
+                      <a:solidFill>
+                        <a:schemeClr val="tx1"/>
+                      </a:solidFill>
+                      <a:prstDash val="solid"/>
+                      <a:round/>
+                      <a:headEnd type="none" w="med" len="med"/>
+                      <a:tailEnd type="none" w="med" len="med"/>
+                    </a:lnL>
+                    <a:lnR w="12700" cap="flat" cmpd="sng" algn="ctr">
+                      <a:solidFill>
+                        <a:schemeClr val="tx1"/>
+                      </a:solidFill>
+                      <a:prstDash val="solid"/>
+                      <a:round/>
+                      <a:headEnd type="none" w="med" len="med"/>
+                      <a:tailEnd type="none" w="med" len="med"/>
+                    </a:lnR>
+                    <a:lnT w="12700" cap="flat" cmpd="sng" algn="ctr">
+                      <a:solidFill>
+                        <a:schemeClr val="tx1"/>
+                      </a:solidFill>
+                      <a:prstDash val="solid"/>
+                      <a:round/>
+                      <a:headEnd type="none" w="med" len="med"/>
+                      <a:tailEnd type="none" w="med" len="med"/>
+                    </a:lnT>
+                    <a:lnB w="12700" cap="flat" cmpd="sng" algn="ctr">
+                      <a:solidFill>
+                        <a:schemeClr val="tx1"/>
+                      </a:solidFill>
+                      <a:prstDash val="solid"/>
+                      <a:round/>
+                      <a:headEnd type="none" w="med" len="med"/>
+                      <a:tailEnd type="none" w="med" len="med"/>
+                    </a:lnB>
+                    <a:noFill/>
+                  </a:tcPr>
+                </a:tc>
+                <a:extLst>
+                  <a:ext uri="{0D108BD9-81ED-4DB2-BD59-A6C34878D82A}">
+                    <a16:rowId xmlns:a16="http://schemas.microsoft.com/office/drawing/2014/main" val="3094949213"/>
+                  </a:ext>
+                </a:extLst>
+              </a:tr>
+              <a:tr h="370840">
+                <a:tc>
+                  <a:txBody>
+                    <a:bodyPr/>
+                    <a:lstStyle/>
+                    <a:p>
+                      <a:r>
+                        <a:rPr lang="en-US" sz="1200" dirty="0">
+                          <a:solidFill>
+                            <a:schemeClr val="tx1"/>
+                          </a:solidFill>
+                          <a:latin typeface="Times New Roman" panose="02020603050405020304" pitchFamily="18" charset="0"/>
+                          <a:cs typeface="Times New Roman" panose="02020603050405020304" pitchFamily="18" charset="0"/>
+                        </a:rPr>
+                        <a:t>6.  Arc Apex-Obstacle Gap</a:t>
+                      </a:r>
+                    </a:p>
+                  </a:txBody>
+                  <a:tcPr>
+                    <a:lnL w="12700" cap="flat" cmpd="sng" algn="ctr">
+                      <a:solidFill>
+                        <a:schemeClr val="tx1"/>
+                      </a:solidFill>
+                      <a:prstDash val="solid"/>
+                      <a:round/>
+                      <a:headEnd type="none" w="med" len="med"/>
+                      <a:tailEnd type="none" w="med" len="med"/>
+                    </a:lnL>
+                    <a:lnR w="12700" cap="flat" cmpd="sng" algn="ctr">
+                      <a:solidFill>
+                        <a:schemeClr val="tx1"/>
+                      </a:solidFill>
+                      <a:prstDash val="solid"/>
+                      <a:round/>
+                      <a:headEnd type="none" w="med" len="med"/>
+                      <a:tailEnd type="none" w="med" len="med"/>
+                    </a:lnR>
+                    <a:lnT w="12700" cap="flat" cmpd="sng" algn="ctr">
+                      <a:solidFill>
+                        <a:schemeClr val="tx1"/>
+                      </a:solidFill>
+                      <a:prstDash val="solid"/>
+                      <a:round/>
+                      <a:headEnd type="none" w="med" len="med"/>
+                      <a:tailEnd type="none" w="med" len="med"/>
+                    </a:lnT>
+                    <a:lnB w="12700" cap="flat" cmpd="sng" algn="ctr">
+                      <a:solidFill>
+                        <a:schemeClr val="tx1"/>
+                      </a:solidFill>
+                      <a:prstDash val="solid"/>
+                      <a:round/>
+                      <a:headEnd type="none" w="med" len="med"/>
+                      <a:tailEnd type="none" w="med" len="med"/>
+                    </a:lnB>
+                    <a:noFill/>
+                  </a:tcPr>
+                </a:tc>
+                <a:tc>
+                  <a:txBody>
+                    <a:bodyPr/>
+                    <a:lstStyle/>
+                    <a:p>
+                      <a:r>
+                        <a:rPr lang="en-US" sz="1200" dirty="0">
+                          <a:solidFill>
+                            <a:schemeClr val="tx1"/>
+                          </a:solidFill>
+                          <a:latin typeface="Times New Roman" panose="02020603050405020304" pitchFamily="18" charset="0"/>
+                          <a:cs typeface="Times New Roman" panose="02020603050405020304" pitchFamily="18" charset="0"/>
+                        </a:rPr>
+                        <a:t>3</a:t>
+                      </a:r>
+                    </a:p>
+                  </a:txBody>
+                  <a:tcPr>
+                    <a:lnL w="12700" cap="flat" cmpd="sng" algn="ctr">
+                      <a:solidFill>
+                        <a:schemeClr val="tx1"/>
+                      </a:solidFill>
+                      <a:prstDash val="solid"/>
+                      <a:round/>
+                      <a:headEnd type="none" w="med" len="med"/>
+                      <a:tailEnd type="none" w="med" len="med"/>
+                    </a:lnL>
+                    <a:lnR w="12700" cap="flat" cmpd="sng" algn="ctr">
+                      <a:solidFill>
+                        <a:schemeClr val="tx1"/>
+                      </a:solidFill>
+                      <a:prstDash val="solid"/>
+                      <a:round/>
+                      <a:headEnd type="none" w="med" len="med"/>
+                      <a:tailEnd type="none" w="med" len="med"/>
+                    </a:lnR>
+                    <a:lnT w="12700" cap="flat" cmpd="sng" algn="ctr">
+                      <a:solidFill>
+                        <a:schemeClr val="tx1"/>
+                      </a:solidFill>
+                      <a:prstDash val="solid"/>
+                      <a:round/>
+                      <a:headEnd type="none" w="med" len="med"/>
+                      <a:tailEnd type="none" w="med" len="med"/>
+                    </a:lnT>
+                    <a:lnB w="12700" cap="flat" cmpd="sng" algn="ctr">
+                      <a:solidFill>
+                        <a:schemeClr val="tx1"/>
+                      </a:solidFill>
+                      <a:prstDash val="solid"/>
+                      <a:round/>
+                      <a:headEnd type="none" w="med" len="med"/>
+                      <a:tailEnd type="none" w="med" len="med"/>
+                    </a:lnB>
+                    <a:noFill/>
+                  </a:tcPr>
+                </a:tc>
+                <a:tc>
+                  <a:txBody>
+                    <a:bodyPr/>
+                    <a:lstStyle/>
+                    <a:p>
+                      <a:pPr marL="0" marR="0" lvl="0" indent="0" algn="l" defTabSz="914400" rtl="0" eaLnBrk="1" fontAlgn="auto" latinLnBrk="0" hangingPunct="1">
+                        <a:lnSpc>
+                          <a:spcPct val="100000"/>
+                        </a:lnSpc>
+                        <a:spcBef>
+                          <a:spcPts val="0"/>
+                        </a:spcBef>
+                        <a:spcAft>
+                          <a:spcPts val="0"/>
+                        </a:spcAft>
+                        <a:buClrTx/>
+                        <a:buSzTx/>
+                        <a:buFontTx/>
+                        <a:buNone/>
+                        <a:tabLst/>
+                        <a:defRPr/>
+                      </a:pPr>
+                      <a:r>
+                        <a:rPr lang="en-US" sz="1200" b="1" dirty="0">
+                          <a:solidFill>
+                            <a:schemeClr val="tx1"/>
+                          </a:solidFill>
+                          <a:latin typeface="Times New Roman" panose="02020603050405020304" pitchFamily="18" charset="0"/>
+                          <a:cs typeface="Times New Roman" panose="02020603050405020304" pitchFamily="18" charset="0"/>
+                        </a:rPr>
+                        <a:t>Unit 1: </a:t>
+                      </a:r>
+                      <a:r>
+                        <a:rPr lang="en-US" sz="1200" dirty="0">
+                          <a:solidFill>
+                            <a:schemeClr val="tx1"/>
+                          </a:solidFill>
+                          <a:latin typeface="Times New Roman" panose="02020603050405020304" pitchFamily="18" charset="0"/>
+                          <a:cs typeface="Times New Roman" panose="02020603050405020304" pitchFamily="18" charset="0"/>
+                        </a:rPr>
+                        <a:t>NA; </a:t>
+                      </a:r>
+                      <a:r>
+                        <a:rPr lang="en-US" sz="1200" b="1" dirty="0">
+                          <a:solidFill>
+                            <a:schemeClr val="tx1"/>
+                          </a:solidFill>
+                          <a:latin typeface="Times New Roman" panose="02020603050405020304" pitchFamily="18" charset="0"/>
+                          <a:cs typeface="Times New Roman" panose="02020603050405020304" pitchFamily="18" charset="0"/>
+                        </a:rPr>
+                        <a:t>Unit 2: </a:t>
+                      </a:r>
+                      <a:r>
+                        <a:rPr lang="en-US" sz="1200" b="0" dirty="0">
+                          <a:solidFill>
+                            <a:schemeClr val="tx1"/>
+                          </a:solidFill>
+                          <a:latin typeface="Times New Roman" panose="02020603050405020304" pitchFamily="18" charset="0"/>
+                          <a:cs typeface="Times New Roman" panose="02020603050405020304" pitchFamily="18" charset="0"/>
+                        </a:rPr>
+                        <a:t>Small</a:t>
+                      </a:r>
+                      <a:r>
+                        <a:rPr lang="en-US" sz="1200" dirty="0">
+                          <a:solidFill>
+                            <a:schemeClr val="tx1"/>
+                          </a:solidFill>
+                          <a:latin typeface="Times New Roman" panose="02020603050405020304" pitchFamily="18" charset="0"/>
+                          <a:cs typeface="Times New Roman" panose="02020603050405020304" pitchFamily="18" charset="0"/>
+                        </a:rPr>
+                        <a:t>; </a:t>
+                      </a:r>
+                      <a:r>
+                        <a:rPr lang="en-US" sz="1200" b="1" dirty="0">
+                          <a:solidFill>
+                            <a:schemeClr val="tx1"/>
+                          </a:solidFill>
+                          <a:latin typeface="Times New Roman" panose="02020603050405020304" pitchFamily="18" charset="0"/>
+                          <a:cs typeface="Times New Roman" panose="02020603050405020304" pitchFamily="18" charset="0"/>
+                        </a:rPr>
+                        <a:t>Unit 3: </a:t>
+                      </a:r>
+                      <a:r>
+                        <a:rPr lang="en-US" sz="1200" dirty="0">
+                          <a:solidFill>
+                            <a:schemeClr val="tx1"/>
+                          </a:solidFill>
+                          <a:latin typeface="Times New Roman" panose="02020603050405020304" pitchFamily="18" charset="0"/>
+                          <a:cs typeface="Times New Roman" panose="02020603050405020304" pitchFamily="18" charset="0"/>
+                        </a:rPr>
+                        <a:t>Large</a:t>
+                      </a:r>
+                    </a:p>
+                    <a:p>
+                      <a:endParaRPr lang="en-US" sz="1200" dirty="0">
+                        <a:solidFill>
+                          <a:schemeClr val="tx1"/>
+                        </a:solidFill>
+                        <a:latin typeface="Times New Roman" panose="02020603050405020304" pitchFamily="18" charset="0"/>
+                        <a:cs typeface="Times New Roman" panose="02020603050405020304" pitchFamily="18" charset="0"/>
+                      </a:endParaRPr>
+                    </a:p>
+                  </a:txBody>
+                  <a:tcPr>
+                    <a:lnL w="12700" cap="flat" cmpd="sng" algn="ctr">
+                      <a:solidFill>
+                        <a:schemeClr val="tx1"/>
+                      </a:solidFill>
+                      <a:prstDash val="solid"/>
+                      <a:round/>
+                      <a:headEnd type="none" w="med" len="med"/>
+                      <a:tailEnd type="none" w="med" len="med"/>
+                    </a:lnL>
+                    <a:lnR w="12700" cap="flat" cmpd="sng" algn="ctr">
+                      <a:solidFill>
+                        <a:schemeClr val="tx1"/>
+                      </a:solidFill>
+                      <a:prstDash val="solid"/>
+                      <a:round/>
+                      <a:headEnd type="none" w="med" len="med"/>
+                      <a:tailEnd type="none" w="med" len="med"/>
+                    </a:lnR>
+                    <a:lnT w="12700" cap="flat" cmpd="sng" algn="ctr">
+                      <a:solidFill>
+                        <a:schemeClr val="tx1"/>
+                      </a:solidFill>
+                      <a:prstDash val="solid"/>
+                      <a:round/>
+                      <a:headEnd type="none" w="med" len="med"/>
+                      <a:tailEnd type="none" w="med" len="med"/>
+                    </a:lnT>
+                    <a:lnB w="12700" cap="flat" cmpd="sng" algn="ctr">
+                      <a:solidFill>
+                        <a:schemeClr val="tx1"/>
+                      </a:solidFill>
+                      <a:prstDash val="solid"/>
+                      <a:round/>
+                      <a:headEnd type="none" w="med" len="med"/>
+                      <a:tailEnd type="none" w="med" len="med"/>
+                    </a:lnB>
+                    <a:noFill/>
+                  </a:tcPr>
+                </a:tc>
+                <a:extLst>
+                  <a:ext uri="{0D108BD9-81ED-4DB2-BD59-A6C34878D82A}">
+                    <a16:rowId xmlns:a16="http://schemas.microsoft.com/office/drawing/2014/main" val="2228603503"/>
+                  </a:ext>
+                </a:extLst>
+              </a:tr>
+              <a:tr h="370840">
+                <a:tc>
+                  <a:txBody>
+                    <a:bodyPr/>
+                    <a:lstStyle/>
+                    <a:p>
+                      <a:r>
+                        <a:rPr lang="en-US" sz="1200" dirty="0">
+                          <a:solidFill>
+                            <a:schemeClr val="tx1"/>
+                          </a:solidFill>
+                          <a:latin typeface="Times New Roman" panose="02020603050405020304" pitchFamily="18" charset="0"/>
+                          <a:cs typeface="Times New Roman" panose="02020603050405020304" pitchFamily="18" charset="0"/>
+                        </a:rPr>
+                        <a:t>7. Spatial Adjacency </a:t>
+                      </a:r>
+                    </a:p>
+                  </a:txBody>
+                  <a:tcPr>
+                    <a:lnL w="12700" cap="flat" cmpd="sng" algn="ctr">
+                      <a:solidFill>
+                        <a:schemeClr val="tx1"/>
+                      </a:solidFill>
+                      <a:prstDash val="solid"/>
+                      <a:round/>
+                      <a:headEnd type="none" w="med" len="med"/>
+                      <a:tailEnd type="none" w="med" len="med"/>
+                    </a:lnL>
+                    <a:lnR w="12700" cap="flat" cmpd="sng" algn="ctr">
+                      <a:solidFill>
+                        <a:schemeClr val="tx1"/>
+                      </a:solidFill>
+                      <a:prstDash val="solid"/>
+                      <a:round/>
+                      <a:headEnd type="none" w="med" len="med"/>
+                      <a:tailEnd type="none" w="med" len="med"/>
+                    </a:lnR>
+                    <a:lnT w="12700" cap="flat" cmpd="sng" algn="ctr">
+                      <a:solidFill>
+                        <a:schemeClr val="tx1"/>
+                      </a:solidFill>
+                      <a:prstDash val="solid"/>
+                      <a:round/>
+                      <a:headEnd type="none" w="med" len="med"/>
+                      <a:tailEnd type="none" w="med" len="med"/>
+                    </a:lnT>
+                    <a:lnB w="12700" cap="flat" cmpd="sng" algn="ctr">
+                      <a:solidFill>
+                        <a:schemeClr val="tx1"/>
+                      </a:solidFill>
+                      <a:prstDash val="solid"/>
+                      <a:round/>
+                      <a:headEnd type="none" w="med" len="med"/>
+                      <a:tailEnd type="none" w="med" len="med"/>
+                    </a:lnB>
+                    <a:noFill/>
+                  </a:tcPr>
+                </a:tc>
+                <a:tc>
+                  <a:txBody>
+                    <a:bodyPr/>
+                    <a:lstStyle/>
+                    <a:p>
+                      <a:r>
+                        <a:rPr lang="en-US" sz="1200" dirty="0">
+                          <a:solidFill>
+                            <a:schemeClr val="tx1"/>
+                          </a:solidFill>
+                          <a:latin typeface="Times New Roman" panose="02020603050405020304" pitchFamily="18" charset="0"/>
+                          <a:cs typeface="Times New Roman" panose="02020603050405020304" pitchFamily="18" charset="0"/>
+                        </a:rPr>
+                        <a:t>1</a:t>
+                      </a:r>
+                    </a:p>
+                  </a:txBody>
+                  <a:tcPr>
+                    <a:lnL w="12700" cap="flat" cmpd="sng" algn="ctr">
+                      <a:solidFill>
+                        <a:schemeClr val="tx1"/>
+                      </a:solidFill>
+                      <a:prstDash val="solid"/>
+                      <a:round/>
+                      <a:headEnd type="none" w="med" len="med"/>
+                      <a:tailEnd type="none" w="med" len="med"/>
+                    </a:lnL>
+                    <a:lnR w="12700" cap="flat" cmpd="sng" algn="ctr">
+                      <a:solidFill>
+                        <a:schemeClr val="tx1"/>
+                      </a:solidFill>
+                      <a:prstDash val="solid"/>
+                      <a:round/>
+                      <a:headEnd type="none" w="med" len="med"/>
+                      <a:tailEnd type="none" w="med" len="med"/>
+                    </a:lnR>
+                    <a:lnT w="12700" cap="flat" cmpd="sng" algn="ctr">
+                      <a:solidFill>
+                        <a:schemeClr val="tx1"/>
+                      </a:solidFill>
+                      <a:prstDash val="solid"/>
+                      <a:round/>
+                      <a:headEnd type="none" w="med" len="med"/>
+                      <a:tailEnd type="none" w="med" len="med"/>
+                    </a:lnT>
+                    <a:lnB w="12700" cap="flat" cmpd="sng" algn="ctr">
+                      <a:solidFill>
+                        <a:schemeClr val="tx1"/>
+                      </a:solidFill>
+                      <a:prstDash val="solid"/>
+                      <a:round/>
+                      <a:headEnd type="none" w="med" len="med"/>
+                      <a:tailEnd type="none" w="med" len="med"/>
+                    </a:lnB>
+                    <a:noFill/>
+                  </a:tcPr>
+                </a:tc>
+                <a:tc>
+                  <a:txBody>
+                    <a:bodyPr/>
+                    <a:lstStyle/>
+                    <a:p>
+                      <a:r>
+                        <a:rPr lang="en-US" sz="1200" b="1" dirty="0">
+                          <a:solidFill>
+                            <a:schemeClr val="tx1"/>
+                          </a:solidFill>
+                          <a:latin typeface="Times New Roman" panose="02020603050405020304" pitchFamily="18" charset="0"/>
+                          <a:cs typeface="Times New Roman" panose="02020603050405020304" pitchFamily="18" charset="0"/>
+                        </a:rPr>
+                        <a:t>Unit 1: </a:t>
+                      </a:r>
+                      <a:r>
+                        <a:rPr lang="en-US" sz="1200" b="0" dirty="0">
+                          <a:solidFill>
+                            <a:schemeClr val="tx1"/>
+                          </a:solidFill>
+                          <a:latin typeface="Times New Roman" panose="02020603050405020304" pitchFamily="18" charset="0"/>
+                          <a:cs typeface="Times New Roman" panose="02020603050405020304" pitchFamily="18" charset="0"/>
+                        </a:rPr>
+                        <a:t>Spatially Contiguous</a:t>
+                      </a:r>
+                    </a:p>
+                  </a:txBody>
+                  <a:tcPr>
+                    <a:lnL w="12700" cap="flat" cmpd="sng" algn="ctr">
+                      <a:solidFill>
+                        <a:schemeClr val="tx1"/>
+                      </a:solidFill>
+                      <a:prstDash val="solid"/>
+                      <a:round/>
+                      <a:headEnd type="none" w="med" len="med"/>
+                      <a:tailEnd type="none" w="med" len="med"/>
+                    </a:lnL>
+                    <a:lnR w="12700" cap="flat" cmpd="sng" algn="ctr">
+                      <a:solidFill>
+                        <a:schemeClr val="tx1"/>
+                      </a:solidFill>
+                      <a:prstDash val="solid"/>
+                      <a:round/>
+                      <a:headEnd type="none" w="med" len="med"/>
+                      <a:tailEnd type="none" w="med" len="med"/>
+                    </a:lnR>
+                    <a:lnT w="12700" cap="flat" cmpd="sng" algn="ctr">
+                      <a:solidFill>
+                        <a:schemeClr val="tx1"/>
+                      </a:solidFill>
+                      <a:prstDash val="solid"/>
+                      <a:round/>
+                      <a:headEnd type="none" w="med" len="med"/>
+                      <a:tailEnd type="none" w="med" len="med"/>
+                    </a:lnT>
+                    <a:lnB w="12700" cap="flat" cmpd="sng" algn="ctr">
+                      <a:solidFill>
+                        <a:schemeClr val="tx1"/>
+                      </a:solidFill>
+                      <a:prstDash val="solid"/>
+                      <a:round/>
+                      <a:headEnd type="none" w="med" len="med"/>
+                      <a:tailEnd type="none" w="med" len="med"/>
+                    </a:lnB>
+                    <a:noFill/>
+                  </a:tcPr>
+                </a:tc>
+                <a:extLst>
+                  <a:ext uri="{0D108BD9-81ED-4DB2-BD59-A6C34878D82A}">
+                    <a16:rowId xmlns:a16="http://schemas.microsoft.com/office/drawing/2014/main" val="3977970317"/>
+                  </a:ext>
+                </a:extLst>
+              </a:tr>
+              <a:tr h="370840">
+                <a:tc>
+                  <a:txBody>
+                    <a:bodyPr/>
+                    <a:lstStyle/>
+                    <a:p>
+                      <a:r>
+                        <a:rPr lang="en-US" sz="1200" dirty="0">
+                          <a:solidFill>
+                            <a:schemeClr val="tx1"/>
+                          </a:solidFill>
+                          <a:latin typeface="Times New Roman" panose="02020603050405020304" pitchFamily="18" charset="0"/>
+                          <a:cs typeface="Times New Roman" panose="02020603050405020304" pitchFamily="18" charset="0"/>
+                        </a:rPr>
+                        <a:t>8. Arc Peak Height</a:t>
+                      </a:r>
+                    </a:p>
+                  </a:txBody>
+                  <a:tcPr>
+                    <a:lnL w="12700" cap="flat" cmpd="sng" algn="ctr">
+                      <a:solidFill>
+                        <a:schemeClr val="tx1"/>
+                      </a:solidFill>
+                      <a:prstDash val="solid"/>
+                      <a:round/>
+                      <a:headEnd type="none" w="med" len="med"/>
+                      <a:tailEnd type="none" w="med" len="med"/>
+                    </a:lnL>
+                    <a:lnR w="12700" cap="flat" cmpd="sng" algn="ctr">
+                      <a:solidFill>
+                        <a:schemeClr val="tx1"/>
+                      </a:solidFill>
+                      <a:prstDash val="solid"/>
+                      <a:round/>
+                      <a:headEnd type="none" w="med" len="med"/>
+                      <a:tailEnd type="none" w="med" len="med"/>
+                    </a:lnR>
+                    <a:lnT w="12700" cap="flat" cmpd="sng" algn="ctr">
+                      <a:solidFill>
+                        <a:schemeClr val="tx1"/>
+                      </a:solidFill>
+                      <a:prstDash val="solid"/>
+                      <a:round/>
+                      <a:headEnd type="none" w="med" len="med"/>
+                      <a:tailEnd type="none" w="med" len="med"/>
+                    </a:lnT>
+                    <a:lnB w="12700" cap="flat" cmpd="sng" algn="ctr">
+                      <a:solidFill>
+                        <a:schemeClr val="tx1"/>
+                      </a:solidFill>
+                      <a:prstDash val="solid"/>
+                      <a:round/>
+                      <a:headEnd type="none" w="med" len="med"/>
+                      <a:tailEnd type="none" w="med" len="med"/>
+                    </a:lnB>
+                    <a:noFill/>
+                  </a:tcPr>
+                </a:tc>
+                <a:tc>
+                  <a:txBody>
+                    <a:bodyPr/>
+                    <a:lstStyle/>
+                    <a:p>
+                      <a:r>
+                        <a:rPr lang="en-US" sz="1200" dirty="0">
+                          <a:solidFill>
+                            <a:schemeClr val="tx1"/>
+                          </a:solidFill>
+                          <a:latin typeface="Times New Roman" panose="02020603050405020304" pitchFamily="18" charset="0"/>
+                          <a:cs typeface="Times New Roman" panose="02020603050405020304" pitchFamily="18" charset="0"/>
+                        </a:rPr>
+                        <a:t>5</a:t>
+                      </a:r>
+                    </a:p>
+                  </a:txBody>
+                  <a:tcPr>
+                    <a:lnL w="12700" cap="flat" cmpd="sng" algn="ctr">
+                      <a:solidFill>
+                        <a:schemeClr val="tx1"/>
+                      </a:solidFill>
+                      <a:prstDash val="solid"/>
+                      <a:round/>
+                      <a:headEnd type="none" w="med" len="med"/>
+                      <a:tailEnd type="none" w="med" len="med"/>
+                    </a:lnL>
+                    <a:lnR w="12700" cap="flat" cmpd="sng" algn="ctr">
+                      <a:solidFill>
+                        <a:schemeClr val="tx1"/>
+                      </a:solidFill>
+                      <a:prstDash val="solid"/>
+                      <a:round/>
+                      <a:headEnd type="none" w="med" len="med"/>
+                      <a:tailEnd type="none" w="med" len="med"/>
+                    </a:lnR>
+                    <a:lnT w="12700" cap="flat" cmpd="sng" algn="ctr">
+                      <a:solidFill>
+                        <a:schemeClr val="tx1"/>
+                      </a:solidFill>
+                      <a:prstDash val="solid"/>
+                      <a:round/>
+                      <a:headEnd type="none" w="med" len="med"/>
+                      <a:tailEnd type="none" w="med" len="med"/>
+                    </a:lnT>
+                    <a:lnB w="12700" cap="flat" cmpd="sng" algn="ctr">
+                      <a:solidFill>
+                        <a:schemeClr val="tx1"/>
+                      </a:solidFill>
+                      <a:prstDash val="solid"/>
+                      <a:round/>
+                      <a:headEnd type="none" w="med" len="med"/>
+                      <a:tailEnd type="none" w="med" len="med"/>
+                    </a:lnB>
+                    <a:noFill/>
+                  </a:tcPr>
+                </a:tc>
+                <a:tc>
+                  <a:txBody>
+                    <a:bodyPr/>
+                    <a:lstStyle/>
+                    <a:p>
+                      <a:pPr marL="0" marR="0" lvl="0" indent="0" algn="l" defTabSz="914400" rtl="0" eaLnBrk="1" fontAlgn="auto" latinLnBrk="0" hangingPunct="1">
+                        <a:lnSpc>
+                          <a:spcPct val="100000"/>
+                        </a:lnSpc>
+                        <a:spcBef>
+                          <a:spcPts val="0"/>
+                        </a:spcBef>
+                        <a:spcAft>
+                          <a:spcPts val="0"/>
+                        </a:spcAft>
+                        <a:buClrTx/>
+                        <a:buSzTx/>
+                        <a:buFontTx/>
+                        <a:buNone/>
+                        <a:tabLst/>
+                        <a:defRPr/>
+                      </a:pPr>
+                      <a:r>
+                        <a:rPr lang="en-US" sz="1200" b="1" dirty="0">
+                          <a:solidFill>
+                            <a:schemeClr val="tx1"/>
+                          </a:solidFill>
+                          <a:latin typeface="Times New Roman" panose="02020603050405020304" pitchFamily="18" charset="0"/>
+                          <a:cs typeface="Times New Roman" panose="02020603050405020304" pitchFamily="18" charset="0"/>
+                        </a:rPr>
+                        <a:t>Unit 1: </a:t>
+                      </a:r>
+                      <a:r>
+                        <a:rPr lang="en-US" sz="1200" dirty="0">
+                          <a:solidFill>
+                            <a:schemeClr val="tx1"/>
+                          </a:solidFill>
+                          <a:latin typeface="Times New Roman" panose="02020603050405020304" pitchFamily="18" charset="0"/>
+                          <a:cs typeface="Times New Roman" panose="02020603050405020304" pitchFamily="18" charset="0"/>
+                        </a:rPr>
+                        <a:t>NA; </a:t>
+                      </a:r>
+                      <a:r>
+                        <a:rPr lang="en-US" sz="1200" b="1" dirty="0">
+                          <a:solidFill>
+                            <a:schemeClr val="tx1"/>
+                          </a:solidFill>
+                          <a:latin typeface="Times New Roman" panose="02020603050405020304" pitchFamily="18" charset="0"/>
+                          <a:cs typeface="Times New Roman" panose="02020603050405020304" pitchFamily="18" charset="0"/>
+                        </a:rPr>
+                        <a:t>Unit 2: </a:t>
+                      </a:r>
+                      <a:r>
+                        <a:rPr lang="en-US" sz="1200" dirty="0">
+                          <a:solidFill>
+                            <a:schemeClr val="tx1"/>
+                          </a:solidFill>
+                          <a:latin typeface="Times New Roman" panose="02020603050405020304" pitchFamily="18" charset="0"/>
+                          <a:cs typeface="Times New Roman" panose="02020603050405020304" pitchFamily="18" charset="0"/>
+                        </a:rPr>
+                        <a:t>Lowest; </a:t>
+                      </a:r>
+                      <a:r>
+                        <a:rPr lang="en-US" sz="1200" b="1" dirty="0">
+                          <a:solidFill>
+                            <a:schemeClr val="tx1"/>
+                          </a:solidFill>
+                          <a:latin typeface="Times New Roman" panose="02020603050405020304" pitchFamily="18" charset="0"/>
+                          <a:cs typeface="Times New Roman" panose="02020603050405020304" pitchFamily="18" charset="0"/>
+                        </a:rPr>
+                        <a:t>Unit 3: </a:t>
+                      </a:r>
+                      <a:r>
+                        <a:rPr lang="en-US" sz="1200" dirty="0">
+                          <a:solidFill>
+                            <a:schemeClr val="tx1"/>
+                          </a:solidFill>
+                          <a:latin typeface="Times New Roman" panose="02020603050405020304" pitchFamily="18" charset="0"/>
+                          <a:cs typeface="Times New Roman" panose="02020603050405020304" pitchFamily="18" charset="0"/>
+                        </a:rPr>
+                        <a:t>Low; </a:t>
+                      </a:r>
+                      <a:r>
+                        <a:rPr lang="en-US" sz="1200" b="1" dirty="0">
+                          <a:solidFill>
+                            <a:schemeClr val="tx1"/>
+                          </a:solidFill>
+                          <a:latin typeface="Times New Roman" panose="02020603050405020304" pitchFamily="18" charset="0"/>
+                          <a:cs typeface="Times New Roman" panose="02020603050405020304" pitchFamily="18" charset="0"/>
+                        </a:rPr>
+                        <a:t>Unit 4:</a:t>
+                      </a:r>
+                      <a:r>
+                        <a:rPr lang="en-US" sz="1200" dirty="0">
+                          <a:solidFill>
+                            <a:schemeClr val="tx1"/>
+                          </a:solidFill>
+                          <a:latin typeface="Times New Roman" panose="02020603050405020304" pitchFamily="18" charset="0"/>
+                          <a:cs typeface="Times New Roman" panose="02020603050405020304" pitchFamily="18" charset="0"/>
+                        </a:rPr>
+                        <a:t> High; </a:t>
+                      </a:r>
+                      <a:r>
+                        <a:rPr lang="en-US" sz="1200" b="1" dirty="0">
+                          <a:solidFill>
+                            <a:schemeClr val="tx1"/>
+                          </a:solidFill>
+                          <a:latin typeface="Times New Roman" panose="02020603050405020304" pitchFamily="18" charset="0"/>
+                          <a:cs typeface="Times New Roman" panose="02020603050405020304" pitchFamily="18" charset="0"/>
+                        </a:rPr>
+                        <a:t>Unit 5:</a:t>
+                      </a:r>
+                      <a:r>
+                        <a:rPr lang="en-US" sz="1200" dirty="0">
+                          <a:solidFill>
+                            <a:schemeClr val="tx1"/>
+                          </a:solidFill>
+                          <a:latin typeface="Times New Roman" panose="02020603050405020304" pitchFamily="18" charset="0"/>
+                          <a:cs typeface="Times New Roman" panose="02020603050405020304" pitchFamily="18" charset="0"/>
+                        </a:rPr>
+                        <a:t> Highest</a:t>
+                      </a:r>
+                    </a:p>
+                  </a:txBody>
+                  <a:tcPr>
+                    <a:lnL w="12700" cap="flat" cmpd="sng" algn="ctr">
+                      <a:solidFill>
+                        <a:schemeClr val="tx1"/>
+                      </a:solidFill>
+                      <a:prstDash val="solid"/>
+                      <a:round/>
+                      <a:headEnd type="none" w="med" len="med"/>
+                      <a:tailEnd type="none" w="med" len="med"/>
+                    </a:lnL>
+                    <a:lnR w="12700" cap="flat" cmpd="sng" algn="ctr">
+                      <a:solidFill>
+                        <a:schemeClr val="tx1"/>
+                      </a:solidFill>
+                      <a:prstDash val="solid"/>
+                      <a:round/>
+                      <a:headEnd type="none" w="med" len="med"/>
+                      <a:tailEnd type="none" w="med" len="med"/>
+                    </a:lnR>
+                    <a:lnT w="12700" cap="flat" cmpd="sng" algn="ctr">
+                      <a:solidFill>
+                        <a:schemeClr val="tx1"/>
+                      </a:solidFill>
+                      <a:prstDash val="solid"/>
+                      <a:round/>
+                      <a:headEnd type="none" w="med" len="med"/>
+                      <a:tailEnd type="none" w="med" len="med"/>
+                    </a:lnT>
+                    <a:lnB w="12700" cap="flat" cmpd="sng" algn="ctr">
+                      <a:solidFill>
+                        <a:schemeClr val="tx1"/>
+                      </a:solidFill>
+                      <a:prstDash val="solid"/>
+                      <a:round/>
+                      <a:headEnd type="none" w="med" len="med"/>
+                      <a:tailEnd type="none" w="med" len="med"/>
+                    </a:lnB>
+                    <a:noFill/>
+                  </a:tcPr>
+                </a:tc>
+                <a:extLst>
+                  <a:ext uri="{0D108BD9-81ED-4DB2-BD59-A6C34878D82A}">
+                    <a16:rowId xmlns:a16="http://schemas.microsoft.com/office/drawing/2014/main" val="1737733346"/>
+                  </a:ext>
+                </a:extLst>
+              </a:tr>
+              <a:tr h="370840">
+                <a:tc>
+                  <a:txBody>
+                    <a:bodyPr/>
+                    <a:lstStyle/>
+                    <a:p>
+                      <a:r>
+                        <a:rPr lang="en-US" sz="1200" dirty="0">
+                          <a:solidFill>
+                            <a:schemeClr val="tx1"/>
+                          </a:solidFill>
+                          <a:latin typeface="Times New Roman" panose="02020603050405020304" pitchFamily="18" charset="0"/>
+                          <a:cs typeface="Times New Roman" panose="02020603050405020304" pitchFamily="18" charset="0"/>
+                        </a:rPr>
+                        <a:t>9. Kinematic Motion Type</a:t>
+                      </a:r>
+                    </a:p>
+                  </a:txBody>
+                  <a:tcPr>
+                    <a:lnL w="12700" cap="flat" cmpd="sng" algn="ctr">
+                      <a:solidFill>
+                        <a:schemeClr val="tx1"/>
+                      </a:solidFill>
+                      <a:prstDash val="solid"/>
+                      <a:round/>
+                      <a:headEnd type="none" w="med" len="med"/>
+                      <a:tailEnd type="none" w="med" len="med"/>
+                    </a:lnL>
+                    <a:lnR w="12700" cap="flat" cmpd="sng" algn="ctr">
+                      <a:solidFill>
+                        <a:schemeClr val="tx1"/>
+                      </a:solidFill>
+                      <a:prstDash val="solid"/>
+                      <a:round/>
+                      <a:headEnd type="none" w="med" len="med"/>
+                      <a:tailEnd type="none" w="med" len="med"/>
+                    </a:lnR>
+                    <a:lnT w="12700" cap="flat" cmpd="sng" algn="ctr">
+                      <a:solidFill>
+                        <a:schemeClr val="tx1"/>
+                      </a:solidFill>
+                      <a:prstDash val="solid"/>
+                      <a:round/>
+                      <a:headEnd type="none" w="med" len="med"/>
+                      <a:tailEnd type="none" w="med" len="med"/>
+                    </a:lnT>
+                    <a:lnB w="12700" cap="flat" cmpd="sng" algn="ctr">
+                      <a:solidFill>
+                        <a:schemeClr val="tx1"/>
+                      </a:solidFill>
+                      <a:prstDash val="solid"/>
+                      <a:round/>
+                      <a:headEnd type="none" w="med" len="med"/>
+                      <a:tailEnd type="none" w="med" len="med"/>
+                    </a:lnB>
+                    <a:noFill/>
+                  </a:tcPr>
+                </a:tc>
+                <a:tc>
+                  <a:txBody>
+                    <a:bodyPr/>
+                    <a:lstStyle/>
+                    <a:p>
+                      <a:r>
+                        <a:rPr lang="en-US" sz="1200" dirty="0">
+                          <a:solidFill>
+                            <a:schemeClr val="tx1"/>
+                          </a:solidFill>
+                          <a:latin typeface="Times New Roman" panose="02020603050405020304" pitchFamily="18" charset="0"/>
+                          <a:cs typeface="Times New Roman" panose="02020603050405020304" pitchFamily="18" charset="0"/>
+                        </a:rPr>
+                        <a:t>2</a:t>
+                      </a:r>
+                    </a:p>
+                  </a:txBody>
+                  <a:tcPr>
+                    <a:lnL w="12700" cap="flat" cmpd="sng" algn="ctr">
+                      <a:solidFill>
+                        <a:schemeClr val="tx1"/>
+                      </a:solidFill>
+                      <a:prstDash val="solid"/>
+                      <a:round/>
+                      <a:headEnd type="none" w="med" len="med"/>
+                      <a:tailEnd type="none" w="med" len="med"/>
+                    </a:lnL>
+                    <a:lnR w="12700" cap="flat" cmpd="sng" algn="ctr">
+                      <a:solidFill>
+                        <a:schemeClr val="tx1"/>
+                      </a:solidFill>
+                      <a:prstDash val="solid"/>
+                      <a:round/>
+                      <a:headEnd type="none" w="med" len="med"/>
+                      <a:tailEnd type="none" w="med" len="med"/>
+                    </a:lnR>
+                    <a:lnT w="12700" cap="flat" cmpd="sng" algn="ctr">
+                      <a:solidFill>
+                        <a:schemeClr val="tx1"/>
+                      </a:solidFill>
+                      <a:prstDash val="solid"/>
+                      <a:round/>
+                      <a:headEnd type="none" w="med" len="med"/>
+                      <a:tailEnd type="none" w="med" len="med"/>
+                    </a:lnT>
+                    <a:lnB w="12700" cap="flat" cmpd="sng" algn="ctr">
+                      <a:solidFill>
+                        <a:schemeClr val="tx1"/>
+                      </a:solidFill>
+                      <a:prstDash val="solid"/>
+                      <a:round/>
+                      <a:headEnd type="none" w="med" len="med"/>
+                      <a:tailEnd type="none" w="med" len="med"/>
+                    </a:lnB>
+                    <a:noFill/>
+                  </a:tcPr>
+                </a:tc>
+                <a:tc>
+                  <a:txBody>
+                    <a:bodyPr/>
+                    <a:lstStyle/>
+                    <a:p>
+                      <a:pPr marL="0" marR="0" lvl="0" indent="0" algn="l" defTabSz="914400" rtl="0" eaLnBrk="1" fontAlgn="auto" latinLnBrk="0" hangingPunct="1">
+                        <a:lnSpc>
+                          <a:spcPct val="100000"/>
+                        </a:lnSpc>
+                        <a:spcBef>
+                          <a:spcPts val="0"/>
+                        </a:spcBef>
+                        <a:spcAft>
+                          <a:spcPts val="0"/>
+                        </a:spcAft>
+                        <a:buClrTx/>
+                        <a:buSzTx/>
+                        <a:buFontTx/>
+                        <a:buNone/>
+                        <a:tabLst/>
+                        <a:defRPr/>
+                      </a:pPr>
+                      <a:r>
+                        <a:rPr lang="en-US" sz="1200" b="1" dirty="0">
+                          <a:solidFill>
+                            <a:schemeClr val="tx1"/>
+                          </a:solidFill>
+                          <a:latin typeface="Times New Roman" panose="02020603050405020304" pitchFamily="18" charset="0"/>
+                          <a:cs typeface="Times New Roman" panose="02020603050405020304" pitchFamily="18" charset="0"/>
+                        </a:rPr>
+                        <a:t>Unit 1: </a:t>
+                      </a:r>
+                      <a:r>
+                        <a:rPr lang="en-US" sz="1200" dirty="0">
+                          <a:solidFill>
+                            <a:schemeClr val="tx1"/>
+                          </a:solidFill>
+                          <a:latin typeface="Times New Roman" panose="02020603050405020304" pitchFamily="18" charset="0"/>
+                          <a:cs typeface="Times New Roman" panose="02020603050405020304" pitchFamily="18" charset="0"/>
+                        </a:rPr>
+                        <a:t>Linear; </a:t>
+                      </a:r>
+                      <a:r>
+                        <a:rPr lang="en-US" sz="1200" b="1" dirty="0">
+                          <a:solidFill>
+                            <a:schemeClr val="tx1"/>
+                          </a:solidFill>
+                          <a:latin typeface="Times New Roman" panose="02020603050405020304" pitchFamily="18" charset="0"/>
+                          <a:cs typeface="Times New Roman" panose="02020603050405020304" pitchFamily="18" charset="0"/>
+                        </a:rPr>
+                        <a:t>Unit 2: </a:t>
+                      </a:r>
+                      <a:r>
+                        <a:rPr lang="en-US" sz="1200" b="0" dirty="0">
+                          <a:solidFill>
+                            <a:schemeClr val="tx1"/>
+                          </a:solidFill>
+                          <a:latin typeface="Times New Roman" panose="02020603050405020304" pitchFamily="18" charset="0"/>
+                          <a:cs typeface="Times New Roman" panose="02020603050405020304" pitchFamily="18" charset="0"/>
+                        </a:rPr>
+                        <a:t>Arced</a:t>
+                      </a:r>
+                      <a:endParaRPr lang="en-US" sz="1200" dirty="0">
+                        <a:solidFill>
+                          <a:schemeClr val="tx1"/>
+                        </a:solidFill>
+                        <a:latin typeface="Times New Roman" panose="02020603050405020304" pitchFamily="18" charset="0"/>
+                        <a:cs typeface="Times New Roman" panose="02020603050405020304" pitchFamily="18" charset="0"/>
+                      </a:endParaRPr>
+                    </a:p>
+                  </a:txBody>
+                  <a:tcPr>
+                    <a:lnL w="12700" cap="flat" cmpd="sng" algn="ctr">
+                      <a:solidFill>
+                        <a:schemeClr val="tx1"/>
+                      </a:solidFill>
+                      <a:prstDash val="solid"/>
+                      <a:round/>
+                      <a:headEnd type="none" w="med" len="med"/>
+                      <a:tailEnd type="none" w="med" len="med"/>
+                    </a:lnL>
+                    <a:lnR w="12700" cap="flat" cmpd="sng" algn="ctr">
+                      <a:solidFill>
+                        <a:schemeClr val="tx1"/>
+                      </a:solidFill>
+                      <a:prstDash val="solid"/>
+                      <a:round/>
+                      <a:headEnd type="none" w="med" len="med"/>
+                      <a:tailEnd type="none" w="med" len="med"/>
+                    </a:lnR>
+                    <a:lnT w="12700" cap="flat" cmpd="sng" algn="ctr">
+                      <a:solidFill>
+                        <a:schemeClr val="tx1"/>
+                      </a:solidFill>
+                      <a:prstDash val="solid"/>
+                      <a:round/>
+                      <a:headEnd type="none" w="med" len="med"/>
+                      <a:tailEnd type="none" w="med" len="med"/>
+                    </a:lnT>
+                    <a:lnB w="12700" cap="flat" cmpd="sng" algn="ctr">
+                      <a:solidFill>
+                        <a:schemeClr val="tx1"/>
+                      </a:solidFill>
+                      <a:prstDash val="solid"/>
+                      <a:round/>
+                      <a:headEnd type="none" w="med" len="med"/>
+                      <a:tailEnd type="none" w="med" len="med"/>
+                    </a:lnB>
+                    <a:noFill/>
+                  </a:tcPr>
+                </a:tc>
+                <a:extLst>
+                  <a:ext uri="{0D108BD9-81ED-4DB2-BD59-A6C34878D82A}">
+                    <a16:rowId xmlns:a16="http://schemas.microsoft.com/office/drawing/2014/main" val="2000777096"/>
+                  </a:ext>
+                </a:extLst>
+              </a:tr>
+              <a:tr h="370840">
+                <a:tc>
+                  <a:txBody>
+                    <a:bodyPr/>
+                    <a:lstStyle/>
+                    <a:p>
+                      <a:r>
+                        <a:rPr lang="en-US" sz="1200" dirty="0">
+                          <a:solidFill>
+                            <a:schemeClr val="tx1"/>
+                          </a:solidFill>
+                          <a:latin typeface="Times New Roman" panose="02020603050405020304" pitchFamily="18" charset="0"/>
+                          <a:cs typeface="Times New Roman" panose="02020603050405020304" pitchFamily="18" charset="0"/>
+                        </a:rPr>
+                        <a:t>10. Surface Property Left</a:t>
+                      </a:r>
+                    </a:p>
+                  </a:txBody>
+                  <a:tcPr>
+                    <a:lnL w="12700" cap="flat" cmpd="sng" algn="ctr">
+                      <a:solidFill>
+                        <a:schemeClr val="tx1"/>
+                      </a:solidFill>
+                      <a:prstDash val="solid"/>
+                      <a:round/>
+                      <a:headEnd type="none" w="med" len="med"/>
+                      <a:tailEnd type="none" w="med" len="med"/>
+                    </a:lnL>
+                    <a:lnR w="12700" cap="flat" cmpd="sng" algn="ctr">
+                      <a:solidFill>
+                        <a:schemeClr val="tx1"/>
+                      </a:solidFill>
+                      <a:prstDash val="solid"/>
+                      <a:round/>
+                      <a:headEnd type="none" w="med" len="med"/>
+                      <a:tailEnd type="none" w="med" len="med"/>
+                    </a:lnR>
+                    <a:lnT w="12700" cap="flat" cmpd="sng" algn="ctr">
+                      <a:solidFill>
+                        <a:schemeClr val="tx1"/>
+                      </a:solidFill>
+                      <a:prstDash val="solid"/>
+                      <a:round/>
+                      <a:headEnd type="none" w="med" len="med"/>
+                      <a:tailEnd type="none" w="med" len="med"/>
+                    </a:lnT>
+                    <a:lnB w="12700" cap="flat" cmpd="sng" algn="ctr">
+                      <a:solidFill>
+                        <a:schemeClr val="tx1"/>
+                      </a:solidFill>
+                      <a:prstDash val="solid"/>
+                      <a:round/>
+                      <a:headEnd type="none" w="med" len="med"/>
+                      <a:tailEnd type="none" w="med" len="med"/>
+                    </a:lnB>
+                    <a:noFill/>
+                  </a:tcPr>
+                </a:tc>
+                <a:tc>
+                  <a:txBody>
+                    <a:bodyPr/>
+                    <a:lstStyle/>
+                    <a:p>
+                      <a:r>
+                        <a:rPr lang="en-US" sz="1200" dirty="0">
+                          <a:solidFill>
+                            <a:schemeClr val="tx1"/>
+                          </a:solidFill>
+                          <a:latin typeface="Times New Roman" panose="02020603050405020304" pitchFamily="18" charset="0"/>
+                          <a:cs typeface="Times New Roman" panose="02020603050405020304" pitchFamily="18" charset="0"/>
+                        </a:rPr>
+                        <a:t>2</a:t>
+                      </a:r>
+                    </a:p>
+                  </a:txBody>
+                  <a:tcPr>
+                    <a:lnL w="12700" cap="flat" cmpd="sng" algn="ctr">
+                      <a:solidFill>
+                        <a:schemeClr val="tx1"/>
+                      </a:solidFill>
+                      <a:prstDash val="solid"/>
+                      <a:round/>
+                      <a:headEnd type="none" w="med" len="med"/>
+                      <a:tailEnd type="none" w="med" len="med"/>
+                    </a:lnL>
+                    <a:lnR w="12700" cap="flat" cmpd="sng" algn="ctr">
+                      <a:solidFill>
+                        <a:schemeClr val="tx1"/>
+                      </a:solidFill>
+                      <a:prstDash val="solid"/>
+                      <a:round/>
+                      <a:headEnd type="none" w="med" len="med"/>
+                      <a:tailEnd type="none" w="med" len="med"/>
+                    </a:lnR>
+                    <a:lnT w="12700" cap="flat" cmpd="sng" algn="ctr">
+                      <a:solidFill>
+                        <a:schemeClr val="tx1"/>
+                      </a:solidFill>
+                      <a:prstDash val="solid"/>
+                      <a:round/>
+                      <a:headEnd type="none" w="med" len="med"/>
+                      <a:tailEnd type="none" w="med" len="med"/>
+                    </a:lnT>
+                    <a:lnB w="12700" cap="flat" cmpd="sng" algn="ctr">
+                      <a:solidFill>
+                        <a:schemeClr val="tx1"/>
+                      </a:solidFill>
+                      <a:prstDash val="solid"/>
+                      <a:round/>
+                      <a:headEnd type="none" w="med" len="med"/>
+                      <a:tailEnd type="none" w="med" len="med"/>
+                    </a:lnB>
+                    <a:noFill/>
+                  </a:tcPr>
+                </a:tc>
+                <a:tc>
+                  <a:txBody>
+                    <a:bodyPr/>
+                    <a:lstStyle/>
+                    <a:p>
+                      <a:pPr marL="0" marR="0" lvl="0" indent="0" algn="l" defTabSz="914400" rtl="0" eaLnBrk="1" fontAlgn="auto" latinLnBrk="0" hangingPunct="1">
+                        <a:lnSpc>
+                          <a:spcPct val="100000"/>
+                        </a:lnSpc>
+                        <a:spcBef>
+                          <a:spcPts val="0"/>
+                        </a:spcBef>
+                        <a:spcAft>
+                          <a:spcPts val="0"/>
+                        </a:spcAft>
+                        <a:buClrTx/>
+                        <a:buSzTx/>
+                        <a:buFontTx/>
+                        <a:buNone/>
+                        <a:tabLst/>
+                        <a:defRPr/>
+                      </a:pPr>
+                      <a:r>
+                        <a:rPr lang="en-US" sz="1200" b="1" dirty="0">
+                          <a:solidFill>
+                            <a:schemeClr val="tx1"/>
+                          </a:solidFill>
+                          <a:latin typeface="Times New Roman" panose="02020603050405020304" pitchFamily="18" charset="0"/>
+                          <a:cs typeface="Times New Roman" panose="02020603050405020304" pitchFamily="18" charset="0"/>
+                        </a:rPr>
+                        <a:t>Unit 1: </a:t>
+                      </a:r>
+                      <a:r>
+                        <a:rPr lang="en-US" sz="1200" dirty="0">
+                          <a:solidFill>
+                            <a:schemeClr val="tx1"/>
+                          </a:solidFill>
+                          <a:latin typeface="Times New Roman" panose="02020603050405020304" pitchFamily="18" charset="0"/>
+                          <a:cs typeface="Times New Roman" panose="02020603050405020304" pitchFamily="18" charset="0"/>
+                        </a:rPr>
+                        <a:t>Typical Animate Features; </a:t>
+                      </a:r>
+                      <a:r>
+                        <a:rPr lang="en-US" sz="1200" b="1" dirty="0">
+                          <a:solidFill>
+                            <a:schemeClr val="tx1"/>
+                          </a:solidFill>
+                          <a:latin typeface="Times New Roman" panose="02020603050405020304" pitchFamily="18" charset="0"/>
+                          <a:cs typeface="Times New Roman" panose="02020603050405020304" pitchFamily="18" charset="0"/>
+                        </a:rPr>
+                        <a:t>Unit 2: </a:t>
+                      </a:r>
+                      <a:r>
+                        <a:rPr lang="en-US" sz="1200" b="0" dirty="0">
+                          <a:solidFill>
+                            <a:schemeClr val="tx1"/>
+                          </a:solidFill>
+                          <a:latin typeface="Times New Roman" panose="02020603050405020304" pitchFamily="18" charset="0"/>
+                          <a:cs typeface="Times New Roman" panose="02020603050405020304" pitchFamily="18" charset="0"/>
+                        </a:rPr>
+                        <a:t>Typical Inanimate Features</a:t>
+                      </a:r>
+                      <a:endParaRPr lang="en-US" sz="1200" dirty="0">
+                        <a:solidFill>
+                          <a:schemeClr val="tx1"/>
+                        </a:solidFill>
+                        <a:latin typeface="Times New Roman" panose="02020603050405020304" pitchFamily="18" charset="0"/>
+                        <a:cs typeface="Times New Roman" panose="02020603050405020304" pitchFamily="18" charset="0"/>
+                      </a:endParaRPr>
+                    </a:p>
+                  </a:txBody>
+                  <a:tcPr>
+                    <a:lnL w="12700" cap="flat" cmpd="sng" algn="ctr">
+                      <a:solidFill>
+                        <a:schemeClr val="tx1"/>
+                      </a:solidFill>
+                      <a:prstDash val="solid"/>
+                      <a:round/>
+                      <a:headEnd type="none" w="med" len="med"/>
+                      <a:tailEnd type="none" w="med" len="med"/>
+                    </a:lnL>
+                    <a:lnR w="12700" cap="flat" cmpd="sng" algn="ctr">
+                      <a:solidFill>
+                        <a:schemeClr val="tx1"/>
+                      </a:solidFill>
+                      <a:prstDash val="solid"/>
+                      <a:round/>
+                      <a:headEnd type="none" w="med" len="med"/>
+                      <a:tailEnd type="none" w="med" len="med"/>
+                    </a:lnR>
+                    <a:lnT w="12700" cap="flat" cmpd="sng" algn="ctr">
+                      <a:solidFill>
+                        <a:schemeClr val="tx1"/>
+                      </a:solidFill>
+                      <a:prstDash val="solid"/>
+                      <a:round/>
+                      <a:headEnd type="none" w="med" len="med"/>
+                      <a:tailEnd type="none" w="med" len="med"/>
+                    </a:lnT>
+                    <a:lnB w="12700" cap="flat" cmpd="sng" algn="ctr">
+                      <a:solidFill>
+                        <a:schemeClr val="tx1"/>
+                      </a:solidFill>
+                      <a:prstDash val="solid"/>
+                      <a:round/>
+                      <a:headEnd type="none" w="med" len="med"/>
+                      <a:tailEnd type="none" w="med" len="med"/>
+                    </a:lnB>
+                    <a:noFill/>
+                  </a:tcPr>
+                </a:tc>
+                <a:extLst>
+                  <a:ext uri="{0D108BD9-81ED-4DB2-BD59-A6C34878D82A}">
+                    <a16:rowId xmlns:a16="http://schemas.microsoft.com/office/drawing/2014/main" val="3357039776"/>
+                  </a:ext>
+                </a:extLst>
+              </a:tr>
+              <a:tr h="370840">
+                <a:tc>
+                  <a:txBody>
+                    <a:bodyPr/>
+                    <a:lstStyle/>
+                    <a:p>
+                      <a:r>
+                        <a:rPr lang="en-US" sz="1200" dirty="0">
+                          <a:solidFill>
+                            <a:schemeClr val="tx1"/>
+                          </a:solidFill>
+                          <a:latin typeface="Times New Roman" panose="02020603050405020304" pitchFamily="18" charset="0"/>
+                          <a:cs typeface="Times New Roman" panose="02020603050405020304" pitchFamily="18" charset="0"/>
+                        </a:rPr>
+                        <a:t>11. Surface Property Right</a:t>
+                      </a:r>
+                    </a:p>
+                  </a:txBody>
+                  <a:tcPr>
+                    <a:lnL w="12700" cap="flat" cmpd="sng" algn="ctr">
+                      <a:solidFill>
+                        <a:schemeClr val="tx1"/>
+                      </a:solidFill>
+                      <a:prstDash val="solid"/>
+                      <a:round/>
+                      <a:headEnd type="none" w="med" len="med"/>
+                      <a:tailEnd type="none" w="med" len="med"/>
+                    </a:lnL>
+                    <a:lnR w="12700" cap="flat" cmpd="sng" algn="ctr">
+                      <a:solidFill>
+                        <a:schemeClr val="tx1"/>
+                      </a:solidFill>
+                      <a:prstDash val="solid"/>
+                      <a:round/>
+                      <a:headEnd type="none" w="med" len="med"/>
+                      <a:tailEnd type="none" w="med" len="med"/>
+                    </a:lnR>
+                    <a:lnT w="12700" cap="flat" cmpd="sng" algn="ctr">
+                      <a:solidFill>
+                        <a:schemeClr val="tx1"/>
+                      </a:solidFill>
+                      <a:prstDash val="solid"/>
+                      <a:round/>
+                      <a:headEnd type="none" w="med" len="med"/>
+                      <a:tailEnd type="none" w="med" len="med"/>
+                    </a:lnT>
+                    <a:lnB w="12700" cap="flat" cmpd="sng" algn="ctr">
+                      <a:solidFill>
+                        <a:schemeClr val="tx1"/>
+                      </a:solidFill>
+                      <a:prstDash val="solid"/>
+                      <a:round/>
+                      <a:headEnd type="none" w="med" len="med"/>
+                      <a:tailEnd type="none" w="med" len="med"/>
+                    </a:lnB>
+                    <a:noFill/>
+                  </a:tcPr>
+                </a:tc>
+                <a:tc>
+                  <a:txBody>
+                    <a:bodyPr/>
+                    <a:lstStyle/>
+                    <a:p>
+                      <a:r>
+                        <a:rPr lang="en-US" sz="1200" dirty="0">
+                          <a:solidFill>
+                            <a:schemeClr val="tx1"/>
+                          </a:solidFill>
+                          <a:latin typeface="Times New Roman" panose="02020603050405020304" pitchFamily="18" charset="0"/>
+                          <a:cs typeface="Times New Roman" panose="02020603050405020304" pitchFamily="18" charset="0"/>
+                        </a:rPr>
+                        <a:t>2</a:t>
+                      </a:r>
+                    </a:p>
+                  </a:txBody>
+                  <a:tcPr>
+                    <a:lnL w="12700" cap="flat" cmpd="sng" algn="ctr">
+                      <a:solidFill>
+                        <a:schemeClr val="tx1"/>
+                      </a:solidFill>
+                      <a:prstDash val="solid"/>
+                      <a:round/>
+                      <a:headEnd type="none" w="med" len="med"/>
+                      <a:tailEnd type="none" w="med" len="med"/>
+                    </a:lnL>
+                    <a:lnR w="12700" cap="flat" cmpd="sng" algn="ctr">
+                      <a:solidFill>
+                        <a:schemeClr val="tx1"/>
+                      </a:solidFill>
+                      <a:prstDash val="solid"/>
+                      <a:round/>
+                      <a:headEnd type="none" w="med" len="med"/>
+                      <a:tailEnd type="none" w="med" len="med"/>
+                    </a:lnR>
+                    <a:lnT w="12700" cap="flat" cmpd="sng" algn="ctr">
+                      <a:solidFill>
+                        <a:schemeClr val="tx1"/>
+                      </a:solidFill>
+                      <a:prstDash val="solid"/>
+                      <a:round/>
+                      <a:headEnd type="none" w="med" len="med"/>
+                      <a:tailEnd type="none" w="med" len="med"/>
+                    </a:lnT>
+                    <a:lnB w="12700" cap="flat" cmpd="sng" algn="ctr">
+                      <a:solidFill>
+                        <a:schemeClr val="tx1"/>
+                      </a:solidFill>
+                      <a:prstDash val="solid"/>
+                      <a:round/>
+                      <a:headEnd type="none" w="med" len="med"/>
+                      <a:tailEnd type="none" w="med" len="med"/>
+                    </a:lnB>
+                    <a:noFill/>
+                  </a:tcPr>
+                </a:tc>
+                <a:tc>
+                  <a:txBody>
+                    <a:bodyPr/>
+                    <a:lstStyle/>
+                    <a:p>
+                      <a:pPr marL="0" marR="0" lvl="0" indent="0" algn="l" defTabSz="914400" rtl="0" eaLnBrk="1" fontAlgn="auto" latinLnBrk="0" hangingPunct="1">
+                        <a:lnSpc>
+                          <a:spcPct val="100000"/>
+                        </a:lnSpc>
+                        <a:spcBef>
+                          <a:spcPts val="0"/>
+                        </a:spcBef>
+                        <a:spcAft>
+                          <a:spcPts val="0"/>
+                        </a:spcAft>
+                        <a:buClrTx/>
+                        <a:buSzTx/>
+                        <a:buFontTx/>
+                        <a:buNone/>
+                        <a:tabLst/>
+                        <a:defRPr/>
+                      </a:pPr>
+                      <a:r>
+                        <a:rPr lang="en-US" sz="1200" b="1" dirty="0">
+                          <a:solidFill>
+                            <a:schemeClr val="tx1"/>
+                          </a:solidFill>
+                          <a:latin typeface="Times New Roman" panose="02020603050405020304" pitchFamily="18" charset="0"/>
+                          <a:cs typeface="Times New Roman" panose="02020603050405020304" pitchFamily="18" charset="0"/>
+                        </a:rPr>
+                        <a:t>Unit 1: </a:t>
+                      </a:r>
+                      <a:r>
+                        <a:rPr lang="en-US" sz="1200" dirty="0">
+                          <a:solidFill>
+                            <a:schemeClr val="tx1"/>
+                          </a:solidFill>
+                          <a:latin typeface="Times New Roman" panose="02020603050405020304" pitchFamily="18" charset="0"/>
+                          <a:cs typeface="Times New Roman" panose="02020603050405020304" pitchFamily="18" charset="0"/>
+                        </a:rPr>
+                        <a:t>Animate-Typical Features; </a:t>
+                      </a:r>
+                      <a:r>
+                        <a:rPr lang="en-US" sz="1200" b="1" dirty="0">
+                          <a:solidFill>
+                            <a:schemeClr val="tx1"/>
+                          </a:solidFill>
+                          <a:latin typeface="Times New Roman" panose="02020603050405020304" pitchFamily="18" charset="0"/>
+                          <a:cs typeface="Times New Roman" panose="02020603050405020304" pitchFamily="18" charset="0"/>
+                        </a:rPr>
+                        <a:t>Unit 2: </a:t>
+                      </a:r>
+                      <a:r>
+                        <a:rPr lang="en-US" sz="1200" b="0" dirty="0">
+                          <a:solidFill>
+                            <a:schemeClr val="tx1"/>
+                          </a:solidFill>
+                          <a:latin typeface="Times New Roman" panose="02020603050405020304" pitchFamily="18" charset="0"/>
+                          <a:cs typeface="Times New Roman" panose="02020603050405020304" pitchFamily="18" charset="0"/>
+                        </a:rPr>
+                        <a:t>Inanimate-Typical Features</a:t>
+                      </a:r>
+                      <a:endParaRPr lang="en-US" sz="1200" dirty="0">
+                        <a:solidFill>
+                          <a:schemeClr val="tx1"/>
+                        </a:solidFill>
+                        <a:latin typeface="Times New Roman" panose="02020603050405020304" pitchFamily="18" charset="0"/>
+                        <a:cs typeface="Times New Roman" panose="02020603050405020304" pitchFamily="18" charset="0"/>
+                      </a:endParaRPr>
+                    </a:p>
+                  </a:txBody>
+                  <a:tcPr>
+                    <a:lnL w="12700" cap="flat" cmpd="sng" algn="ctr">
+                      <a:solidFill>
+                        <a:schemeClr val="tx1"/>
+                      </a:solidFill>
+                      <a:prstDash val="solid"/>
+                      <a:round/>
+                      <a:headEnd type="none" w="med" len="med"/>
+                      <a:tailEnd type="none" w="med" len="med"/>
+                    </a:lnL>
+                    <a:lnR w="12700" cap="flat" cmpd="sng" algn="ctr">
+                      <a:solidFill>
+                        <a:schemeClr val="tx1"/>
+                      </a:solidFill>
+                      <a:prstDash val="solid"/>
+                      <a:round/>
+                      <a:headEnd type="none" w="med" len="med"/>
+                      <a:tailEnd type="none" w="med" len="med"/>
+                    </a:lnR>
+                    <a:lnT w="12700" cap="flat" cmpd="sng" algn="ctr">
+                      <a:solidFill>
+                        <a:schemeClr val="tx1"/>
+                      </a:solidFill>
+                      <a:prstDash val="solid"/>
+                      <a:round/>
+                      <a:headEnd type="none" w="med" len="med"/>
+                      <a:tailEnd type="none" w="med" len="med"/>
+                    </a:lnT>
+                    <a:lnB w="12700" cap="flat" cmpd="sng" algn="ctr">
+                      <a:solidFill>
+                        <a:schemeClr val="tx1"/>
+                      </a:solidFill>
+                      <a:prstDash val="solid"/>
+                      <a:round/>
+                      <a:headEnd type="none" w="med" len="med"/>
+                      <a:tailEnd type="none" w="med" len="med"/>
+                    </a:lnB>
+                    <a:noFill/>
+                  </a:tcPr>
+                </a:tc>
+                <a:extLst>
+                  <a:ext uri="{0D108BD9-81ED-4DB2-BD59-A6C34878D82A}">
+                    <a16:rowId xmlns:a16="http://schemas.microsoft.com/office/drawing/2014/main" val="2824634637"/>
+                  </a:ext>
+                </a:extLst>
+              </a:tr>
+            </a:tbl>
+          </a:graphicData>
+        </a:graphic>
+      </p:graphicFrame>
     </p:spTree>
     <p:extLst>
       <p:ext uri="{BB962C8B-B14F-4D97-AF65-F5344CB8AC3E}">
@@ -4188,7 +7002,7 @@
           </p:nvPr>
         </p:nvGraphicFramePr>
         <p:xfrm>
-          <a:off x="779780" y="117856"/>
+          <a:off x="2784000" y="117856"/>
           <a:ext cx="1286765" cy="1849120"/>
         </p:xfrm>
         <a:graphic>
@@ -5469,7 +8283,7 @@
           </p:nvPr>
         </p:nvGraphicFramePr>
         <p:xfrm>
-          <a:off x="164084" y="1596136"/>
+          <a:off x="2168303" y="1596136"/>
           <a:ext cx="228918" cy="370840"/>
         </p:xfrm>
         <a:graphic>
@@ -5566,7 +8380,7 @@
           </p:nvPr>
         </p:nvGraphicFramePr>
         <p:xfrm>
-          <a:off x="2389315" y="1596136"/>
+          <a:off x="4393534" y="1596136"/>
           <a:ext cx="228918" cy="370840"/>
         </p:xfrm>
         <a:graphic>
@@ -5656,7 +8470,7 @@
         </p:nvSpPr>
         <p:spPr>
           <a:xfrm rot="16424262">
-            <a:off x="2053754" y="757543"/>
+            <a:off x="4057973" y="757544"/>
             <a:ext cx="437712" cy="366087"/>
           </a:xfrm>
           <a:prstGeom prst="arc">
@@ -5717,7 +8531,7 @@
           </p:nvPr>
         </p:nvGraphicFramePr>
         <p:xfrm>
-          <a:off x="5010404" y="117856"/>
+          <a:off x="7014624" y="117856"/>
           <a:ext cx="1286765" cy="1849120"/>
         </p:xfrm>
         <a:graphic>
@@ -6998,7 +9812,7 @@
           </p:nvPr>
         </p:nvGraphicFramePr>
         <p:xfrm>
-          <a:off x="4394708" y="1596136"/>
+          <a:off x="6398927" y="1596136"/>
           <a:ext cx="228918" cy="370840"/>
         </p:xfrm>
         <a:graphic>
@@ -7095,7 +9909,7 @@
           </p:nvPr>
         </p:nvGraphicFramePr>
         <p:xfrm>
-          <a:off x="6619939" y="1596136"/>
+          <a:off x="8624158" y="1596136"/>
           <a:ext cx="228918" cy="370840"/>
         </p:xfrm>
         <a:graphic>
@@ -7185,7 +9999,7 @@
         </p:nvSpPr>
         <p:spPr>
           <a:xfrm rot="16424262">
-            <a:off x="6284378" y="757543"/>
+            <a:off x="8288597" y="757544"/>
             <a:ext cx="437712" cy="366087"/>
           </a:xfrm>
           <a:prstGeom prst="arc">
@@ -7246,7 +10060,7 @@
           </p:nvPr>
         </p:nvGraphicFramePr>
         <p:xfrm>
-          <a:off x="9573767" y="117856"/>
+          <a:off x="11577987" y="117856"/>
           <a:ext cx="1286765" cy="1849120"/>
         </p:xfrm>
         <a:graphic>
@@ -8527,7 +11341,7 @@
           </p:nvPr>
         </p:nvGraphicFramePr>
         <p:xfrm>
-          <a:off x="8958071" y="1596136"/>
+          <a:off x="10962290" y="1596136"/>
           <a:ext cx="228918" cy="370840"/>
         </p:xfrm>
         <a:graphic>
@@ -8624,7 +11438,7 @@
           </p:nvPr>
         </p:nvGraphicFramePr>
         <p:xfrm>
-          <a:off x="11183302" y="1596136"/>
+          <a:off x="13187521" y="1596136"/>
           <a:ext cx="228918" cy="370840"/>
         </p:xfrm>
         <a:graphic>
@@ -8714,7 +11528,7 @@
         </p:nvSpPr>
         <p:spPr>
           <a:xfrm rot="16424262">
-            <a:off x="10847741" y="757543"/>
+            <a:off x="12851960" y="757544"/>
             <a:ext cx="437712" cy="366087"/>
           </a:xfrm>
           <a:prstGeom prst="arc">
@@ -8775,7 +11589,7 @@
           </p:nvPr>
         </p:nvGraphicFramePr>
         <p:xfrm>
-          <a:off x="779780" y="2556256"/>
+          <a:off x="2784000" y="2556256"/>
           <a:ext cx="1286765" cy="1849120"/>
         </p:xfrm>
         <a:graphic>
@@ -10056,7 +12870,7 @@
           </p:nvPr>
         </p:nvGraphicFramePr>
         <p:xfrm>
-          <a:off x="164084" y="4034536"/>
+          <a:off x="2168303" y="4034536"/>
           <a:ext cx="228918" cy="370840"/>
         </p:xfrm>
         <a:graphic>
@@ -10153,7 +12967,7 @@
           </p:nvPr>
         </p:nvGraphicFramePr>
         <p:xfrm>
-          <a:off x="2389315" y="4034536"/>
+          <a:off x="4393534" y="4034536"/>
           <a:ext cx="228918" cy="370840"/>
         </p:xfrm>
         <a:graphic>
@@ -10243,7 +13057,7 @@
         </p:nvSpPr>
         <p:spPr>
           <a:xfrm rot="16424262">
-            <a:off x="2053754" y="3195943"/>
+            <a:off x="4057973" y="3195944"/>
             <a:ext cx="437712" cy="366087"/>
           </a:xfrm>
           <a:prstGeom prst="arc">
@@ -10304,7 +13118,7 @@
           </p:nvPr>
         </p:nvGraphicFramePr>
         <p:xfrm>
-          <a:off x="5010404" y="2556256"/>
+          <a:off x="7014624" y="2556256"/>
           <a:ext cx="1286765" cy="1849120"/>
         </p:xfrm>
         <a:graphic>
@@ -11585,7 +14399,7 @@
           </p:nvPr>
         </p:nvGraphicFramePr>
         <p:xfrm>
-          <a:off x="4394708" y="4034536"/>
+          <a:off x="6398927" y="4034536"/>
           <a:ext cx="228918" cy="370840"/>
         </p:xfrm>
         <a:graphic>
@@ -11682,7 +14496,7 @@
           </p:nvPr>
         </p:nvGraphicFramePr>
         <p:xfrm>
-          <a:off x="6619939" y="4034536"/>
+          <a:off x="8624158" y="4034536"/>
           <a:ext cx="228918" cy="370840"/>
         </p:xfrm>
         <a:graphic>
@@ -11772,7 +14586,7 @@
         </p:nvSpPr>
         <p:spPr>
           <a:xfrm rot="16424262">
-            <a:off x="6284378" y="3195943"/>
+            <a:off x="8288597" y="3195944"/>
             <a:ext cx="437712" cy="366087"/>
           </a:xfrm>
           <a:prstGeom prst="arc">
@@ -11833,7 +14647,7 @@
           </p:nvPr>
         </p:nvGraphicFramePr>
         <p:xfrm>
-          <a:off x="9573767" y="2556256"/>
+          <a:off x="11577987" y="2556256"/>
           <a:ext cx="1286765" cy="1849120"/>
         </p:xfrm>
         <a:graphic>
@@ -13114,7 +15928,7 @@
           </p:nvPr>
         </p:nvGraphicFramePr>
         <p:xfrm>
-          <a:off x="8958071" y="4034536"/>
+          <a:off x="10962290" y="4034536"/>
           <a:ext cx="228918" cy="370840"/>
         </p:xfrm>
         <a:graphic>
@@ -13211,7 +16025,7 @@
           </p:nvPr>
         </p:nvGraphicFramePr>
         <p:xfrm>
-          <a:off x="11183302" y="4034536"/>
+          <a:off x="13187521" y="4034536"/>
           <a:ext cx="228918" cy="370840"/>
         </p:xfrm>
         <a:graphic>
@@ -13301,7 +16115,7 @@
         </p:nvSpPr>
         <p:spPr>
           <a:xfrm rot="16424262">
-            <a:off x="10847741" y="3195943"/>
+            <a:off x="12851960" y="3195944"/>
             <a:ext cx="437712" cy="366087"/>
           </a:xfrm>
           <a:prstGeom prst="arc">
@@ -13362,7 +16176,7 @@
           </p:nvPr>
         </p:nvGraphicFramePr>
         <p:xfrm>
-          <a:off x="779780" y="4702048"/>
+          <a:off x="2784000" y="4702048"/>
           <a:ext cx="1286765" cy="1849120"/>
         </p:xfrm>
         <a:graphic>
@@ -14643,7 +17457,7 @@
           </p:nvPr>
         </p:nvGraphicFramePr>
         <p:xfrm>
-          <a:off x="164084" y="6180328"/>
+          <a:off x="2168303" y="6180328"/>
           <a:ext cx="228918" cy="370840"/>
         </p:xfrm>
         <a:graphic>
@@ -14740,7 +17554,7 @@
           </p:nvPr>
         </p:nvGraphicFramePr>
         <p:xfrm>
-          <a:off x="2389315" y="6180328"/>
+          <a:off x="4393534" y="6180328"/>
           <a:ext cx="228918" cy="370840"/>
         </p:xfrm>
         <a:graphic>
@@ -14830,7 +17644,7 @@
         </p:nvSpPr>
         <p:spPr>
           <a:xfrm rot="16424262">
-            <a:off x="2053754" y="5341735"/>
+            <a:off x="4057973" y="5341736"/>
             <a:ext cx="437712" cy="366087"/>
           </a:xfrm>
           <a:prstGeom prst="arc">
@@ -14891,7 +17705,7 @@
           </p:nvPr>
         </p:nvGraphicFramePr>
         <p:xfrm>
-          <a:off x="5010404" y="4702048"/>
+          <a:off x="7014624" y="4702048"/>
           <a:ext cx="1286765" cy="1849120"/>
         </p:xfrm>
         <a:graphic>
@@ -16172,7 +18986,7 @@
           </p:nvPr>
         </p:nvGraphicFramePr>
         <p:xfrm>
-          <a:off x="4394708" y="6180328"/>
+          <a:off x="6398927" y="6180328"/>
           <a:ext cx="228918" cy="370840"/>
         </p:xfrm>
         <a:graphic>
@@ -16269,7 +19083,7 @@
           </p:nvPr>
         </p:nvGraphicFramePr>
         <p:xfrm>
-          <a:off x="6619939" y="6180328"/>
+          <a:off x="8624158" y="6180328"/>
           <a:ext cx="228918" cy="370840"/>
         </p:xfrm>
         <a:graphic>
@@ -16359,7 +19173,7 @@
         </p:nvSpPr>
         <p:spPr>
           <a:xfrm rot="16424262">
-            <a:off x="6284378" y="5341735"/>
+            <a:off x="8288597" y="5341736"/>
             <a:ext cx="437712" cy="366087"/>
           </a:xfrm>
           <a:prstGeom prst="arc">
@@ -16420,7 +19234,7 @@
           </p:nvPr>
         </p:nvGraphicFramePr>
         <p:xfrm>
-          <a:off x="9573767" y="4702048"/>
+          <a:off x="11577987" y="4702048"/>
           <a:ext cx="1286765" cy="1849120"/>
         </p:xfrm>
         <a:graphic>
@@ -17701,7 +20515,7 @@
           </p:nvPr>
         </p:nvGraphicFramePr>
         <p:xfrm>
-          <a:off x="8958071" y="6180328"/>
+          <a:off x="10962290" y="6180328"/>
           <a:ext cx="228918" cy="370840"/>
         </p:xfrm>
         <a:graphic>
@@ -17798,7 +20612,7 @@
           </p:nvPr>
         </p:nvGraphicFramePr>
         <p:xfrm>
-          <a:off x="11183302" y="6180328"/>
+          <a:off x="13187521" y="6180328"/>
           <a:ext cx="228918" cy="370840"/>
         </p:xfrm>
         <a:graphic>
@@ -17888,7 +20702,7 @@
         </p:nvSpPr>
         <p:spPr>
           <a:xfrm rot="16424262">
-            <a:off x="10847741" y="5341735"/>
+            <a:off x="12851960" y="5341736"/>
             <a:ext cx="437712" cy="366087"/>
           </a:xfrm>
           <a:prstGeom prst="arc">
@@ -17942,7 +20756,7 @@
         </p:nvSpPr>
         <p:spPr>
           <a:xfrm>
-            <a:off x="1221825" y="2038588"/>
+            <a:off x="3226044" y="2038588"/>
             <a:ext cx="402674" cy="369332"/>
           </a:xfrm>
           <a:prstGeom prst="rect">
@@ -18000,6 +20814,321 @@
 </file>
 
 <file path=ppt/theme/theme1.xml><?xml version="1.0" encoding="utf-8"?>
+<a:theme xmlns:a="http://schemas.openxmlformats.org/drawingml/2006/main" name="Office Theme">
+  <a:themeElements>
+    <a:clrScheme name="Office Theme">
+      <a:dk1>
+        <a:sysClr val="windowText" lastClr="000000"/>
+      </a:dk1>
+      <a:lt1>
+        <a:sysClr val="window" lastClr="FFFFFF"/>
+      </a:lt1>
+      <a:dk2>
+        <a:srgbClr val="0E2841"/>
+      </a:dk2>
+      <a:lt2>
+        <a:srgbClr val="E8E8E8"/>
+      </a:lt2>
+      <a:accent1>
+        <a:srgbClr val="156082"/>
+      </a:accent1>
+      <a:accent2>
+        <a:srgbClr val="E97132"/>
+      </a:accent2>
+      <a:accent3>
+        <a:srgbClr val="196B24"/>
+      </a:accent3>
+      <a:accent4>
+        <a:srgbClr val="0F9ED5"/>
+      </a:accent4>
+      <a:accent5>
+        <a:srgbClr val="A02B93"/>
+      </a:accent5>
+      <a:accent6>
+        <a:srgbClr val="4EA72E"/>
+      </a:accent6>
+      <a:hlink>
+        <a:srgbClr val="467886"/>
+      </a:hlink>
+      <a:folHlink>
+        <a:srgbClr val="96607D"/>
+      </a:folHlink>
+    </a:clrScheme>
+    <a:fontScheme name="Office Theme">
+      <a:majorFont>
+        <a:latin typeface="Aptos Display" panose="02110004020202020204"/>
+        <a:ea typeface=""/>
+        <a:cs typeface=""/>
+        <a:font script="Jpan" typeface="游ゴシック Light"/>
+        <a:font script="Hang" typeface="맑은 고딕"/>
+        <a:font script="Hans" typeface="等线 Light"/>
+        <a:font script="Hant" typeface="新細明體"/>
+        <a:font script="Arab" typeface="Times New Roman"/>
+        <a:font script="Hebr" typeface="Times New Roman"/>
+        <a:font script="Thai" typeface="Angsana New"/>
+        <a:font script="Ethi" typeface="Nyala"/>
+        <a:font script="Beng" typeface="Vrinda"/>
+        <a:font script="Gujr" typeface="Shruti"/>
+        <a:font script="Khmr" typeface="MoolBoran"/>
+        <a:font script="Knda" typeface="Tunga"/>
+        <a:font script="Guru" typeface="Raavi"/>
+        <a:font script="Cans" typeface="Euphemia"/>
+        <a:font script="Cher" typeface="Plantagenet Cherokee"/>
+        <a:font script="Yiii" typeface="Microsoft Yi Baiti"/>
+        <a:font script="Tibt" typeface="Microsoft Himalaya"/>
+        <a:font script="Thaa" typeface="MV Boli"/>
+        <a:font script="Deva" typeface="Mangal"/>
+        <a:font script="Telu" typeface="Gautami"/>
+        <a:font script="Taml" typeface="Latha"/>
+        <a:font script="Syrc" typeface="Estrangelo Edessa"/>
+        <a:font script="Orya" typeface="Kalinga"/>
+        <a:font script="Mlym" typeface="Kartika"/>
+        <a:font script="Laoo" typeface="DokChampa"/>
+        <a:font script="Sinh" typeface="Iskoola Pota"/>
+        <a:font script="Mong" typeface="Mongolian Baiti"/>
+        <a:font script="Viet" typeface="Times New Roman"/>
+        <a:font script="Uigh" typeface="Microsoft Uighur"/>
+        <a:font script="Geor" typeface="Sylfaen"/>
+        <a:font script="Armn" typeface="Arial"/>
+        <a:font script="Bugi" typeface="Leelawadee UI"/>
+        <a:font script="Bopo" typeface="Microsoft JhengHei"/>
+        <a:font script="Java" typeface="Javanese Text"/>
+        <a:font script="Lisu" typeface="Segoe UI"/>
+        <a:font script="Mymr" typeface="Myanmar Text"/>
+        <a:font script="Nkoo" typeface="Ebrima"/>
+        <a:font script="Olck" typeface="Nirmala UI"/>
+        <a:font script="Osma" typeface="Ebrima"/>
+        <a:font script="Phag" typeface="Phagspa"/>
+        <a:font script="Syrn" typeface="Estrangelo Edessa"/>
+        <a:font script="Syrj" typeface="Estrangelo Edessa"/>
+        <a:font script="Syre" typeface="Estrangelo Edessa"/>
+        <a:font script="Sora" typeface="Nirmala UI"/>
+        <a:font script="Tale" typeface="Microsoft Tai Le"/>
+        <a:font script="Talu" typeface="Microsoft New Tai Lue"/>
+        <a:font script="Tfng" typeface="Ebrima"/>
+      </a:majorFont>
+      <a:minorFont>
+        <a:latin typeface="Aptos" panose="02110004020202020204"/>
+        <a:ea typeface=""/>
+        <a:cs typeface=""/>
+        <a:font script="Jpan" typeface="游ゴシック"/>
+        <a:font script="Hang" typeface="맑은 고딕"/>
+        <a:font script="Hans" typeface="等线"/>
+        <a:font script="Hant" typeface="新細明體"/>
+        <a:font script="Arab" typeface="Arial"/>
+        <a:font script="Hebr" typeface="Arial"/>
+        <a:font script="Thai" typeface="Cordia New"/>
+        <a:font script="Ethi" typeface="Nyala"/>
+        <a:font script="Beng" typeface="Vrinda"/>
+        <a:font script="Gujr" typeface="Shruti"/>
+        <a:font script="Khmr" typeface="DaunPenh"/>
+        <a:font script="Knda" typeface="Tunga"/>
+        <a:font script="Guru" typeface="Raavi"/>
+        <a:font script="Cans" typeface="Euphemia"/>
+        <a:font script="Cher" typeface="Plantagenet Cherokee"/>
+        <a:font script="Yiii" typeface="Microsoft Yi Baiti"/>
+        <a:font script="Tibt" typeface="Microsoft Himalaya"/>
+        <a:font script="Thaa" typeface="MV Boli"/>
+        <a:font script="Deva" typeface="Mangal"/>
+        <a:font script="Telu" typeface="Gautami"/>
+        <a:font script="Taml" typeface="Latha"/>
+        <a:font script="Syrc" typeface="Estrangelo Edessa"/>
+        <a:font script="Orya" typeface="Kalinga"/>
+        <a:font script="Mlym" typeface="Kartika"/>
+        <a:font script="Laoo" typeface="DokChampa"/>
+        <a:font script="Sinh" typeface="Iskoola Pota"/>
+        <a:font script="Mong" typeface="Mongolian Baiti"/>
+        <a:font script="Viet" typeface="Arial"/>
+        <a:font script="Uigh" typeface="Microsoft Uighur"/>
+        <a:font script="Geor" typeface="Sylfaen"/>
+        <a:font script="Armn" typeface="Arial"/>
+        <a:font script="Bugi" typeface="Leelawadee UI"/>
+        <a:font script="Bopo" typeface="Microsoft JhengHei"/>
+        <a:font script="Java" typeface="Javanese Text"/>
+        <a:font script="Lisu" typeface="Segoe UI"/>
+        <a:font script="Mymr" typeface="Myanmar Text"/>
+        <a:font script="Nkoo" typeface="Ebrima"/>
+        <a:font script="Olck" typeface="Nirmala UI"/>
+        <a:font script="Osma" typeface="Ebrima"/>
+        <a:font script="Phag" typeface="Phagspa"/>
+        <a:font script="Syrn" typeface="Estrangelo Edessa"/>
+        <a:font script="Syrj" typeface="Estrangelo Edessa"/>
+        <a:font script="Syre" typeface="Estrangelo Edessa"/>
+        <a:font script="Sora" typeface="Nirmala UI"/>
+        <a:font script="Tale" typeface="Microsoft Tai Le"/>
+        <a:font script="Talu" typeface="Microsoft New Tai Lue"/>
+        <a:font script="Tfng" typeface="Ebrima"/>
+      </a:minorFont>
+    </a:fontScheme>
+    <a:fmtScheme name="Office Theme">
+      <a:fillStyleLst>
+        <a:solidFill>
+          <a:schemeClr val="phClr"/>
+        </a:solidFill>
+        <a:gradFill rotWithShape="1">
+          <a:gsLst>
+            <a:gs pos="0">
+              <a:schemeClr val="phClr">
+                <a:lumMod val="110000"/>
+                <a:satMod val="105000"/>
+                <a:tint val="67000"/>
+              </a:schemeClr>
+            </a:gs>
+            <a:gs pos="50000">
+              <a:schemeClr val="phClr">
+                <a:lumMod val="105000"/>
+                <a:satMod val="103000"/>
+                <a:tint val="73000"/>
+              </a:schemeClr>
+            </a:gs>
+            <a:gs pos="100000">
+              <a:schemeClr val="phClr">
+                <a:lumMod val="105000"/>
+                <a:satMod val="109000"/>
+                <a:tint val="81000"/>
+              </a:schemeClr>
+            </a:gs>
+          </a:gsLst>
+          <a:lin ang="5400000" scaled="0"/>
+        </a:gradFill>
+        <a:gradFill rotWithShape="1">
+          <a:gsLst>
+            <a:gs pos="0">
+              <a:schemeClr val="phClr">
+                <a:satMod val="103000"/>
+                <a:lumMod val="102000"/>
+                <a:tint val="94000"/>
+              </a:schemeClr>
+            </a:gs>
+            <a:gs pos="50000">
+              <a:schemeClr val="phClr">
+                <a:satMod val="110000"/>
+                <a:lumMod val="100000"/>
+                <a:shade val="100000"/>
+              </a:schemeClr>
+            </a:gs>
+            <a:gs pos="100000">
+              <a:schemeClr val="phClr">
+                <a:lumMod val="99000"/>
+                <a:satMod val="120000"/>
+                <a:shade val="78000"/>
+              </a:schemeClr>
+            </a:gs>
+          </a:gsLst>
+          <a:lin ang="5400000" scaled="0"/>
+        </a:gradFill>
+      </a:fillStyleLst>
+      <a:lnStyleLst>
+        <a:ln w="12700" cap="flat" cmpd="sng" algn="ctr">
+          <a:solidFill>
+            <a:schemeClr val="phClr"/>
+          </a:solidFill>
+          <a:prstDash val="solid"/>
+          <a:miter lim="800000"/>
+        </a:ln>
+        <a:ln w="19050" cap="flat" cmpd="sng" algn="ctr">
+          <a:solidFill>
+            <a:schemeClr val="phClr"/>
+          </a:solidFill>
+          <a:prstDash val="solid"/>
+          <a:miter lim="800000"/>
+        </a:ln>
+        <a:ln w="25400" cap="flat" cmpd="sng" algn="ctr">
+          <a:solidFill>
+            <a:schemeClr val="phClr"/>
+          </a:solidFill>
+          <a:prstDash val="solid"/>
+          <a:miter lim="800000"/>
+        </a:ln>
+      </a:lnStyleLst>
+      <a:effectStyleLst>
+        <a:effectStyle>
+          <a:effectLst/>
+        </a:effectStyle>
+        <a:effectStyle>
+          <a:effectLst/>
+        </a:effectStyle>
+        <a:effectStyle>
+          <a:effectLst>
+            <a:outerShdw blurRad="57150" dist="19050" dir="5400000" algn="ctr" rotWithShape="0">
+              <a:srgbClr val="000000">
+                <a:alpha val="63000"/>
+              </a:srgbClr>
+            </a:outerShdw>
+          </a:effectLst>
+        </a:effectStyle>
+      </a:effectStyleLst>
+      <a:bgFillStyleLst>
+        <a:solidFill>
+          <a:schemeClr val="phClr"/>
+        </a:solidFill>
+        <a:solidFill>
+          <a:schemeClr val="phClr">
+            <a:tint val="95000"/>
+            <a:satMod val="170000"/>
+          </a:schemeClr>
+        </a:solidFill>
+        <a:gradFill rotWithShape="1">
+          <a:gsLst>
+            <a:gs pos="0">
+              <a:schemeClr val="phClr">
+                <a:tint val="93000"/>
+                <a:satMod val="150000"/>
+                <a:shade val="98000"/>
+                <a:lumMod val="102000"/>
+              </a:schemeClr>
+            </a:gs>
+            <a:gs pos="50000">
+              <a:schemeClr val="phClr">
+                <a:tint val="98000"/>
+                <a:satMod val="130000"/>
+                <a:shade val="90000"/>
+                <a:lumMod val="103000"/>
+              </a:schemeClr>
+            </a:gs>
+            <a:gs pos="100000">
+              <a:schemeClr val="phClr">
+                <a:shade val="63000"/>
+                <a:satMod val="120000"/>
+              </a:schemeClr>
+            </a:gs>
+          </a:gsLst>
+          <a:lin ang="5400000" scaled="0"/>
+        </a:gradFill>
+      </a:bgFillStyleLst>
+    </a:fmtScheme>
+  </a:themeElements>
+  <a:objectDefaults>
+    <a:lnDef>
+      <a:spPr/>
+      <a:bodyPr/>
+      <a:lstStyle/>
+      <a:style>
+        <a:lnRef idx="2">
+          <a:schemeClr val="accent1"/>
+        </a:lnRef>
+        <a:fillRef idx="0">
+          <a:schemeClr val="accent1"/>
+        </a:fillRef>
+        <a:effectRef idx="1">
+          <a:schemeClr val="accent1"/>
+        </a:effectRef>
+        <a:fontRef idx="minor">
+          <a:schemeClr val="tx1"/>
+        </a:fontRef>
+      </a:style>
+    </a:lnDef>
+  </a:objectDefaults>
+  <a:extraClrSchemeLst/>
+  <a:extLst>
+    <a:ext uri="{05A4C25C-085E-4340-85A3-A5531E510DB2}">
+      <thm15:themeFamily xmlns:thm15="http://schemas.microsoft.com/office/thememl/2012/main" name="Office Theme" id="{2E142A2C-CD16-42D6-873A-C26D2A0506FA}" vid="{1BDDFF52-6CD6-40A5-AB3C-68EB2F1E4D0A}"/>
+    </a:ext>
+  </a:extLst>
+</a:theme>
+</file>
+
+<file path=ppt/theme/theme2.xml><?xml version="1.0" encoding="utf-8"?>
 <a:theme xmlns:a="http://schemas.openxmlformats.org/drawingml/2006/main" name="Office Theme">
   <a:themeElements>
     <a:clrScheme name="Office">
